--- a/L01-intro-ml/slides/L01_slides_ntu_web.pptx
+++ b/L01-intro-ml/slides/L01_slides_ntu_web.pptx
@@ -2794,7 +2794,7 @@
               <a:buNone/>
             </a:pPr>
             <a:r>
-              <a:rPr lang="en-US" sz="1000" spc="600" kern="0" dirty="0">
+              <a:rPr lang="en-US" sz="1200" spc="600" kern="0" dirty="0">
                 <a:solidFill>
                   <a:srgbClr val="FFFFFF">
                     <a:alpha val="70000"/>
@@ -2806,7 +2806,7 @@
               </a:rPr>
               <a:t>NANYANG TECHNOLOGICAL UNIVERSITY  ·  (SCTP) ADVANCED PROFESSIONAL CERTIFICATE</a:t>
             </a:r>
-            <a:endParaRPr lang="en-US" sz="1000" dirty="0"/>
+            <a:endParaRPr lang="en-US" sz="1200" dirty="0"/>
           </a:p>
         </p:txBody>
       </p:sp>
@@ -2835,7 +2835,7 @@
               <a:buNone/>
             </a:pPr>
             <a:r>
-              <a:rPr lang="en-US" sz="1200" b="1" spc="400" kern="0" dirty="0">
+              <a:rPr lang="en-US" sz="1400" b="1" spc="400" kern="0" dirty="0">
                 <a:solidFill>
                   <a:srgbClr val="C8102E"/>
                 </a:solidFill>
@@ -2845,7 +2845,7 @@
               </a:rPr>
               <a:t>Module 3  ·  Machine Learning &amp; GenAI</a:t>
             </a:r>
-            <a:endParaRPr lang="en-US" sz="1200" dirty="0"/>
+            <a:endParaRPr lang="en-US" sz="1400" dirty="0"/>
           </a:p>
         </p:txBody>
       </p:sp>
@@ -2874,7 +2874,7 @@
               <a:buNone/>
             </a:pPr>
             <a:r>
-              <a:rPr lang="en-US" sz="6400" dirty="0">
+              <a:rPr lang="en-US" sz="7200" dirty="0">
                 <a:solidFill>
                   <a:srgbClr val="C8102E"/>
                 </a:solidFill>
@@ -2884,7 +2884,7 @@
               </a:rPr>
               <a:t>L01</a:t>
             </a:r>
-            <a:endParaRPr lang="en-US" sz="6400" dirty="0"/>
+            <a:endParaRPr lang="en-US" sz="7200" dirty="0"/>
           </a:p>
         </p:txBody>
       </p:sp>
@@ -2913,7 +2913,7 @@
               <a:buNone/>
             </a:pPr>
             <a:r>
-              <a:rPr lang="en-US" sz="7200" spc="-100" kern="0" dirty="0">
+              <a:rPr lang="en-US" sz="7800" spc="-100" kern="0" dirty="0">
                 <a:solidFill>
                   <a:srgbClr val="FFFFFF"/>
                 </a:solidFill>
@@ -2928,7 +2928,7 @@
               <a:buNone/>
             </a:pPr>
             <a:r>
-              <a:rPr lang="en-US" sz="7200" b="1" spc="-100" kern="0" dirty="0">
+              <a:rPr lang="en-US" sz="7800" b="1" spc="-100" kern="0" dirty="0">
                 <a:solidFill>
                   <a:srgbClr val="C8102E"/>
                 </a:solidFill>
@@ -2938,7 +2938,7 @@
               </a:rPr>
               <a:t>Learn.</a:t>
             </a:r>
-            <a:endParaRPr lang="en-US" sz="7200" dirty="0"/>
+            <a:endParaRPr lang="en-US" sz="7800" dirty="0"/>
           </a:p>
         </p:txBody>
       </p:sp>
@@ -2967,7 +2967,7 @@
               <a:buNone/>
             </a:pPr>
             <a:r>
-              <a:rPr lang="en-US" sz="1800" i="1" dirty="0">
+              <a:rPr lang="en-US" sz="2200" i="1" dirty="0">
                 <a:solidFill>
                   <a:srgbClr val="FFFFFF">
                     <a:alpha val="80000"/>
@@ -2979,7 +2979,7 @@
               </a:rPr>
               <a:t>Sarah's Week at NorthStar Retail</a:t>
             </a:r>
-            <a:endParaRPr lang="en-US" sz="1800" dirty="0"/>
+            <a:endParaRPr lang="en-US" sz="2200" dirty="0"/>
           </a:p>
         </p:txBody>
       </p:sp>
@@ -3008,7 +3008,7 @@
               <a:buNone/>
             </a:pPr>
             <a:r>
-              <a:rPr lang="en-US" sz="1000" b="1" spc="400" kern="0" dirty="0">
+              <a:rPr lang="en-US" sz="1200" b="1" spc="400" kern="0" dirty="0">
                 <a:solidFill>
                   <a:srgbClr val="FFFFFF">
                     <a:alpha val="60000"/>
@@ -3020,7 +3020,7 @@
               </a:rPr>
               <a:t>Format:  ~90 min slides  ·  ~90 min hands-on  ·  self-paced extensions</a:t>
             </a:r>
-            <a:endParaRPr lang="en-US" sz="1000" dirty="0"/>
+            <a:endParaRPr lang="en-US" sz="1200" dirty="0"/>
           </a:p>
         </p:txBody>
       </p:sp>
@@ -3106,7 +3106,7 @@
               <a:buNone/>
             </a:pPr>
             <a:r>
-              <a:rPr lang="en-US" sz="1400" b="1" dirty="0">
+              <a:rPr lang="en-US" sz="1600" b="1" dirty="0">
                 <a:solidFill>
                   <a:srgbClr val="FFFFFF"/>
                 </a:solidFill>
@@ -3116,7 +3116,7 @@
               </a:rPr>
               <a:t>Pre-trained Models</a:t>
             </a:r>
-            <a:endParaRPr lang="en-US" sz="1400" dirty="0"/>
+            <a:endParaRPr lang="en-US" sz="1600" dirty="0"/>
           </a:p>
         </p:txBody>
       </p:sp>
@@ -3145,7 +3145,7 @@
               <a:buNone/>
             </a:pPr>
             <a:r>
-              <a:rPr lang="en-US" sz="1000" spc="200" kern="0" dirty="0">
+              <a:rPr lang="en-US" sz="1200" spc="200" kern="0" dirty="0">
                 <a:solidFill>
                   <a:srgbClr val="FFFFFF">
                     <a:alpha val="70000"/>
@@ -3157,7 +3157,7 @@
               </a:rPr>
               <a:t>L01 · Slide 10/22</a:t>
             </a:r>
-            <a:endParaRPr lang="en-US" sz="1000" dirty="0"/>
+            <a:endParaRPr lang="en-US" sz="1200" dirty="0"/>
           </a:p>
         </p:txBody>
       </p:sp>
@@ -3250,7 +3250,7 @@
               <a:buNone/>
             </a:pPr>
             <a:r>
-              <a:rPr lang="en-US" sz="2400" dirty="0">
+              <a:rPr lang="en-US" sz="2800" dirty="0">
                 <a:solidFill>
                   <a:srgbClr val="1B2A4A"/>
                 </a:solidFill>
@@ -3260,7 +3260,7 @@
               </a:rPr>
               <a:t>Someone has often already trained the model for you.</a:t>
             </a:r>
-            <a:endParaRPr lang="en-US" sz="2400" dirty="0"/>
+            <a:endParaRPr lang="en-US" sz="2800" dirty="0"/>
           </a:p>
         </p:txBody>
       </p:sp>
@@ -3339,7 +3339,7 @@
               <a:buNone/>
             </a:pPr>
             <a:r>
-              <a:rPr lang="en-US" sz="1000" b="1" spc="500" kern="0" dirty="0">
+              <a:rPr lang="en-US" sz="1200" b="1" spc="500" kern="0" dirty="0">
                 <a:solidFill>
                   <a:srgbClr val="C8102E"/>
                 </a:solidFill>
@@ -3349,7 +3349,7 @@
               </a:rPr>
               <a:t>KEY INSIGHT</a:t>
             </a:r>
-            <a:endParaRPr lang="en-US" sz="1000" dirty="0"/>
+            <a:endParaRPr lang="en-US" sz="1200" dirty="0"/>
           </a:p>
         </p:txBody>
       </p:sp>
@@ -3378,7 +3378,7 @@
               <a:buNone/>
             </a:pPr>
             <a:r>
-              <a:rPr lang="en-US" sz="1400" i="1" dirty="0">
+              <a:rPr lang="en-US" sz="1600" i="1" dirty="0">
                 <a:solidFill>
                   <a:srgbClr val="1B2A4A"/>
                 </a:solidFill>
@@ -3392,7 +3392,7 @@
               <a:buNone/>
             </a:pPr>
             <a:r>
-              <a:rPr lang="en-US" sz="1400" b="1" i="1" dirty="0">
+              <a:rPr lang="en-US" sz="1600" b="1" i="1" dirty="0">
                 <a:solidFill>
                   <a:srgbClr val="C8102E"/>
                 </a:solidFill>
@@ -3406,7 +3406,7 @@
               <a:buNone/>
             </a:pPr>
             <a:r>
-              <a:rPr lang="en-US" sz="1400" i="1" dirty="0">
+              <a:rPr lang="en-US" sz="1600" i="1" dirty="0">
                 <a:solidFill>
                   <a:srgbClr val="1B2A4A"/>
                 </a:solidFill>
@@ -3416,7 +3416,7 @@
               </a:rPr>
               <a:t>  Load it. Use it. Don't train from scratch unless your task is genuinely unique.</a:t>
             </a:r>
-            <a:endParaRPr lang="en-US" sz="1400" dirty="0"/>
+            <a:endParaRPr lang="en-US" sz="1600" dirty="0"/>
           </a:p>
         </p:txBody>
       </p:sp>
@@ -3495,7 +3495,7 @@
               <a:buNone/>
             </a:pPr>
             <a:r>
-              <a:rPr lang="en-US" sz="1000" b="1" spc="500" kern="0" dirty="0">
+              <a:rPr lang="en-US" sz="1200" b="1" spc="500" kern="0" dirty="0">
                 <a:solidFill>
                   <a:srgbClr val="2C5697"/>
                 </a:solidFill>
@@ -3505,7 +3505,7 @@
               </a:rPr>
               <a:t>WHERE THEY COME FROM</a:t>
             </a:r>
-            <a:endParaRPr lang="en-US" sz="1000" dirty="0"/>
+            <a:endParaRPr lang="en-US" sz="1200" dirty="0"/>
           </a:p>
         </p:txBody>
       </p:sp>
@@ -3537,7 +3537,7 @@
               <a:buNone/>
             </a:pPr>
             <a:r>
-              <a:rPr lang="en-US" sz="1300" dirty="0">
+              <a:rPr lang="en-US" sz="1500" dirty="0">
                 <a:solidFill>
                   <a:srgbClr val="333D4D"/>
                 </a:solidFill>
@@ -3547,7 +3547,7 @@
               </a:rPr>
               <a:t>•  Hugging Face — open repository (hundreds of models)</a:t>
             </a:r>
-            <a:endParaRPr lang="en-US" sz="1300" dirty="0"/>
+            <a:endParaRPr lang="en-US" sz="1500" dirty="0"/>
           </a:p>
           <a:p>
             <a:pPr indent="0" marL="0">
@@ -3557,7 +3557,7 @@
               <a:buNone/>
             </a:pPr>
             <a:r>
-              <a:rPr lang="en-US" sz="1300" dirty="0">
+              <a:rPr lang="en-US" sz="1500" dirty="0">
                 <a:solidFill>
                   <a:srgbClr val="333D4D"/>
                 </a:solidFill>
@@ -3567,7 +3567,7 @@
               </a:rPr>
               <a:t>•  OpenAI, Anthropic, Google — large hosted models</a:t>
             </a:r>
-            <a:endParaRPr lang="en-US" sz="1300" dirty="0"/>
+            <a:endParaRPr lang="en-US" sz="1500" dirty="0"/>
           </a:p>
           <a:p>
             <a:pPr indent="0" marL="0">
@@ -3577,7 +3577,7 @@
               <a:buNone/>
             </a:pPr>
             <a:r>
-              <a:rPr lang="en-US" sz="1300" dirty="0">
+              <a:rPr lang="en-US" sz="1500" dirty="0">
                 <a:solidFill>
                   <a:srgbClr val="333D4D"/>
                 </a:solidFill>
@@ -3587,7 +3587,7 @@
               </a:rPr>
               <a:t>•  Industry-specific repos (medical, legal, finance)</a:t>
             </a:r>
-            <a:endParaRPr lang="en-US" sz="1300" dirty="0"/>
+            <a:endParaRPr lang="en-US" sz="1500" dirty="0"/>
           </a:p>
           <a:p>
             <a:pPr indent="0" marL="0">
@@ -3597,7 +3597,7 @@
               <a:buNone/>
             </a:pPr>
             <a:r>
-              <a:rPr lang="en-US" sz="1300" dirty="0">
+              <a:rPr lang="en-US" sz="1500" dirty="0">
                 <a:solidFill>
                   <a:srgbClr val="333D4D"/>
                 </a:solidFill>
@@ -3607,7 +3607,7 @@
               </a:rPr>
               <a:t>•  Research labs — published with each new paper</a:t>
             </a:r>
-            <a:endParaRPr lang="en-US" sz="1300" dirty="0"/>
+            <a:endParaRPr lang="en-US" sz="1500" dirty="0"/>
           </a:p>
         </p:txBody>
       </p:sp>
@@ -3686,7 +3686,7 @@
               <a:buNone/>
             </a:pPr>
             <a:r>
-              <a:rPr lang="en-US" sz="1000" b="1" spc="500" kern="0" dirty="0">
+              <a:rPr lang="en-US" sz="1200" b="1" spc="500" kern="0" dirty="0">
                 <a:solidFill>
                   <a:srgbClr val="C8102E"/>
                 </a:solidFill>
@@ -3696,7 +3696,7 @@
               </a:rPr>
               <a:t>WHAT SARAH GETS</a:t>
             </a:r>
-            <a:endParaRPr lang="en-US" sz="1000" dirty="0"/>
+            <a:endParaRPr lang="en-US" sz="1200" dirty="0"/>
           </a:p>
         </p:txBody>
       </p:sp>
@@ -3728,7 +3728,7 @@
               <a:buNone/>
             </a:pPr>
             <a:r>
-              <a:rPr lang="en-US" sz="1300" dirty="0">
+              <a:rPr lang="en-US" sz="1500" dirty="0">
                 <a:solidFill>
                   <a:srgbClr val="333D4D"/>
                 </a:solidFill>
@@ -3738,7 +3738,7 @@
               </a:rPr>
               <a:t>✓  A POSITIVE / NEGATIVE label for every review</a:t>
             </a:r>
-            <a:endParaRPr lang="en-US" sz="1300" dirty="0"/>
+            <a:endParaRPr lang="en-US" sz="1500" dirty="0"/>
           </a:p>
           <a:p>
             <a:pPr indent="0" marL="0">
@@ -3748,7 +3748,7 @@
               <a:buNone/>
             </a:pPr>
             <a:r>
-              <a:rPr lang="en-US" sz="1300" dirty="0">
+              <a:rPr lang="en-US" sz="1500" dirty="0">
                 <a:solidFill>
                   <a:srgbClr val="333D4D"/>
                 </a:solidFill>
@@ -3758,7 +3758,7 @@
               </a:rPr>
               <a:t>✓  A confidence score (e.g. 97% POSITIVE)</a:t>
             </a:r>
-            <a:endParaRPr lang="en-US" sz="1300" dirty="0"/>
+            <a:endParaRPr lang="en-US" sz="1500" dirty="0"/>
           </a:p>
           <a:p>
             <a:pPr indent="0" marL="0">
@@ -3768,7 +3768,7 @@
               <a:buNone/>
             </a:pPr>
             <a:r>
-              <a:rPr lang="en-US" sz="1300" dirty="0">
+              <a:rPr lang="en-US" sz="1500" dirty="0">
                 <a:solidFill>
                   <a:srgbClr val="333D4D"/>
                 </a:solidFill>
@@ -3778,7 +3778,7 @@
               </a:rPr>
               <a:t>✓  Can filter to ‘NEGATIVE with &gt;90% confidence’</a:t>
             </a:r>
-            <a:endParaRPr lang="en-US" sz="1300" dirty="0"/>
+            <a:endParaRPr lang="en-US" sz="1500" dirty="0"/>
           </a:p>
           <a:p>
             <a:pPr indent="0" marL="0">
@@ -3788,7 +3788,7 @@
               <a:buNone/>
             </a:pPr>
             <a:r>
-              <a:rPr lang="en-US" sz="1300" dirty="0">
+              <a:rPr lang="en-US" sz="1500" dirty="0">
                 <a:solidFill>
                   <a:srgbClr val="333D4D"/>
                 </a:solidFill>
@@ -3798,7 +3798,7 @@
               </a:rPr>
               <a:t>✓  Runs in minutes — not a workweek</a:t>
             </a:r>
-            <a:endParaRPr lang="en-US" sz="1300" dirty="0"/>
+            <a:endParaRPr lang="en-US" sz="1500" dirty="0"/>
           </a:p>
         </p:txBody>
       </p:sp>
@@ -3884,7 +3884,7 @@
               <a:buNone/>
             </a:pPr>
             <a:r>
-              <a:rPr lang="en-US" sz="900" spc="300" kern="0" dirty="0">
+              <a:rPr lang="en-US" sz="1100" spc="300" kern="0" dirty="0">
                 <a:solidFill>
                   <a:srgbClr val="FFFFFF">
                     <a:alpha val="60000"/>
@@ -3896,7 +3896,7 @@
               </a:rPr>
               <a:t>L01 · Slide 11/22</a:t>
             </a:r>
-            <a:endParaRPr lang="en-US" sz="900" dirty="0"/>
+            <a:endParaRPr lang="en-US" sz="1100" dirty="0"/>
           </a:p>
         </p:txBody>
       </p:sp>
@@ -3952,7 +3952,7 @@
               <a:buNone/>
             </a:pPr>
             <a:r>
-              <a:rPr lang="en-US" sz="1100" b="1" spc="400" kern="0" dirty="0">
+              <a:rPr lang="en-US" sz="1300" b="1" spc="400" kern="0" dirty="0">
                 <a:solidFill>
                   <a:srgbClr val="FFFFFF"/>
                 </a:solidFill>
@@ -3962,7 +3962,7 @@
               </a:rPr>
               <a:t>CODE-ALONG</a:t>
             </a:r>
-            <a:endParaRPr lang="en-US" sz="1100" dirty="0"/>
+            <a:endParaRPr lang="en-US" sz="1300" dirty="0"/>
           </a:p>
         </p:txBody>
       </p:sp>
@@ -3991,7 +3991,7 @@
               <a:buNone/>
             </a:pPr>
             <a:r>
-              <a:rPr lang="en-US" sz="1100" b="1" spc="600" kern="0" dirty="0">
+              <a:rPr lang="en-US" sz="1300" b="1" spc="600" kern="0" dirty="0">
                 <a:solidFill>
                   <a:srgbClr val="FFFFFF">
                     <a:alpha val="70000"/>
@@ -4003,7 +4003,7 @@
               </a:rPr>
               <a:t>HANDS-ON</a:t>
             </a:r>
-            <a:endParaRPr lang="en-US" sz="1100" dirty="0"/>
+            <a:endParaRPr lang="en-US" sz="1300" dirty="0"/>
           </a:p>
         </p:txBody>
       </p:sp>
@@ -4032,7 +4032,7 @@
               <a:buNone/>
             </a:pPr>
             <a:r>
-              <a:rPr lang="en-US" sz="2200" b="1" dirty="0">
+              <a:rPr lang="en-US" sz="2600" b="1" dirty="0">
                 <a:solidFill>
                   <a:srgbClr val="C8102E"/>
                 </a:solidFill>
@@ -4042,7 +4042,7 @@
               </a:rPr>
               <a:t>Open:  02_what_is_ml.ipynb</a:t>
             </a:r>
-            <a:endParaRPr lang="en-US" sz="2200" dirty="0"/>
+            <a:endParaRPr lang="en-US" sz="2600" dirty="0"/>
           </a:p>
         </p:txBody>
       </p:sp>
@@ -4071,7 +4071,7 @@
               <a:buNone/>
             </a:pPr>
             <a:r>
-              <a:rPr lang="en-US" sz="1800" b="1" dirty="0">
+              <a:rPr lang="en-US" sz="2200" b="1" dirty="0">
                 <a:solidFill>
                   <a:srgbClr val="FFFFFF"/>
                 </a:solidFill>
@@ -4081,7 +4081,7 @@
               </a:rPr>
               <a:t>What you'll do</a:t>
             </a:r>
-            <a:endParaRPr lang="en-US" sz="1800" dirty="0"/>
+            <a:endParaRPr lang="en-US" sz="2200" dirty="0"/>
           </a:p>
         </p:txBody>
       </p:sp>
@@ -4135,7 +4135,7 @@
               <a:buNone/>
             </a:pPr>
             <a:r>
-              <a:rPr lang="en-US" sz="1200" b="1" dirty="0">
+              <a:rPr lang="en-US" sz="1400" b="1" dirty="0">
                 <a:solidFill>
                   <a:srgbClr val="FFFFFF"/>
                 </a:solidFill>
@@ -4145,7 +4145,7 @@
               </a:rPr>
               <a:t>1</a:t>
             </a:r>
-            <a:endParaRPr lang="en-US" sz="1200" dirty="0"/>
+            <a:endParaRPr lang="en-US" sz="1400" dirty="0"/>
           </a:p>
         </p:txBody>
       </p:sp>
@@ -4174,7 +4174,7 @@
               <a:buNone/>
             </a:pPr>
             <a:r>
-              <a:rPr lang="en-US" sz="1500" dirty="0">
+              <a:rPr lang="en-US" sz="1700" dirty="0">
                 <a:solidFill>
                   <a:srgbClr val="FFFFFF">
                     <a:alpha val="90000"/>
@@ -4186,7 +4186,7 @@
               </a:rPr>
               <a:t>Run the rule-based sentiment function on 5 reviews — see exactly where it fails.</a:t>
             </a:r>
-            <a:endParaRPr lang="en-US" sz="1500" dirty="0"/>
+            <a:endParaRPr lang="en-US" sz="1700" dirty="0"/>
           </a:p>
         </p:txBody>
       </p:sp>
@@ -4240,7 +4240,7 @@
               <a:buNone/>
             </a:pPr>
             <a:r>
-              <a:rPr lang="en-US" sz="1200" b="1" dirty="0">
+              <a:rPr lang="en-US" sz="1400" b="1" dirty="0">
                 <a:solidFill>
                   <a:srgbClr val="FFFFFF"/>
                 </a:solidFill>
@@ -4250,7 +4250,7 @@
               </a:rPr>
               <a:t>2</a:t>
             </a:r>
-            <a:endParaRPr lang="en-US" sz="1200" dirty="0"/>
+            <a:endParaRPr lang="en-US" sz="1400" dirty="0"/>
           </a:p>
         </p:txBody>
       </p:sp>
@@ -4279,7 +4279,7 @@
               <a:buNone/>
             </a:pPr>
             <a:r>
-              <a:rPr lang="en-US" sz="1500" dirty="0">
+              <a:rPr lang="en-US" sz="1700" dirty="0">
                 <a:solidFill>
                   <a:srgbClr val="FFFFFF">
                     <a:alpha val="90000"/>
@@ -4291,7 +4291,7 @@
               </a:rPr>
               <a:t>Load a pre-trained sentiment model and re-run on the same 5 reviews.</a:t>
             </a:r>
-            <a:endParaRPr lang="en-US" sz="1500" dirty="0"/>
+            <a:endParaRPr lang="en-US" sz="1700" dirty="0"/>
           </a:p>
         </p:txBody>
       </p:sp>
@@ -4345,7 +4345,7 @@
               <a:buNone/>
             </a:pPr>
             <a:r>
-              <a:rPr lang="en-US" sz="1200" b="1" dirty="0">
+              <a:rPr lang="en-US" sz="1400" b="1" dirty="0">
                 <a:solidFill>
                   <a:srgbClr val="FFFFFF"/>
                 </a:solidFill>
@@ -4355,7 +4355,7 @@
               </a:rPr>
               <a:t>3</a:t>
             </a:r>
-            <a:endParaRPr lang="en-US" sz="1200" dirty="0"/>
+            <a:endParaRPr lang="en-US" sz="1400" dirty="0"/>
           </a:p>
         </p:txBody>
       </p:sp>
@@ -4384,7 +4384,7 @@
               <a:buNone/>
             </a:pPr>
             <a:r>
-              <a:rPr lang="en-US" sz="1500" dirty="0">
+              <a:rPr lang="en-US" sz="1700" dirty="0">
                 <a:solidFill>
                   <a:srgbClr val="FFFFFF">
                     <a:alpha val="90000"/>
@@ -4396,7 +4396,7 @@
               </a:rPr>
               <a:t>Notice the confidence score — and what it signals about ambiguous reviews.</a:t>
             </a:r>
-            <a:endParaRPr lang="en-US" sz="1500" dirty="0"/>
+            <a:endParaRPr lang="en-US" sz="1700" dirty="0"/>
           </a:p>
         </p:txBody>
       </p:sp>
@@ -4450,7 +4450,7 @@
               <a:buNone/>
             </a:pPr>
             <a:r>
-              <a:rPr lang="en-US" sz="3200" dirty="0">
+              <a:rPr lang="en-US" sz="3600" dirty="0">
                 <a:solidFill>
                   <a:srgbClr val="C8102E"/>
                 </a:solidFill>
@@ -4460,7 +4460,7 @@
               </a:rPr>
               <a:t>⏱</a:t>
             </a:r>
-            <a:endParaRPr lang="en-US" sz="3200" dirty="0"/>
+            <a:endParaRPr lang="en-US" sz="3600" dirty="0"/>
           </a:p>
         </p:txBody>
       </p:sp>
@@ -4489,7 +4489,7 @@
               <a:buNone/>
             </a:pPr>
             <a:r>
-              <a:rPr lang="en-US" sz="1800" b="1" dirty="0">
+              <a:rPr lang="en-US" sz="2200" b="1" dirty="0">
                 <a:solidFill>
                   <a:srgbClr val="FFFFFF"/>
                 </a:solidFill>
@@ -4503,7 +4503,7 @@
               <a:buNone/>
             </a:pPr>
             <a:r>
-              <a:rPr lang="en-US" sz="1200" dirty="0">
+              <a:rPr lang="en-US" sz="1400" dirty="0">
                 <a:solidFill>
                   <a:srgbClr val="FFFFFF">
                     <a:alpha val="70000"/>
@@ -4515,7 +4515,7 @@
               </a:rPr>
               <a:t>    ·    Stop at the 🟡 Extension marker    ·    Extension is self-paced after class</a:t>
             </a:r>
-            <a:endParaRPr lang="en-US" sz="1800" dirty="0"/>
+            <a:endParaRPr lang="en-US" sz="2200" dirty="0"/>
           </a:p>
         </p:txBody>
       </p:sp>
@@ -4601,7 +4601,7 @@
               <a:buNone/>
             </a:pPr>
             <a:r>
-              <a:rPr lang="en-US" sz="1400" b="1" dirty="0">
+              <a:rPr lang="en-US" sz="1600" b="1" dirty="0">
                 <a:solidFill>
                   <a:srgbClr val="FFFFFF"/>
                 </a:solidFill>
@@ -4611,7 +4611,7 @@
               </a:rPr>
               <a:t>Category 1: Supervised Learning</a:t>
             </a:r>
-            <a:endParaRPr lang="en-US" sz="1400" dirty="0"/>
+            <a:endParaRPr lang="en-US" sz="1600" dirty="0"/>
           </a:p>
         </p:txBody>
       </p:sp>
@@ -4640,7 +4640,7 @@
               <a:buNone/>
             </a:pPr>
             <a:r>
-              <a:rPr lang="en-US" sz="1000" spc="200" kern="0" dirty="0">
+              <a:rPr lang="en-US" sz="1200" spc="200" kern="0" dirty="0">
                 <a:solidFill>
                   <a:srgbClr val="FFFFFF">
                     <a:alpha val="70000"/>
@@ -4652,7 +4652,7 @@
               </a:rPr>
               <a:t>L01 · Slide 12/22</a:t>
             </a:r>
-            <a:endParaRPr lang="en-US" sz="1000" dirty="0"/>
+            <a:endParaRPr lang="en-US" sz="1200" dirty="0"/>
           </a:p>
         </p:txBody>
       </p:sp>
@@ -4770,7 +4770,7 @@
               <a:buNone/>
             </a:pPr>
             <a:r>
-              <a:rPr lang="en-US" sz="1200" b="1" spc="400" kern="0" dirty="0">
+              <a:rPr lang="en-US" sz="1400" b="1" spc="400" kern="0" dirty="0">
                 <a:solidFill>
                   <a:srgbClr val="FFFFFF"/>
                 </a:solidFill>
@@ -4780,7 +4780,7 @@
               </a:rPr>
               <a:t>#1</a:t>
             </a:r>
-            <a:endParaRPr lang="en-US" sz="1200" dirty="0"/>
+            <a:endParaRPr lang="en-US" sz="1400" dirty="0"/>
           </a:p>
         </p:txBody>
       </p:sp>
@@ -4809,7 +4809,7 @@
               <a:buNone/>
             </a:pPr>
             <a:r>
-              <a:rPr lang="en-US" sz="2800" dirty="0">
+              <a:rPr lang="en-US" sz="3200" dirty="0">
                 <a:solidFill>
                   <a:srgbClr val="1B2A4A"/>
                 </a:solidFill>
@@ -4819,7 +4819,7 @@
               </a:rPr>
               <a:t>Supervised Learning</a:t>
             </a:r>
-            <a:endParaRPr lang="en-US" sz="2800" dirty="0"/>
+            <a:endParaRPr lang="en-US" sz="3200" dirty="0"/>
           </a:p>
         </p:txBody>
       </p:sp>
@@ -4898,7 +4898,7 @@
               <a:buNone/>
             </a:pPr>
             <a:r>
-              <a:rPr lang="en-US" sz="1000" b="1" spc="500" kern="0" dirty="0">
+              <a:rPr lang="en-US" sz="1200" b="1" spc="500" kern="0" dirty="0">
                 <a:solidFill>
                   <a:srgbClr val="2C5697"/>
                 </a:solidFill>
@@ -4908,7 +4908,7 @@
               </a:rPr>
               <a:t>PLAIN ENGLISH</a:t>
             </a:r>
-            <a:endParaRPr lang="en-US" sz="1000" dirty="0"/>
+            <a:endParaRPr lang="en-US" sz="1200" dirty="0"/>
           </a:p>
         </p:txBody>
       </p:sp>
@@ -4937,7 +4937,7 @@
               <a:buNone/>
             </a:pPr>
             <a:r>
-              <a:rPr lang="en-US" sz="1500" i="1" dirty="0">
+              <a:rPr lang="en-US" sz="1700" i="1" dirty="0">
                 <a:solidFill>
                   <a:srgbClr val="1B2A4A"/>
                 </a:solidFill>
@@ -4947,7 +4947,7 @@
               </a:rPr>
               <a:t>You give the model inputs and correct answers. It learns to map new inputs to answers it hasn't seen yet.</a:t>
             </a:r>
-            <a:endParaRPr lang="en-US" sz="1500" dirty="0"/>
+            <a:endParaRPr lang="en-US" sz="1700" dirty="0"/>
           </a:p>
         </p:txBody>
       </p:sp>
@@ -5026,7 +5026,7 @@
               <a:buNone/>
             </a:pPr>
             <a:r>
-              <a:rPr lang="en-US" sz="1000" b="1" spc="500" kern="0" dirty="0">
+              <a:rPr lang="en-US" sz="1200" b="1" spc="500" kern="0" dirty="0">
                 <a:solidFill>
                   <a:srgbClr val="2C5697"/>
                 </a:solidFill>
@@ -5036,7 +5036,7 @@
               </a:rPr>
               <a:t>REAL-WORLD ANALOGY</a:t>
             </a:r>
-            <a:endParaRPr lang="en-US" sz="1000" dirty="0"/>
+            <a:endParaRPr lang="en-US" sz="1200" dirty="0"/>
           </a:p>
         </p:txBody>
       </p:sp>
@@ -5065,7 +5065,7 @@
               <a:buNone/>
             </a:pPr>
             <a:r>
-              <a:rPr lang="en-US" sz="1300" dirty="0">
+              <a:rPr lang="en-US" sz="1500" dirty="0">
                 <a:solidFill>
                   <a:srgbClr val="333D4D"/>
                 </a:solidFill>
@@ -5075,7 +5075,7 @@
               </a:rPr>
               <a:t>A student studying past exam papers with answer keys. Many questions, many correct answers. Over time the student learns the patterns and can answer new questions on their own.</a:t>
             </a:r>
-            <a:endParaRPr lang="en-US" sz="1300" dirty="0"/>
+            <a:endParaRPr lang="en-US" sz="1500" dirty="0"/>
           </a:p>
         </p:txBody>
       </p:sp>
@@ -5154,7 +5154,7 @@
               <a:buNone/>
             </a:pPr>
             <a:r>
-              <a:rPr lang="en-US" sz="1000" b="1" spc="500" kern="0" dirty="0">
+              <a:rPr lang="en-US" sz="1200" b="1" spc="500" kern="0" dirty="0">
                 <a:solidFill>
                   <a:srgbClr val="1B2A4A"/>
                 </a:solidFill>
@@ -5164,7 +5164,7 @@
               </a:rPr>
               <a:t>BUSINESS USE CASES</a:t>
             </a:r>
-            <a:endParaRPr lang="en-US" sz="1000" dirty="0"/>
+            <a:endParaRPr lang="en-US" sz="1200" dirty="0"/>
           </a:p>
         </p:txBody>
       </p:sp>
@@ -5196,7 +5196,7 @@
               <a:buNone/>
             </a:pPr>
             <a:r>
-              <a:rPr lang="en-US" sz="1300" dirty="0">
+              <a:rPr lang="en-US" sz="1500" dirty="0">
                 <a:solidFill>
                   <a:srgbClr val="333D4D"/>
                 </a:solidFill>
@@ -5206,7 +5206,7 @@
               </a:rPr>
               <a:t>•  Churn prediction</a:t>
             </a:r>
-            <a:endParaRPr lang="en-US" sz="1300" dirty="0"/>
+            <a:endParaRPr lang="en-US" sz="1500" dirty="0"/>
           </a:p>
           <a:p>
             <a:pPr indent="0" marL="0">
@@ -5216,7 +5216,7 @@
               <a:buNone/>
             </a:pPr>
             <a:r>
-              <a:rPr lang="en-US" sz="1300" dirty="0">
+              <a:rPr lang="en-US" sz="1500" dirty="0">
                 <a:solidFill>
                   <a:srgbClr val="333D4D"/>
                 </a:solidFill>
@@ -5226,7 +5226,7 @@
               </a:rPr>
               <a:t>•  Fraud detection</a:t>
             </a:r>
-            <a:endParaRPr lang="en-US" sz="1300" dirty="0"/>
+            <a:endParaRPr lang="en-US" sz="1500" dirty="0"/>
           </a:p>
           <a:p>
             <a:pPr indent="0" marL="0">
@@ -5236,7 +5236,7 @@
               <a:buNone/>
             </a:pPr>
             <a:r>
-              <a:rPr lang="en-US" sz="1300" dirty="0">
+              <a:rPr lang="en-US" sz="1500" dirty="0">
                 <a:solidFill>
                   <a:srgbClr val="333D4D"/>
                 </a:solidFill>
@@ -5246,7 +5246,7 @@
               </a:rPr>
               <a:t>•  Demand forecasting</a:t>
             </a:r>
-            <a:endParaRPr lang="en-US" sz="1300" dirty="0"/>
+            <a:endParaRPr lang="en-US" sz="1500" dirty="0"/>
           </a:p>
           <a:p>
             <a:pPr indent="0" marL="0">
@@ -5256,7 +5256,7 @@
               <a:buNone/>
             </a:pPr>
             <a:r>
-              <a:rPr lang="en-US" sz="1300" dirty="0">
+              <a:rPr lang="en-US" sz="1500" dirty="0">
                 <a:solidFill>
                   <a:srgbClr val="333D4D"/>
                 </a:solidFill>
@@ -5266,7 +5266,7 @@
               </a:rPr>
               <a:t>•  Sentiment / text classification</a:t>
             </a:r>
-            <a:endParaRPr lang="en-US" sz="1300" dirty="0"/>
+            <a:endParaRPr lang="en-US" sz="1500" dirty="0"/>
           </a:p>
           <a:p>
             <a:pPr indent="0" marL="0">
@@ -5276,7 +5276,7 @@
               <a:buNone/>
             </a:pPr>
             <a:r>
-              <a:rPr lang="en-US" sz="1300" dirty="0">
+              <a:rPr lang="en-US" sz="1500" dirty="0">
                 <a:solidFill>
                   <a:srgbClr val="333D4D"/>
                 </a:solidFill>
@@ -5286,7 +5286,7 @@
               </a:rPr>
               <a:t>•  Medical risk scoring</a:t>
             </a:r>
-            <a:endParaRPr lang="en-US" sz="1300" dirty="0"/>
+            <a:endParaRPr lang="en-US" sz="1500" dirty="0"/>
           </a:p>
           <a:p>
             <a:pPr indent="0" marL="0">
@@ -5296,7 +5296,7 @@
               <a:buNone/>
             </a:pPr>
             <a:r>
-              <a:rPr lang="en-US" sz="1300" dirty="0">
+              <a:rPr lang="en-US" sz="1500" dirty="0">
                 <a:solidFill>
                   <a:srgbClr val="333D4D"/>
                 </a:solidFill>
@@ -5306,7 +5306,7 @@
               </a:rPr>
               <a:t>•  Image labelling (cat vs dog)</a:t>
             </a:r>
-            <a:endParaRPr lang="en-US" sz="1300" dirty="0"/>
+            <a:endParaRPr lang="en-US" sz="1500" dirty="0"/>
           </a:p>
         </p:txBody>
       </p:sp>
@@ -5392,7 +5392,7 @@
               <a:buNone/>
             </a:pPr>
             <a:r>
-              <a:rPr lang="en-US" sz="1400" b="1" dirty="0">
+              <a:rPr lang="en-US" sz="1600" b="1" dirty="0">
                 <a:solidFill>
                   <a:srgbClr val="FFFFFF"/>
                 </a:solidFill>
@@ -5402,7 +5402,7 @@
               </a:rPr>
               <a:t>Category 2: Unsupervised Learning</a:t>
             </a:r>
-            <a:endParaRPr lang="en-US" sz="1400" dirty="0"/>
+            <a:endParaRPr lang="en-US" sz="1600" dirty="0"/>
           </a:p>
         </p:txBody>
       </p:sp>
@@ -5431,7 +5431,7 @@
               <a:buNone/>
             </a:pPr>
             <a:r>
-              <a:rPr lang="en-US" sz="1000" spc="200" kern="0" dirty="0">
+              <a:rPr lang="en-US" sz="1200" spc="200" kern="0" dirty="0">
                 <a:solidFill>
                   <a:srgbClr val="FFFFFF">
                     <a:alpha val="70000"/>
@@ -5443,7 +5443,7 @@
               </a:rPr>
               <a:t>L01 · Slide 13/22</a:t>
             </a:r>
-            <a:endParaRPr lang="en-US" sz="1000" dirty="0"/>
+            <a:endParaRPr lang="en-US" sz="1200" dirty="0"/>
           </a:p>
         </p:txBody>
       </p:sp>
@@ -5561,7 +5561,7 @@
               <a:buNone/>
             </a:pPr>
             <a:r>
-              <a:rPr lang="en-US" sz="1200" b="1" spc="400" kern="0" dirty="0">
+              <a:rPr lang="en-US" sz="1400" b="1" spc="400" kern="0" dirty="0">
                 <a:solidFill>
                   <a:srgbClr val="FFFFFF"/>
                 </a:solidFill>
@@ -5571,7 +5571,7 @@
               </a:rPr>
               <a:t>#2</a:t>
             </a:r>
-            <a:endParaRPr lang="en-US" sz="1200" dirty="0"/>
+            <a:endParaRPr lang="en-US" sz="1400" dirty="0"/>
           </a:p>
         </p:txBody>
       </p:sp>
@@ -5600,7 +5600,7 @@
               <a:buNone/>
             </a:pPr>
             <a:r>
-              <a:rPr lang="en-US" sz="2800" dirty="0">
+              <a:rPr lang="en-US" sz="3200" dirty="0">
                 <a:solidFill>
                   <a:srgbClr val="1B2A4A"/>
                 </a:solidFill>
@@ -5610,7 +5610,7 @@
               </a:rPr>
               <a:t>Unsupervised Learning</a:t>
             </a:r>
-            <a:endParaRPr lang="en-US" sz="2800" dirty="0"/>
+            <a:endParaRPr lang="en-US" sz="3200" dirty="0"/>
           </a:p>
         </p:txBody>
       </p:sp>
@@ -5689,7 +5689,7 @@
               <a:buNone/>
             </a:pPr>
             <a:r>
-              <a:rPr lang="en-US" sz="1000" b="1" spc="500" kern="0" dirty="0">
+              <a:rPr lang="en-US" sz="1200" b="1" spc="500" kern="0" dirty="0">
                 <a:solidFill>
                   <a:srgbClr val="6B4C9A"/>
                 </a:solidFill>
@@ -5699,7 +5699,7 @@
               </a:rPr>
               <a:t>PLAIN ENGLISH</a:t>
             </a:r>
-            <a:endParaRPr lang="en-US" sz="1000" dirty="0"/>
+            <a:endParaRPr lang="en-US" sz="1200" dirty="0"/>
           </a:p>
         </p:txBody>
       </p:sp>
@@ -5728,7 +5728,7 @@
               <a:buNone/>
             </a:pPr>
             <a:r>
-              <a:rPr lang="en-US" sz="1500" i="1" dirty="0">
+              <a:rPr lang="en-US" sz="1700" i="1" dirty="0">
                 <a:solidFill>
                   <a:srgbClr val="1B2A4A"/>
                 </a:solidFill>
@@ -5738,7 +5738,7 @@
               </a:rPr>
               <a:t>You give the model inputs with no answers. It finds groups, patterns, or anomalies on its own.</a:t>
             </a:r>
-            <a:endParaRPr lang="en-US" sz="1500" dirty="0"/>
+            <a:endParaRPr lang="en-US" sz="1700" dirty="0"/>
           </a:p>
         </p:txBody>
       </p:sp>
@@ -5817,7 +5817,7 @@
               <a:buNone/>
             </a:pPr>
             <a:r>
-              <a:rPr lang="en-US" sz="1000" b="1" spc="500" kern="0" dirty="0">
+              <a:rPr lang="en-US" sz="1200" b="1" spc="500" kern="0" dirty="0">
                 <a:solidFill>
                   <a:srgbClr val="6B4C9A"/>
                 </a:solidFill>
@@ -5827,7 +5827,7 @@
               </a:rPr>
               <a:t>REAL-WORLD ANALOGY</a:t>
             </a:r>
-            <a:endParaRPr lang="en-US" sz="1000" dirty="0"/>
+            <a:endParaRPr lang="en-US" sz="1200" dirty="0"/>
           </a:p>
         </p:txBody>
       </p:sp>
@@ -5856,7 +5856,7 @@
               <a:buNone/>
             </a:pPr>
             <a:r>
-              <a:rPr lang="en-US" sz="1300" dirty="0">
+              <a:rPr lang="en-US" sz="1500" dirty="0">
                 <a:solidFill>
                   <a:srgbClr val="333D4D"/>
                 </a:solidFill>
@@ -5866,7 +5866,7 @@
               </a:rPr>
               <a:t>A librarian with a crate of unlabelled books. She groups them by 'these feel similar' — romance here, mystery there — without anyone telling her what the genres are.</a:t>
             </a:r>
-            <a:endParaRPr lang="en-US" sz="1300" dirty="0"/>
+            <a:endParaRPr lang="en-US" sz="1500" dirty="0"/>
           </a:p>
         </p:txBody>
       </p:sp>
@@ -5945,7 +5945,7 @@
               <a:buNone/>
             </a:pPr>
             <a:r>
-              <a:rPr lang="en-US" sz="1000" b="1" spc="500" kern="0" dirty="0">
+              <a:rPr lang="en-US" sz="1200" b="1" spc="500" kern="0" dirty="0">
                 <a:solidFill>
                   <a:srgbClr val="1B2A4A"/>
                 </a:solidFill>
@@ -5955,7 +5955,7 @@
               </a:rPr>
               <a:t>BUSINESS USE CASES</a:t>
             </a:r>
-            <a:endParaRPr lang="en-US" sz="1000" dirty="0"/>
+            <a:endParaRPr lang="en-US" sz="1200" dirty="0"/>
           </a:p>
         </p:txBody>
       </p:sp>
@@ -5987,7 +5987,7 @@
               <a:buNone/>
             </a:pPr>
             <a:r>
-              <a:rPr lang="en-US" sz="1300" dirty="0">
+              <a:rPr lang="en-US" sz="1500" dirty="0">
                 <a:solidFill>
                   <a:srgbClr val="333D4D"/>
                 </a:solidFill>
@@ -5997,7 +5997,7 @@
               </a:rPr>
               <a:t>•  Customer segmentation</a:t>
             </a:r>
-            <a:endParaRPr lang="en-US" sz="1300" dirty="0"/>
+            <a:endParaRPr lang="en-US" sz="1500" dirty="0"/>
           </a:p>
           <a:p>
             <a:pPr indent="0" marL="0">
@@ -6007,7 +6007,7 @@
               <a:buNone/>
             </a:pPr>
             <a:r>
-              <a:rPr lang="en-US" sz="1300" dirty="0">
+              <a:rPr lang="en-US" sz="1500" dirty="0">
                 <a:solidFill>
                   <a:srgbClr val="333D4D"/>
                 </a:solidFill>
@@ -6017,7 +6017,7 @@
               </a:rPr>
               <a:t>•  Anomaly detection in logs</a:t>
             </a:r>
-            <a:endParaRPr lang="en-US" sz="1300" dirty="0"/>
+            <a:endParaRPr lang="en-US" sz="1500" dirty="0"/>
           </a:p>
           <a:p>
             <a:pPr indent="0" marL="0">
@@ -6027,7 +6027,7 @@
               <a:buNone/>
             </a:pPr>
             <a:r>
-              <a:rPr lang="en-US" sz="1300" dirty="0">
+              <a:rPr lang="en-US" sz="1500" dirty="0">
                 <a:solidFill>
                   <a:srgbClr val="333D4D"/>
                 </a:solidFill>
@@ -6037,7 +6037,7 @@
               </a:rPr>
               <a:t>•  Topic discovery in reviews/tickets</a:t>
             </a:r>
-            <a:endParaRPr lang="en-US" sz="1300" dirty="0"/>
+            <a:endParaRPr lang="en-US" sz="1500" dirty="0"/>
           </a:p>
           <a:p>
             <a:pPr indent="0" marL="0">
@@ -6047,7 +6047,7 @@
               <a:buNone/>
             </a:pPr>
             <a:r>
-              <a:rPr lang="en-US" sz="1300" dirty="0">
+              <a:rPr lang="en-US" sz="1500" dirty="0">
                 <a:solidFill>
                   <a:srgbClr val="333D4D"/>
                 </a:solidFill>
@@ -6057,7 +6057,7 @@
               </a:rPr>
               <a:t>•  Recommendation cohorts</a:t>
             </a:r>
-            <a:endParaRPr lang="en-US" sz="1300" dirty="0"/>
+            <a:endParaRPr lang="en-US" sz="1500" dirty="0"/>
           </a:p>
           <a:p>
             <a:pPr indent="0" marL="0">
@@ -6067,7 +6067,7 @@
               <a:buNone/>
             </a:pPr>
             <a:r>
-              <a:rPr lang="en-US" sz="1300" dirty="0">
+              <a:rPr lang="en-US" sz="1500" dirty="0">
                 <a:solidFill>
                   <a:srgbClr val="333D4D"/>
                 </a:solidFill>
@@ -6077,7 +6077,7 @@
               </a:rPr>
               <a:t>•  Pre-processing for downstream supervised models</a:t>
             </a:r>
-            <a:endParaRPr lang="en-US" sz="1300" dirty="0"/>
+            <a:endParaRPr lang="en-US" sz="1500" dirty="0"/>
           </a:p>
         </p:txBody>
       </p:sp>
@@ -6163,7 +6163,7 @@
               <a:buNone/>
             </a:pPr>
             <a:r>
-              <a:rPr lang="en-US" sz="1400" b="1" dirty="0">
+              <a:rPr lang="en-US" sz="1600" b="1" dirty="0">
                 <a:solidFill>
                   <a:srgbClr val="FFFFFF"/>
                 </a:solidFill>
@@ -6173,7 +6173,7 @@
               </a:rPr>
               <a:t>Category 3: Reinforcement Learning</a:t>
             </a:r>
-            <a:endParaRPr lang="en-US" sz="1400" dirty="0"/>
+            <a:endParaRPr lang="en-US" sz="1600" dirty="0"/>
           </a:p>
         </p:txBody>
       </p:sp>
@@ -6202,7 +6202,7 @@
               <a:buNone/>
             </a:pPr>
             <a:r>
-              <a:rPr lang="en-US" sz="1000" spc="200" kern="0" dirty="0">
+              <a:rPr lang="en-US" sz="1200" spc="200" kern="0" dirty="0">
                 <a:solidFill>
                   <a:srgbClr val="FFFFFF">
                     <a:alpha val="70000"/>
@@ -6214,7 +6214,7 @@
               </a:rPr>
               <a:t>L01 · Slide 14/22</a:t>
             </a:r>
-            <a:endParaRPr lang="en-US" sz="1000" dirty="0"/>
+            <a:endParaRPr lang="en-US" sz="1200" dirty="0"/>
           </a:p>
         </p:txBody>
       </p:sp>
@@ -6332,7 +6332,7 @@
               <a:buNone/>
             </a:pPr>
             <a:r>
-              <a:rPr lang="en-US" sz="1200" b="1" spc="400" kern="0" dirty="0">
+              <a:rPr lang="en-US" sz="1400" b="1" spc="400" kern="0" dirty="0">
                 <a:solidFill>
                   <a:srgbClr val="FFFFFF"/>
                 </a:solidFill>
@@ -6342,7 +6342,7 @@
               </a:rPr>
               <a:t>#3</a:t>
             </a:r>
-            <a:endParaRPr lang="en-US" sz="1200" dirty="0"/>
+            <a:endParaRPr lang="en-US" sz="1400" dirty="0"/>
           </a:p>
         </p:txBody>
       </p:sp>
@@ -6371,7 +6371,7 @@
               <a:buNone/>
             </a:pPr>
             <a:r>
-              <a:rPr lang="en-US" sz="2800" dirty="0">
+              <a:rPr lang="en-US" sz="3200" dirty="0">
                 <a:solidFill>
                   <a:srgbClr val="1B2A4A"/>
                 </a:solidFill>
@@ -6381,7 +6381,7 @@
               </a:rPr>
               <a:t>Reinforcement Learning</a:t>
             </a:r>
-            <a:endParaRPr lang="en-US" sz="2800" dirty="0"/>
+            <a:endParaRPr lang="en-US" sz="3200" dirty="0"/>
           </a:p>
         </p:txBody>
       </p:sp>
@@ -6460,7 +6460,7 @@
               <a:buNone/>
             </a:pPr>
             <a:r>
-              <a:rPr lang="en-US" sz="1000" b="1" spc="500" kern="0" dirty="0">
+              <a:rPr lang="en-US" sz="1200" b="1" spc="500" kern="0" dirty="0">
                 <a:solidFill>
                   <a:srgbClr val="C2410C"/>
                 </a:solidFill>
@@ -6470,7 +6470,7 @@
               </a:rPr>
               <a:t>PLAIN ENGLISH</a:t>
             </a:r>
-            <a:endParaRPr lang="en-US" sz="1000" dirty="0"/>
+            <a:endParaRPr lang="en-US" sz="1200" dirty="0"/>
           </a:p>
         </p:txBody>
       </p:sp>
@@ -6499,7 +6499,7 @@
               <a:buNone/>
             </a:pPr>
             <a:r>
-              <a:rPr lang="en-US" sz="1500" i="1" dirty="0">
+              <a:rPr lang="en-US" sz="1700" i="1" dirty="0">
                 <a:solidFill>
                   <a:srgbClr val="1B2A4A"/>
                 </a:solidFill>
@@ -6509,7 +6509,7 @@
               </a:rPr>
               <a:t>An agent acts in an environment. It receives rewards or penalties. It learns the best policy by trial and error.</a:t>
             </a:r>
-            <a:endParaRPr lang="en-US" sz="1500" dirty="0"/>
+            <a:endParaRPr lang="en-US" sz="1700" dirty="0"/>
           </a:p>
         </p:txBody>
       </p:sp>
@@ -6588,7 +6588,7 @@
               <a:buNone/>
             </a:pPr>
             <a:r>
-              <a:rPr lang="en-US" sz="1000" b="1" spc="500" kern="0" dirty="0">
+              <a:rPr lang="en-US" sz="1200" b="1" spc="500" kern="0" dirty="0">
                 <a:solidFill>
                   <a:srgbClr val="C2410C"/>
                 </a:solidFill>
@@ -6598,7 +6598,7 @@
               </a:rPr>
               <a:t>REAL-WORLD ANALOGY</a:t>
             </a:r>
-            <a:endParaRPr lang="en-US" sz="1000" dirty="0"/>
+            <a:endParaRPr lang="en-US" sz="1200" dirty="0"/>
           </a:p>
         </p:txBody>
       </p:sp>
@@ -6627,7 +6627,7 @@
               <a:buNone/>
             </a:pPr>
             <a:r>
-              <a:rPr lang="en-US" sz="1300" dirty="0">
+              <a:rPr lang="en-US" sz="1500" dirty="0">
                 <a:solidFill>
                   <a:srgbClr val="333D4D"/>
                 </a:solidFill>
@@ -6637,7 +6637,7 @@
               </a:rPr>
               <a:t>Training a dog with treats. Sit → treat. Bark at the mailman → no treat. Over time the dog learns which actions pay off.</a:t>
             </a:r>
-            <a:endParaRPr lang="en-US" sz="1300" dirty="0"/>
+            <a:endParaRPr lang="en-US" sz="1500" dirty="0"/>
           </a:p>
         </p:txBody>
       </p:sp>
@@ -6716,7 +6716,7 @@
               <a:buNone/>
             </a:pPr>
             <a:r>
-              <a:rPr lang="en-US" sz="1000" b="1" spc="500" kern="0" dirty="0">
+              <a:rPr lang="en-US" sz="1200" b="1" spc="500" kern="0" dirty="0">
                 <a:solidFill>
                   <a:srgbClr val="1B2A4A"/>
                 </a:solidFill>
@@ -6726,7 +6726,7 @@
               </a:rPr>
               <a:t>BUSINESS USE CASES</a:t>
             </a:r>
-            <a:endParaRPr lang="en-US" sz="1000" dirty="0"/>
+            <a:endParaRPr lang="en-US" sz="1200" dirty="0"/>
           </a:p>
         </p:txBody>
       </p:sp>
@@ -6758,7 +6758,7 @@
               <a:buNone/>
             </a:pPr>
             <a:r>
-              <a:rPr lang="en-US" sz="1300" dirty="0">
+              <a:rPr lang="en-US" sz="1500" dirty="0">
                 <a:solidFill>
                   <a:srgbClr val="333D4D"/>
                 </a:solidFill>
@@ -6768,7 +6768,7 @@
               </a:rPr>
               <a:t>•  AlphaGo, chess-playing AIs</a:t>
             </a:r>
-            <a:endParaRPr lang="en-US" sz="1300" dirty="0"/>
+            <a:endParaRPr lang="en-US" sz="1500" dirty="0"/>
           </a:p>
           <a:p>
             <a:pPr indent="0" marL="0">
@@ -6778,7 +6778,7 @@
               <a:buNone/>
             </a:pPr>
             <a:r>
-              <a:rPr lang="en-US" sz="1300" dirty="0">
+              <a:rPr lang="en-US" sz="1500" dirty="0">
                 <a:solidFill>
                   <a:srgbClr val="333D4D"/>
                 </a:solidFill>
@@ -6788,7 +6788,7 @@
               </a:rPr>
               <a:t>•  Robot control (warehouse pick-and-pack)</a:t>
             </a:r>
-            <a:endParaRPr lang="en-US" sz="1300" dirty="0"/>
+            <a:endParaRPr lang="en-US" sz="1500" dirty="0"/>
           </a:p>
           <a:p>
             <a:pPr indent="0" marL="0">
@@ -6798,7 +6798,7 @@
               <a:buNone/>
             </a:pPr>
             <a:r>
-              <a:rPr lang="en-US" sz="1300" dirty="0">
+              <a:rPr lang="en-US" sz="1500" dirty="0">
                 <a:solidFill>
                   <a:srgbClr val="333D4D"/>
                 </a:solidFill>
@@ -6808,7 +6808,7 @@
               </a:rPr>
               <a:t>•  Large-scale recommendation engines</a:t>
             </a:r>
-            <a:endParaRPr lang="en-US" sz="1300" dirty="0"/>
+            <a:endParaRPr lang="en-US" sz="1500" dirty="0"/>
           </a:p>
           <a:p>
             <a:pPr indent="0" marL="0">
@@ -6818,7 +6818,7 @@
               <a:buNone/>
             </a:pPr>
             <a:r>
-              <a:rPr lang="en-US" sz="1300" dirty="0">
+              <a:rPr lang="en-US" sz="1500" dirty="0">
                 <a:solidFill>
                   <a:srgbClr val="333D4D"/>
                 </a:solidFill>
@@ -6828,7 +6828,7 @@
               </a:rPr>
               <a:t>•  RLHF in modern LLMs</a:t>
             </a:r>
-            <a:endParaRPr lang="en-US" sz="1300" dirty="0"/>
+            <a:endParaRPr lang="en-US" sz="1500" dirty="0"/>
           </a:p>
           <a:p>
             <a:pPr indent="0" marL="0">
@@ -6838,7 +6838,7 @@
               <a:buNone/>
             </a:pPr>
             <a:r>
-              <a:rPr lang="en-US" sz="1300" dirty="0">
+              <a:rPr lang="en-US" sz="1500" dirty="0">
                 <a:solidFill>
                   <a:srgbClr val="333D4D"/>
                 </a:solidFill>
@@ -6848,7 +6848,7 @@
               </a:rPr>
               <a:t>•  Game-playing agents</a:t>
             </a:r>
-            <a:endParaRPr lang="en-US" sz="1300" dirty="0"/>
+            <a:endParaRPr lang="en-US" sz="1500" dirty="0"/>
           </a:p>
           <a:p>
             <a:pPr indent="0" marL="0">
@@ -6858,7 +6858,7 @@
               <a:buNone/>
             </a:pPr>
             <a:r>
-              <a:rPr lang="en-US" sz="1300" dirty="0">
+              <a:rPr lang="en-US" sz="1500" dirty="0">
                 <a:solidFill>
                   <a:srgbClr val="333D4D"/>
                 </a:solidFill>
@@ -6868,7 +6868,7 @@
               </a:rPr>
               <a:t>•  → Not built in this course (recognise, don't implement).</a:t>
             </a:r>
-            <a:endParaRPr lang="en-US" sz="1300" dirty="0"/>
+            <a:endParaRPr lang="en-US" sz="1500" dirty="0"/>
           </a:p>
         </p:txBody>
       </p:sp>
@@ -6954,7 +6954,7 @@
               <a:buNone/>
             </a:pPr>
             <a:r>
-              <a:rPr lang="en-US" sz="900" spc="300" kern="0" dirty="0">
+              <a:rPr lang="en-US" sz="1100" spc="300" kern="0" dirty="0">
                 <a:solidFill>
                   <a:srgbClr val="FFFFFF">
                     <a:alpha val="60000"/>
@@ -6966,7 +6966,7 @@
               </a:rPr>
               <a:t>L01 · Slide 15/22</a:t>
             </a:r>
-            <a:endParaRPr lang="en-US" sz="900" dirty="0"/>
+            <a:endParaRPr lang="en-US" sz="1100" dirty="0"/>
           </a:p>
         </p:txBody>
       </p:sp>
@@ -7022,7 +7022,7 @@
               <a:buNone/>
             </a:pPr>
             <a:r>
-              <a:rPr lang="en-US" sz="1100" b="1" spc="400" kern="0" dirty="0">
+              <a:rPr lang="en-US" sz="1300" b="1" spc="400" kern="0" dirty="0">
                 <a:solidFill>
                   <a:srgbClr val="FFFFFF"/>
                 </a:solidFill>
@@ -7032,7 +7032,7 @@
               </a:rPr>
               <a:t>DISCUSSION</a:t>
             </a:r>
-            <a:endParaRPr lang="en-US" sz="1100" dirty="0"/>
+            <a:endParaRPr lang="en-US" sz="1300" dirty="0"/>
           </a:p>
         </p:txBody>
       </p:sp>
@@ -7061,7 +7061,7 @@
               <a:buNone/>
             </a:pPr>
             <a:r>
-              <a:rPr lang="en-US" sz="1100" b="1" spc="600" kern="0" dirty="0">
+              <a:rPr lang="en-US" sz="1300" b="1" spc="600" kern="0" dirty="0">
                 <a:solidFill>
                   <a:srgbClr val="FFFFFF">
                     <a:alpha val="70000"/>
@@ -7073,7 +7073,7 @@
               </a:rPr>
               <a:t>CONCEPT CHECK</a:t>
             </a:r>
-            <a:endParaRPr lang="en-US" sz="1100" dirty="0"/>
+            <a:endParaRPr lang="en-US" sz="1300" dirty="0"/>
           </a:p>
         </p:txBody>
       </p:sp>
@@ -7102,7 +7102,7 @@
               <a:buNone/>
             </a:pPr>
             <a:r>
-              <a:rPr lang="en-US" sz="2200" b="1" dirty="0">
+              <a:rPr lang="en-US" sz="2600" b="1" dirty="0">
                 <a:solidFill>
                   <a:srgbClr val="3D6DB5"/>
                 </a:solidFill>
@@ -7112,7 +7112,7 @@
               </a:rPr>
               <a:t>Open:  03_three_categories.ipynb</a:t>
             </a:r>
-            <a:endParaRPr lang="en-US" sz="2200" dirty="0"/>
+            <a:endParaRPr lang="en-US" sz="2600" dirty="0"/>
           </a:p>
         </p:txBody>
       </p:sp>
@@ -7141,7 +7141,7 @@
               <a:buNone/>
             </a:pPr>
             <a:r>
-              <a:rPr lang="en-US" sz="1800" b="1" dirty="0">
+              <a:rPr lang="en-US" sz="2200" b="1" dirty="0">
                 <a:solidFill>
                   <a:srgbClr val="FFFFFF"/>
                 </a:solidFill>
@@ -7151,7 +7151,7 @@
               </a:rPr>
               <a:t>Read &amp; discuss</a:t>
             </a:r>
-            <a:endParaRPr lang="en-US" sz="1800" dirty="0"/>
+            <a:endParaRPr lang="en-US" sz="2200" dirty="0"/>
           </a:p>
         </p:txBody>
       </p:sp>
@@ -7205,7 +7205,7 @@
               <a:buNone/>
             </a:pPr>
             <a:r>
-              <a:rPr lang="en-US" sz="1400" b="1" dirty="0">
+              <a:rPr lang="en-US" sz="1600" b="1" dirty="0">
                 <a:solidFill>
                   <a:srgbClr val="FFFFFF"/>
                 </a:solidFill>
@@ -7215,7 +7215,7 @@
               </a:rPr>
               <a:t>→</a:t>
             </a:r>
-            <a:endParaRPr lang="en-US" sz="1400" dirty="0"/>
+            <a:endParaRPr lang="en-US" sz="1600" dirty="0"/>
           </a:p>
         </p:txBody>
       </p:sp>
@@ -7244,7 +7244,7 @@
               <a:buNone/>
             </a:pPr>
             <a:r>
-              <a:rPr lang="en-US" sz="1500" dirty="0">
+              <a:rPr lang="en-US" sz="1700" dirty="0">
                 <a:solidFill>
                   <a:srgbClr val="FFFFFF">
                     <a:alpha val="90000"/>
@@ -7256,7 +7256,7 @@
               </a:rPr>
               <a:t>Read the three category descriptions.</a:t>
             </a:r>
-            <a:endParaRPr lang="en-US" sz="1500" dirty="0"/>
+            <a:endParaRPr lang="en-US" sz="1700" dirty="0"/>
           </a:p>
         </p:txBody>
       </p:sp>
@@ -7310,7 +7310,7 @@
               <a:buNone/>
             </a:pPr>
             <a:r>
-              <a:rPr lang="en-US" sz="1400" b="1" dirty="0">
+              <a:rPr lang="en-US" sz="1600" b="1" dirty="0">
                 <a:solidFill>
                   <a:srgbClr val="FFFFFF"/>
                 </a:solidFill>
@@ -7320,7 +7320,7 @@
               </a:rPr>
               <a:t>→</a:t>
             </a:r>
-            <a:endParaRPr lang="en-US" sz="1400" dirty="0"/>
+            <a:endParaRPr lang="en-US" sz="1600" dirty="0"/>
           </a:p>
         </p:txBody>
       </p:sp>
@@ -7349,7 +7349,7 @@
               <a:buNone/>
             </a:pPr>
             <a:r>
-              <a:rPr lang="en-US" sz="1500" dirty="0">
+              <a:rPr lang="en-US" sz="1700" dirty="0">
                 <a:solidFill>
                   <a:srgbClr val="FFFFFF">
                     <a:alpha val="90000"/>
@@ -7361,7 +7361,7 @@
               </a:rPr>
               <a:t>Try the five business problems — match each to a category.</a:t>
             </a:r>
-            <a:endParaRPr lang="en-US" sz="1500" dirty="0"/>
+            <a:endParaRPr lang="en-US" sz="1700" dirty="0"/>
           </a:p>
         </p:txBody>
       </p:sp>
@@ -7415,7 +7415,7 @@
               <a:buNone/>
             </a:pPr>
             <a:r>
-              <a:rPr lang="en-US" sz="1400" b="1" dirty="0">
+              <a:rPr lang="en-US" sz="1600" b="1" dirty="0">
                 <a:solidFill>
                   <a:srgbClr val="FFFFFF"/>
                 </a:solidFill>
@@ -7425,7 +7425,7 @@
               </a:rPr>
               <a:t>→</a:t>
             </a:r>
-            <a:endParaRPr lang="en-US" sz="1400" dirty="0"/>
+            <a:endParaRPr lang="en-US" sz="1600" dirty="0"/>
           </a:p>
         </p:txBody>
       </p:sp>
@@ -7454,7 +7454,7 @@
               <a:buNone/>
             </a:pPr>
             <a:r>
-              <a:rPr lang="en-US" sz="1500" dirty="0">
+              <a:rPr lang="en-US" sz="1700" dirty="0">
                 <a:solidFill>
                   <a:srgbClr val="FFFFFF">
                     <a:alpha val="90000"/>
@@ -7466,7 +7466,7 @@
               </a:rPr>
               <a:t>Compare your answers with a neighbour before checking the key.</a:t>
             </a:r>
-            <a:endParaRPr lang="en-US" sz="1500" dirty="0"/>
+            <a:endParaRPr lang="en-US" sz="1700" dirty="0"/>
           </a:p>
         </p:txBody>
       </p:sp>
@@ -7520,7 +7520,7 @@
               <a:buNone/>
             </a:pPr>
             <a:r>
-              <a:rPr lang="en-US" sz="3200" dirty="0">
+              <a:rPr lang="en-US" sz="3600" dirty="0">
                 <a:solidFill>
                   <a:srgbClr val="3D6DB5"/>
                 </a:solidFill>
@@ -7530,7 +7530,7 @@
               </a:rPr>
               <a:t>⏱</a:t>
             </a:r>
-            <a:endParaRPr lang="en-US" sz="3200" dirty="0"/>
+            <a:endParaRPr lang="en-US" sz="3600" dirty="0"/>
           </a:p>
         </p:txBody>
       </p:sp>
@@ -7559,7 +7559,7 @@
               <a:buNone/>
             </a:pPr>
             <a:r>
-              <a:rPr lang="en-US" sz="1800" b="1" dirty="0">
+              <a:rPr lang="en-US" sz="2200" b="1" dirty="0">
                 <a:solidFill>
                   <a:srgbClr val="FFFFFF"/>
                 </a:solidFill>
@@ -7573,7 +7573,7 @@
               <a:buNone/>
             </a:pPr>
             <a:r>
-              <a:rPr lang="en-US" sz="1200" dirty="0">
+              <a:rPr lang="en-US" sz="1400" dirty="0">
                 <a:solidFill>
                   <a:srgbClr val="FFFFFF">
                     <a:alpha val="70000"/>
@@ -7585,7 +7585,7 @@
               </a:rPr>
               <a:t>    ·    Concept-only notebook (no Extension)    ·    Discuss freely</a:t>
             </a:r>
-            <a:endParaRPr lang="en-US" sz="1800" dirty="0"/>
+            <a:endParaRPr lang="en-US" sz="2200" dirty="0"/>
           </a:p>
         </p:txBody>
       </p:sp>
@@ -7671,7 +7671,7 @@
               <a:buNone/>
             </a:pPr>
             <a:r>
-              <a:rPr lang="en-US" sz="1400" b="1" dirty="0">
+              <a:rPr lang="en-US" sz="1600" b="1" dirty="0">
                 <a:solidFill>
                   <a:srgbClr val="FFFFFF"/>
                 </a:solidFill>
@@ -7681,7 +7681,7 @@
               </a:rPr>
               <a:t>The 7-Step ML Workflow</a:t>
             </a:r>
-            <a:endParaRPr lang="en-US" sz="1400" dirty="0"/>
+            <a:endParaRPr lang="en-US" sz="1600" dirty="0"/>
           </a:p>
         </p:txBody>
       </p:sp>
@@ -7710,7 +7710,7 @@
               <a:buNone/>
             </a:pPr>
             <a:r>
-              <a:rPr lang="en-US" sz="1000" spc="200" kern="0" dirty="0">
+              <a:rPr lang="en-US" sz="1200" spc="200" kern="0" dirty="0">
                 <a:solidFill>
                   <a:srgbClr val="FFFFFF">
                     <a:alpha val="70000"/>
@@ -7722,7 +7722,7 @@
               </a:rPr>
               <a:t>L01 · Slide 16/22</a:t>
             </a:r>
-            <a:endParaRPr lang="en-US" sz="1000" dirty="0"/>
+            <a:endParaRPr lang="en-US" sz="1200" dirty="0"/>
           </a:p>
         </p:txBody>
       </p:sp>
@@ -7904,7 +7904,7 @@
               <a:buNone/>
             </a:pPr>
             <a:r>
-              <a:rPr lang="en-US" sz="4800" dirty="0">
+              <a:rPr lang="en-US" sz="5400" dirty="0">
                 <a:solidFill>
                   <a:srgbClr val="C8102E"/>
                 </a:solidFill>
@@ -7914,7 +7914,7 @@
               </a:rPr>
               <a:t>1</a:t>
             </a:r>
-            <a:endParaRPr lang="en-US" sz="4800" dirty="0"/>
+            <a:endParaRPr lang="en-US" sz="5400" dirty="0"/>
           </a:p>
         </p:txBody>
       </p:sp>
@@ -7943,7 +7943,7 @@
               <a:buNone/>
             </a:pPr>
             <a:r>
-              <a:rPr lang="en-US" sz="1600" b="1" dirty="0">
+              <a:rPr lang="en-US" sz="1800" b="1" dirty="0">
                 <a:solidFill>
                   <a:srgbClr val="1B2A4A"/>
                 </a:solidFill>
@@ -7953,7 +7953,7 @@
               </a:rPr>
               <a:t>Frame</a:t>
             </a:r>
-            <a:endParaRPr lang="en-US" sz="1600" dirty="0"/>
+            <a:endParaRPr lang="en-US" sz="1800" dirty="0"/>
           </a:p>
         </p:txBody>
       </p:sp>
@@ -7982,7 +7982,7 @@
               <a:buNone/>
             </a:pPr>
             <a:r>
-              <a:rPr lang="en-US" sz="1100" dirty="0">
+              <a:rPr lang="en-US" sz="1300" dirty="0">
                 <a:solidFill>
                   <a:srgbClr val="333D4D"/>
                 </a:solidFill>
@@ -7992,7 +7992,7 @@
               </a:rPr>
               <a:t>Question · success metric · who acts</a:t>
             </a:r>
-            <a:endParaRPr lang="en-US" sz="1100" dirty="0"/>
+            <a:endParaRPr lang="en-US" sz="1300" dirty="0"/>
           </a:p>
         </p:txBody>
       </p:sp>
@@ -8071,7 +8071,7 @@
               <a:buNone/>
             </a:pPr>
             <a:r>
-              <a:rPr lang="en-US" sz="4800" dirty="0">
+              <a:rPr lang="en-US" sz="5400" dirty="0">
                 <a:solidFill>
                   <a:srgbClr val="C8102E"/>
                 </a:solidFill>
@@ -8081,7 +8081,7 @@
               </a:rPr>
               <a:t>2</a:t>
             </a:r>
-            <a:endParaRPr lang="en-US" sz="4800" dirty="0"/>
+            <a:endParaRPr lang="en-US" sz="5400" dirty="0"/>
           </a:p>
         </p:txBody>
       </p:sp>
@@ -8110,7 +8110,7 @@
               <a:buNone/>
             </a:pPr>
             <a:r>
-              <a:rPr lang="en-US" sz="1600" b="1" dirty="0">
+              <a:rPr lang="en-US" sz="1800" b="1" dirty="0">
                 <a:solidFill>
                   <a:srgbClr val="1B2A4A"/>
                 </a:solidFill>
@@ -8120,7 +8120,7 @@
               </a:rPr>
               <a:t>Collect</a:t>
             </a:r>
-            <a:endParaRPr lang="en-US" sz="1600" dirty="0"/>
+            <a:endParaRPr lang="en-US" sz="1800" dirty="0"/>
           </a:p>
         </p:txBody>
       </p:sp>
@@ -8149,7 +8149,7 @@
               <a:buNone/>
             </a:pPr>
             <a:r>
-              <a:rPr lang="en-US" sz="1100" dirty="0">
+              <a:rPr lang="en-US" sz="1300" dirty="0">
                 <a:solidFill>
                   <a:srgbClr val="333D4D"/>
                 </a:solidFill>
@@ -8159,7 +8159,7 @@
               </a:rPr>
               <a:t>Where does the data live?</a:t>
             </a:r>
-            <a:endParaRPr lang="en-US" sz="1100" dirty="0"/>
+            <a:endParaRPr lang="en-US" sz="1300" dirty="0"/>
           </a:p>
         </p:txBody>
       </p:sp>
@@ -8238,7 +8238,7 @@
               <a:buNone/>
             </a:pPr>
             <a:r>
-              <a:rPr lang="en-US" sz="4800" dirty="0">
+              <a:rPr lang="en-US" sz="5400" dirty="0">
                 <a:solidFill>
                   <a:srgbClr val="C8102E"/>
                 </a:solidFill>
@@ -8248,7 +8248,7 @@
               </a:rPr>
               <a:t>3</a:t>
             </a:r>
-            <a:endParaRPr lang="en-US" sz="4800" dirty="0"/>
+            <a:endParaRPr lang="en-US" sz="5400" dirty="0"/>
           </a:p>
         </p:txBody>
       </p:sp>
@@ -8277,7 +8277,7 @@
               <a:buNone/>
             </a:pPr>
             <a:r>
-              <a:rPr lang="en-US" sz="1600" b="1" dirty="0">
+              <a:rPr lang="en-US" sz="1800" b="1" dirty="0">
                 <a:solidFill>
                   <a:srgbClr val="1B2A4A"/>
                 </a:solidFill>
@@ -8287,7 +8287,7 @@
               </a:rPr>
               <a:t>Clean</a:t>
             </a:r>
-            <a:endParaRPr lang="en-US" sz="1600" dirty="0"/>
+            <a:endParaRPr lang="en-US" sz="1800" dirty="0"/>
           </a:p>
         </p:txBody>
       </p:sp>
@@ -8316,7 +8316,7 @@
               <a:buNone/>
             </a:pPr>
             <a:r>
-              <a:rPr lang="en-US" sz="1100" dirty="0">
+              <a:rPr lang="en-US" sz="1300" dirty="0">
                 <a:solidFill>
                   <a:srgbClr val="333D4D"/>
                 </a:solidFill>
@@ -8326,7 +8326,7 @@
               </a:rPr>
               <a:t>Missing · duplicates · bias</a:t>
             </a:r>
-            <a:endParaRPr lang="en-US" sz="1100" dirty="0"/>
+            <a:endParaRPr lang="en-US" sz="1300" dirty="0"/>
           </a:p>
         </p:txBody>
       </p:sp>
@@ -8405,7 +8405,7 @@
               <a:buNone/>
             </a:pPr>
             <a:r>
-              <a:rPr lang="en-US" sz="4800" dirty="0">
+              <a:rPr lang="en-US" sz="5400" dirty="0">
                 <a:solidFill>
                   <a:srgbClr val="1B2A4A"/>
                 </a:solidFill>
@@ -8415,7 +8415,7 @@
               </a:rPr>
               <a:t>4</a:t>
             </a:r>
-            <a:endParaRPr lang="en-US" sz="4800" dirty="0"/>
+            <a:endParaRPr lang="en-US" sz="5400" dirty="0"/>
           </a:p>
         </p:txBody>
       </p:sp>
@@ -8444,7 +8444,7 @@
               <a:buNone/>
             </a:pPr>
             <a:r>
-              <a:rPr lang="en-US" sz="1600" b="1" dirty="0">
+              <a:rPr lang="en-US" sz="1800" b="1" dirty="0">
                 <a:solidFill>
                   <a:srgbClr val="1B2A4A"/>
                 </a:solidFill>
@@ -8454,7 +8454,7 @@
               </a:rPr>
               <a:t>Train</a:t>
             </a:r>
-            <a:endParaRPr lang="en-US" sz="1600" dirty="0"/>
+            <a:endParaRPr lang="en-US" sz="1800" dirty="0"/>
           </a:p>
         </p:txBody>
       </p:sp>
@@ -8483,7 +8483,7 @@
               <a:buNone/>
             </a:pPr>
             <a:r>
-              <a:rPr lang="en-US" sz="1100" dirty="0">
+              <a:rPr lang="en-US" sz="1300" dirty="0">
                 <a:solidFill>
                   <a:srgbClr val="333D4D"/>
                 </a:solidFill>
@@ -8493,7 +8493,7 @@
               </a:rPr>
               <a:t>Fit or reuse a model</a:t>
             </a:r>
-            <a:endParaRPr lang="en-US" sz="1100" dirty="0"/>
+            <a:endParaRPr lang="en-US" sz="1300" dirty="0"/>
           </a:p>
         </p:txBody>
       </p:sp>
@@ -8572,7 +8572,7 @@
               <a:buNone/>
             </a:pPr>
             <a:r>
-              <a:rPr lang="en-US" sz="4800" dirty="0">
+              <a:rPr lang="en-US" sz="5400" dirty="0">
                 <a:solidFill>
                   <a:srgbClr val="1B2A4A"/>
                 </a:solidFill>
@@ -8582,7 +8582,7 @@
               </a:rPr>
               <a:t>5</a:t>
             </a:r>
-            <a:endParaRPr lang="en-US" sz="4800" dirty="0"/>
+            <a:endParaRPr lang="en-US" sz="5400" dirty="0"/>
           </a:p>
         </p:txBody>
       </p:sp>
@@ -8611,7 +8611,7 @@
               <a:buNone/>
             </a:pPr>
             <a:r>
-              <a:rPr lang="en-US" sz="1600" b="1" dirty="0">
+              <a:rPr lang="en-US" sz="1800" b="1" dirty="0">
                 <a:solidFill>
                   <a:srgbClr val="1B2A4A"/>
                 </a:solidFill>
@@ -8621,7 +8621,7 @@
               </a:rPr>
               <a:t>Evaluate</a:t>
             </a:r>
-            <a:endParaRPr lang="en-US" sz="1600" dirty="0"/>
+            <a:endParaRPr lang="en-US" sz="1800" dirty="0"/>
           </a:p>
         </p:txBody>
       </p:sp>
@@ -8650,7 +8650,7 @@
               <a:buNone/>
             </a:pPr>
             <a:r>
-              <a:rPr lang="en-US" sz="1100" dirty="0">
+              <a:rPr lang="en-US" sz="1300" dirty="0">
                 <a:solidFill>
                   <a:srgbClr val="333D4D"/>
                 </a:solidFill>
@@ -8660,7 +8660,7 @@
               </a:rPr>
               <a:t>Hold-out test · where wrong</a:t>
             </a:r>
-            <a:endParaRPr lang="en-US" sz="1100" dirty="0"/>
+            <a:endParaRPr lang="en-US" sz="1300" dirty="0"/>
           </a:p>
         </p:txBody>
       </p:sp>
@@ -8739,7 +8739,7 @@
               <a:buNone/>
             </a:pPr>
             <a:r>
-              <a:rPr lang="en-US" sz="4800" dirty="0">
+              <a:rPr lang="en-US" sz="5400" dirty="0">
                 <a:solidFill>
                   <a:srgbClr val="2C5697"/>
                 </a:solidFill>
@@ -8749,7 +8749,7 @@
               </a:rPr>
               <a:t>6</a:t>
             </a:r>
-            <a:endParaRPr lang="en-US" sz="4800" dirty="0"/>
+            <a:endParaRPr lang="en-US" sz="5400" dirty="0"/>
           </a:p>
         </p:txBody>
       </p:sp>
@@ -8778,7 +8778,7 @@
               <a:buNone/>
             </a:pPr>
             <a:r>
-              <a:rPr lang="en-US" sz="1600" b="1" dirty="0">
+              <a:rPr lang="en-US" sz="1800" b="1" dirty="0">
                 <a:solidFill>
                   <a:srgbClr val="1B2A4A"/>
                 </a:solidFill>
@@ -8788,7 +8788,7 @@
               </a:rPr>
               <a:t>Deploy</a:t>
             </a:r>
-            <a:endParaRPr lang="en-US" sz="1600" dirty="0"/>
+            <a:endParaRPr lang="en-US" sz="1800" dirty="0"/>
           </a:p>
         </p:txBody>
       </p:sp>
@@ -8817,7 +8817,7 @@
               <a:buNone/>
             </a:pPr>
             <a:r>
-              <a:rPr lang="en-US" sz="1100" dirty="0">
+              <a:rPr lang="en-US" sz="1300" dirty="0">
                 <a:solidFill>
                   <a:srgbClr val="333D4D"/>
                 </a:solidFill>
@@ -8827,7 +8827,7 @@
               </a:rPr>
               <a:t>Pipeline · dashboard · API</a:t>
             </a:r>
-            <a:endParaRPr lang="en-US" sz="1100" dirty="0"/>
+            <a:endParaRPr lang="en-US" sz="1300" dirty="0"/>
           </a:p>
         </p:txBody>
       </p:sp>
@@ -8906,7 +8906,7 @@
               <a:buNone/>
             </a:pPr>
             <a:r>
-              <a:rPr lang="en-US" sz="4800" dirty="0">
+              <a:rPr lang="en-US" sz="5400" dirty="0">
                 <a:solidFill>
                   <a:srgbClr val="2C5697"/>
                 </a:solidFill>
@@ -8916,7 +8916,7 @@
               </a:rPr>
               <a:t>7</a:t>
             </a:r>
-            <a:endParaRPr lang="en-US" sz="4800" dirty="0"/>
+            <a:endParaRPr lang="en-US" sz="5400" dirty="0"/>
           </a:p>
         </p:txBody>
       </p:sp>
@@ -8945,7 +8945,7 @@
               <a:buNone/>
             </a:pPr>
             <a:r>
-              <a:rPr lang="en-US" sz="1600" b="1" dirty="0">
+              <a:rPr lang="en-US" sz="1800" b="1" dirty="0">
                 <a:solidFill>
                   <a:srgbClr val="1B2A4A"/>
                 </a:solidFill>
@@ -8955,7 +8955,7 @@
               </a:rPr>
               <a:t>Monitor</a:t>
             </a:r>
-            <a:endParaRPr lang="en-US" sz="1600" dirty="0"/>
+            <a:endParaRPr lang="en-US" sz="1800" dirty="0"/>
           </a:p>
         </p:txBody>
       </p:sp>
@@ -8984,7 +8984,7 @@
               <a:buNone/>
             </a:pPr>
             <a:r>
-              <a:rPr lang="en-US" sz="1100" dirty="0">
+              <a:rPr lang="en-US" sz="1300" dirty="0">
                 <a:solidFill>
                   <a:srgbClr val="333D4D"/>
                 </a:solidFill>
@@ -8994,7 +8994,7 @@
               </a:rPr>
               <a:t>The world changes; models decay</a:t>
             </a:r>
-            <a:endParaRPr lang="en-US" sz="1100" dirty="0"/>
+            <a:endParaRPr lang="en-US" sz="1300" dirty="0"/>
           </a:p>
         </p:txBody>
       </p:sp>
@@ -9023,7 +9023,7 @@
               <a:buNone/>
             </a:pPr>
             <a:r>
-              <a:rPr lang="en-US" sz="1100" b="1" dirty="0">
+              <a:rPr lang="en-US" sz="1300" b="1" dirty="0">
                 <a:solidFill>
                   <a:srgbClr val="C8102E"/>
                 </a:solidFill>
@@ -9037,7 +9037,7 @@
               <a:buNone/>
             </a:pPr>
             <a:r>
-              <a:rPr lang="en-US" sz="1100" b="1" spc="200" kern="0" dirty="0">
+              <a:rPr lang="en-US" sz="1300" b="1" spc="200" kern="0" dirty="0">
                 <a:solidFill>
                   <a:srgbClr val="5F6B7A"/>
                 </a:solidFill>
@@ -9051,7 +9051,7 @@
               <a:buNone/>
             </a:pPr>
             <a:r>
-              <a:rPr lang="en-US" sz="1100" b="1" dirty="0">
+              <a:rPr lang="en-US" sz="1300" b="1" dirty="0">
                 <a:solidFill>
                   <a:srgbClr val="1B2A4A"/>
                 </a:solidFill>
@@ -9065,7 +9065,7 @@
               <a:buNone/>
             </a:pPr>
             <a:r>
-              <a:rPr lang="en-US" sz="1100" b="1" spc="200" kern="0" dirty="0">
+              <a:rPr lang="en-US" sz="1300" b="1" spc="200" kern="0" dirty="0">
                 <a:solidFill>
                   <a:srgbClr val="5F6B7A"/>
                 </a:solidFill>
@@ -9079,7 +9079,7 @@
               <a:buNone/>
             </a:pPr>
             <a:r>
-              <a:rPr lang="en-US" sz="1100" b="1" dirty="0">
+              <a:rPr lang="en-US" sz="1300" b="1" dirty="0">
                 <a:solidFill>
                   <a:srgbClr val="2C5697"/>
                 </a:solidFill>
@@ -9093,7 +9093,7 @@
               <a:buNone/>
             </a:pPr>
             <a:r>
-              <a:rPr lang="en-US" sz="1100" b="1" spc="200" kern="0" dirty="0">
+              <a:rPr lang="en-US" sz="1300" b="1" spc="200" kern="0" dirty="0">
                 <a:solidFill>
                   <a:srgbClr val="5F6B7A"/>
                 </a:solidFill>
@@ -9103,7 +9103,7 @@
               </a:rPr>
               <a:t>Deploy · Monitor (≈17%)</a:t>
             </a:r>
-            <a:endParaRPr lang="en-US" sz="1100" dirty="0"/>
+            <a:endParaRPr lang="en-US" sz="1300" dirty="0"/>
           </a:p>
         </p:txBody>
       </p:sp>
@@ -9189,7 +9189,7 @@
               <a:buNone/>
             </a:pPr>
             <a:r>
-              <a:rPr lang="en-US" sz="1400" b="1" dirty="0">
+              <a:rPr lang="en-US" sz="1600" b="1" dirty="0">
                 <a:solidFill>
                   <a:srgbClr val="FFFFFF"/>
                 </a:solidFill>
@@ -9199,7 +9199,7 @@
               </a:rPr>
               <a:t>Where the Time Actually Goes</a:t>
             </a:r>
-            <a:endParaRPr lang="en-US" sz="1400" dirty="0"/>
+            <a:endParaRPr lang="en-US" sz="1600" dirty="0"/>
           </a:p>
         </p:txBody>
       </p:sp>
@@ -9228,7 +9228,7 @@
               <a:buNone/>
             </a:pPr>
             <a:r>
-              <a:rPr lang="en-US" sz="1000" spc="200" kern="0" dirty="0">
+              <a:rPr lang="en-US" sz="1200" spc="200" kern="0" dirty="0">
                 <a:solidFill>
                   <a:srgbClr val="FFFFFF">
                     <a:alpha val="70000"/>
@@ -9240,7 +9240,7 @@
               </a:rPr>
               <a:t>L01 · Slide 17/22</a:t>
             </a:r>
-            <a:endParaRPr lang="en-US" sz="1000" dirty="0"/>
+            <a:endParaRPr lang="en-US" sz="1200" dirty="0"/>
           </a:p>
         </p:txBody>
       </p:sp>
@@ -9372,7 +9372,7 @@
               <a:buNone/>
             </a:pPr>
             <a:r>
-              <a:rPr lang="en-US" sz="1300" b="1" spc="300" kern="0" dirty="0">
+              <a:rPr lang="en-US" sz="1500" b="1" spc="300" kern="0" dirty="0">
                 <a:solidFill>
                   <a:srgbClr val="5F6B7A"/>
                 </a:solidFill>
@@ -9382,7 +9382,7 @@
               </a:rPr>
               <a:t>Steps 1-3</a:t>
             </a:r>
-            <a:endParaRPr lang="en-US" sz="1300" dirty="0"/>
+            <a:endParaRPr lang="en-US" sz="1500" dirty="0"/>
           </a:p>
         </p:txBody>
       </p:sp>
@@ -9411,7 +9411,7 @@
               <a:buNone/>
             </a:pPr>
             <a:r>
-              <a:rPr lang="en-US" sz="1000" spc="200" kern="0" dirty="0">
+              <a:rPr lang="en-US" sz="1200" spc="200" kern="0" dirty="0">
                 <a:solidFill>
                   <a:srgbClr val="5F6B7A"/>
                 </a:solidFill>
@@ -9421,7 +9421,7 @@
               </a:rPr>
               <a:t>Frame · Collect · Clean</a:t>
             </a:r>
-            <a:endParaRPr lang="en-US" sz="1000" dirty="0"/>
+            <a:endParaRPr lang="en-US" sz="1200" dirty="0"/>
           </a:p>
         </p:txBody>
       </p:sp>
@@ -9500,7 +9500,7 @@
               <a:buNone/>
             </a:pPr>
             <a:r>
-              <a:rPr lang="en-US" sz="3200" dirty="0">
+              <a:rPr lang="en-US" sz="3600" dirty="0">
                 <a:solidFill>
                   <a:srgbClr val="C8102E"/>
                 </a:solidFill>
@@ -9510,7 +9510,7 @@
               </a:rPr>
               <a:t>65%</a:t>
             </a:r>
-            <a:endParaRPr lang="en-US" sz="3200" dirty="0"/>
+            <a:endParaRPr lang="en-US" sz="3600" dirty="0"/>
           </a:p>
         </p:txBody>
       </p:sp>
@@ -9539,7 +9539,7 @@
               <a:buNone/>
             </a:pPr>
             <a:r>
-              <a:rPr lang="en-US" sz="1300" b="1" spc="300" kern="0" dirty="0">
+              <a:rPr lang="en-US" sz="1500" b="1" spc="300" kern="0" dirty="0">
                 <a:solidFill>
                   <a:srgbClr val="5F6B7A"/>
                 </a:solidFill>
@@ -9549,7 +9549,7 @@
               </a:rPr>
               <a:t>Steps 4-5</a:t>
             </a:r>
-            <a:endParaRPr lang="en-US" sz="1300" dirty="0"/>
+            <a:endParaRPr lang="en-US" sz="1500" dirty="0"/>
           </a:p>
         </p:txBody>
       </p:sp>
@@ -9578,7 +9578,7 @@
               <a:buNone/>
             </a:pPr>
             <a:r>
-              <a:rPr lang="en-US" sz="1000" spc="200" kern="0" dirty="0">
+              <a:rPr lang="en-US" sz="1200" spc="200" kern="0" dirty="0">
                 <a:solidFill>
                   <a:srgbClr val="5F6B7A"/>
                 </a:solidFill>
@@ -9588,7 +9588,7 @@
               </a:rPr>
               <a:t>Train · Evaluate</a:t>
             </a:r>
-            <a:endParaRPr lang="en-US" sz="1000" dirty="0"/>
+            <a:endParaRPr lang="en-US" sz="1200" dirty="0"/>
           </a:p>
         </p:txBody>
       </p:sp>
@@ -9667,7 +9667,7 @@
               <a:buNone/>
             </a:pPr>
             <a:r>
-              <a:rPr lang="en-US" sz="3200" dirty="0">
+              <a:rPr lang="en-US" sz="3600" dirty="0">
                 <a:solidFill>
                   <a:srgbClr val="1B2A4A"/>
                 </a:solidFill>
@@ -9677,7 +9677,7 @@
               </a:rPr>
               <a:t>15%</a:t>
             </a:r>
-            <a:endParaRPr lang="en-US" sz="3200" dirty="0"/>
+            <a:endParaRPr lang="en-US" sz="3600" dirty="0"/>
           </a:p>
         </p:txBody>
       </p:sp>
@@ -9706,7 +9706,7 @@
               <a:buNone/>
             </a:pPr>
             <a:r>
-              <a:rPr lang="en-US" sz="1300" b="1" spc="300" kern="0" dirty="0">
+              <a:rPr lang="en-US" sz="1500" b="1" spc="300" kern="0" dirty="0">
                 <a:solidFill>
                   <a:srgbClr val="5F6B7A"/>
                 </a:solidFill>
@@ -9716,7 +9716,7 @@
               </a:rPr>
               <a:t>Steps 6-7</a:t>
             </a:r>
-            <a:endParaRPr lang="en-US" sz="1300" dirty="0"/>
+            <a:endParaRPr lang="en-US" sz="1500" dirty="0"/>
           </a:p>
         </p:txBody>
       </p:sp>
@@ -9745,7 +9745,7 @@
               <a:buNone/>
             </a:pPr>
             <a:r>
-              <a:rPr lang="en-US" sz="1000" spc="200" kern="0" dirty="0">
+              <a:rPr lang="en-US" sz="1200" spc="200" kern="0" dirty="0">
                 <a:solidFill>
                   <a:srgbClr val="5F6B7A"/>
                 </a:solidFill>
@@ -9755,7 +9755,7 @@
               </a:rPr>
               <a:t>Deploy · Monitor</a:t>
             </a:r>
-            <a:endParaRPr lang="en-US" sz="1000" dirty="0"/>
+            <a:endParaRPr lang="en-US" sz="1200" dirty="0"/>
           </a:p>
         </p:txBody>
       </p:sp>
@@ -9834,7 +9834,7 @@
               <a:buNone/>
             </a:pPr>
             <a:r>
-              <a:rPr lang="en-US" sz="3200" dirty="0">
+              <a:rPr lang="en-US" sz="3600" dirty="0">
                 <a:solidFill>
                   <a:srgbClr val="2C5697"/>
                 </a:solidFill>
@@ -9844,7 +9844,7 @@
               </a:rPr>
               <a:t>20%</a:t>
             </a:r>
-            <a:endParaRPr lang="en-US" sz="3200" dirty="0"/>
+            <a:endParaRPr lang="en-US" sz="3600" dirty="0"/>
           </a:p>
         </p:txBody>
       </p:sp>
@@ -9923,7 +9923,7 @@
               <a:buNone/>
             </a:pPr>
             <a:r>
-              <a:rPr lang="en-US" sz="1500" i="1" dirty="0">
+              <a:rPr lang="en-US" sz="1700" i="1" dirty="0">
                 <a:solidFill>
                   <a:srgbClr val="1B2A4A"/>
                 </a:solidFill>
@@ -9937,7 +9937,7 @@
               <a:buNone/>
             </a:pPr>
             <a:r>
-              <a:rPr lang="en-US" sz="1500" b="1" i="1" dirty="0">
+              <a:rPr lang="en-US" sz="1700" b="1" i="1" dirty="0">
                 <a:solidFill>
                   <a:srgbClr val="C8102E"/>
                 </a:solidFill>
@@ -9951,7 +9951,7 @@
               <a:buNone/>
             </a:pPr>
             <a:r>
-              <a:rPr lang="en-US" sz="1500" i="1" dirty="0">
+              <a:rPr lang="en-US" sz="1700" i="1" dirty="0">
                 <a:solidFill>
                   <a:srgbClr val="1B2A4A"/>
                 </a:solidFill>
@@ -9961,7 +9961,7 @@
               </a:rPr>
               <a:t>  Not at Step 4.</a:t>
             </a:r>
-            <a:endParaRPr lang="en-US" sz="1500" dirty="0"/>
+            <a:endParaRPr lang="en-US" sz="1700" dirty="0"/>
           </a:p>
         </p:txBody>
       </p:sp>
@@ -10047,7 +10047,7 @@
               <a:buNone/>
             </a:pPr>
             <a:r>
-              <a:rPr lang="en-US" sz="1400" b="1" dirty="0">
+              <a:rPr lang="en-US" sz="1600" b="1" dirty="0">
                 <a:solidFill>
                   <a:srgbClr val="FFFFFF"/>
                 </a:solidFill>
@@ -10057,7 +10057,7 @@
               </a:rPr>
               <a:t>The 7 Steps — Cheatsheet</a:t>
             </a:r>
-            <a:endParaRPr lang="en-US" sz="1400" dirty="0"/>
+            <a:endParaRPr lang="en-US" sz="1600" dirty="0"/>
           </a:p>
         </p:txBody>
       </p:sp>
@@ -10086,7 +10086,7 @@
               <a:buNone/>
             </a:pPr>
             <a:r>
-              <a:rPr lang="en-US" sz="1000" spc="200" kern="0" dirty="0">
+              <a:rPr lang="en-US" sz="1200" spc="200" kern="0" dirty="0">
                 <a:solidFill>
                   <a:srgbClr val="FFFFFF">
                     <a:alpha val="70000"/>
@@ -10098,7 +10098,7 @@
               </a:rPr>
               <a:t>L01 · Slide 18/22</a:t>
             </a:r>
-            <a:endParaRPr lang="en-US" sz="1000" dirty="0"/>
+            <a:endParaRPr lang="en-US" sz="1200" dirty="0"/>
           </a:p>
         </p:txBody>
       </p:sp>
@@ -10191,7 +10191,7 @@
               <a:buNone/>
             </a:pPr>
             <a:r>
-              <a:rPr lang="en-US" sz="2400" dirty="0">
+              <a:rPr lang="en-US" sz="2800" dirty="0">
                 <a:solidFill>
                   <a:srgbClr val="1B2A4A"/>
                 </a:solidFill>
@@ -10201,7 +10201,7 @@
               </a:rPr>
               <a:t>Use this as your checklist. Every project.</a:t>
             </a:r>
-            <a:endParaRPr lang="en-US" sz="2400" dirty="0"/>
+            <a:endParaRPr lang="en-US" sz="2800" dirty="0"/>
           </a:p>
         </p:txBody>
       </p:sp>
@@ -10242,7 +10242,7 @@
                         <a:buNone/>
                       </a:pPr>
                       <a:r>
-                        <a:rPr lang="en-US" sz="1200" b="1" spc="400" kern="0" dirty="0">
+                        <a:rPr lang="en-US" sz="1400" b="1" spc="400" kern="0" dirty="0">
                           <a:solidFill>
                             <a:srgbClr val="FFFFFF"/>
                           </a:solidFill>
@@ -10252,7 +10252,7 @@
                         </a:rPr>
                         <a:t>STEP</a:t>
                       </a:r>
-                      <a:endParaRPr lang="en-US" sz="1200" dirty="0">
+                      <a:endParaRPr lang="en-US" sz="1400" dirty="0">
                         <a:latin typeface="Open Sans" charset="0"/>
                         <a:ea typeface="Open Sans" charset="0"/>
                         <a:cs typeface="Open Sans" charset="0"/>
@@ -10310,7 +10310,7 @@
                         <a:buNone/>
                       </a:pPr>
                       <a:r>
-                        <a:rPr lang="en-US" sz="1200" b="1" spc="400" kern="0" dirty="0">
+                        <a:rPr lang="en-US" sz="1400" b="1" spc="400" kern="0" dirty="0">
                           <a:solidFill>
                             <a:srgbClr val="FFFFFF"/>
                           </a:solidFill>
@@ -10320,7 +10320,7 @@
                         </a:rPr>
                         <a:t>WHAT HAPPENS</a:t>
                       </a:r>
-                      <a:endParaRPr lang="en-US" sz="1200" dirty="0">
+                      <a:endParaRPr lang="en-US" sz="1400" dirty="0">
                         <a:latin typeface="Open Sans" charset="0"/>
                         <a:ea typeface="Open Sans" charset="0"/>
                         <a:cs typeface="Open Sans" charset="0"/>
@@ -10378,7 +10378,7 @@
                         <a:buNone/>
                       </a:pPr>
                       <a:r>
-                        <a:rPr lang="en-US" sz="1200" b="1" spc="400" kern="0" dirty="0">
+                        <a:rPr lang="en-US" sz="1400" b="1" spc="400" kern="0" dirty="0">
                           <a:solidFill>
                             <a:srgbClr val="FFFFFF"/>
                           </a:solidFill>
@@ -10388,7 +10388,7 @@
                         </a:rPr>
                         <a:t>WHERE BEGINNERS GET STUCK</a:t>
                       </a:r>
-                      <a:endParaRPr lang="en-US" sz="1200" dirty="0">
+                      <a:endParaRPr lang="en-US" sz="1400" dirty="0">
                         <a:latin typeface="Open Sans" charset="0"/>
                         <a:ea typeface="Open Sans" charset="0"/>
                         <a:cs typeface="Open Sans" charset="0"/>
@@ -10448,7 +10448,7 @@
                         <a:buNone/>
                       </a:pPr>
                       <a:r>
-                        <a:rPr lang="en-US" sz="1200" b="1" dirty="0">
+                        <a:rPr lang="en-US" sz="1400" b="1" dirty="0">
                           <a:solidFill>
                             <a:srgbClr val="C8102E"/>
                           </a:solidFill>
@@ -10458,7 +10458,7 @@
                         </a:rPr>
                         <a:t>1. Frame</a:t>
                       </a:r>
-                      <a:endParaRPr lang="en-US" sz="1200" dirty="0">
+                      <a:endParaRPr lang="en-US" sz="1400" dirty="0">
                         <a:latin typeface="Open Sans" charset="0"/>
                         <a:ea typeface="Open Sans" charset="0"/>
                         <a:cs typeface="Open Sans" charset="0"/>
@@ -10513,7 +10513,7 @@
                         <a:buNone/>
                       </a:pPr>
                       <a:r>
-                        <a:rPr lang="en-US" sz="1200" dirty="0">
+                        <a:rPr lang="en-US" sz="1400" dirty="0">
                           <a:solidFill>
                             <a:srgbClr val="333D4D"/>
                           </a:solidFill>
@@ -10523,7 +10523,7 @@
                         </a:rPr>
                         <a:t>Business question, success metric, cost of wrongness</a:t>
                       </a:r>
-                      <a:endParaRPr lang="en-US" sz="1200" dirty="0">
+                      <a:endParaRPr lang="en-US" sz="1400" dirty="0">
                         <a:latin typeface="Open Sans" charset="0"/>
                         <a:ea typeface="Open Sans" charset="0"/>
                         <a:cs typeface="Open Sans" charset="0"/>
@@ -10578,7 +10578,7 @@
                         <a:buNone/>
                       </a:pPr>
                       <a:r>
-                        <a:rPr lang="en-US" sz="1200" i="1" dirty="0">
+                        <a:rPr lang="en-US" sz="1400" i="1" dirty="0">
                           <a:solidFill>
                             <a:srgbClr val="C8102E"/>
                           </a:solidFill>
@@ -10588,7 +10588,7 @@
                         </a:rPr>
                         <a:t>Skipping it entirely</a:t>
                       </a:r>
-                      <a:endParaRPr lang="en-US" sz="1200" dirty="0">
+                      <a:endParaRPr lang="en-US" sz="1400" dirty="0">
                         <a:latin typeface="Open Sans" charset="0"/>
                         <a:ea typeface="Open Sans" charset="0"/>
                         <a:cs typeface="Open Sans" charset="0"/>
@@ -10645,7 +10645,7 @@
                         <a:buNone/>
                       </a:pPr>
                       <a:r>
-                        <a:rPr lang="en-US" sz="1200" b="1" dirty="0">
+                        <a:rPr lang="en-US" sz="1400" b="1" dirty="0">
                           <a:solidFill>
                             <a:srgbClr val="C8102E"/>
                           </a:solidFill>
@@ -10655,7 +10655,7 @@
                         </a:rPr>
                         <a:t>2. Collect</a:t>
                       </a:r>
-                      <a:endParaRPr lang="en-US" sz="1200" dirty="0">
+                      <a:endParaRPr lang="en-US" sz="1400" dirty="0">
                         <a:latin typeface="Open Sans" charset="0"/>
                         <a:ea typeface="Open Sans" charset="0"/>
                         <a:cs typeface="Open Sans" charset="0"/>
@@ -10710,7 +10710,7 @@
                         <a:buNone/>
                       </a:pPr>
                       <a:r>
-                        <a:rPr lang="en-US" sz="1200" dirty="0">
+                        <a:rPr lang="en-US" sz="1400" dirty="0">
                           <a:solidFill>
                             <a:srgbClr val="333D4D"/>
                           </a:solidFill>
@@ -10720,7 +10720,7 @@
                         </a:rPr>
                         <a:t>Gather features (and labels, if training)</a:t>
                       </a:r>
-                      <a:endParaRPr lang="en-US" sz="1200" dirty="0">
+                      <a:endParaRPr lang="en-US" sz="1400" dirty="0">
                         <a:latin typeface="Open Sans" charset="0"/>
                         <a:ea typeface="Open Sans" charset="0"/>
                         <a:cs typeface="Open Sans" charset="0"/>
@@ -10775,7 +10775,7 @@
                         <a:buNone/>
                       </a:pPr>
                       <a:r>
-                        <a:rPr lang="en-US" sz="1200" i="1" dirty="0">
+                        <a:rPr lang="en-US" sz="1400" i="1" dirty="0">
                           <a:solidFill>
                             <a:srgbClr val="C8102E"/>
                           </a:solidFill>
@@ -10785,7 +10785,7 @@
                         </a:rPr>
                         <a:t>Assuming data exists when it doesn't</a:t>
                       </a:r>
-                      <a:endParaRPr lang="en-US" sz="1200" dirty="0">
+                      <a:endParaRPr lang="en-US" sz="1400" dirty="0">
                         <a:latin typeface="Open Sans" charset="0"/>
                         <a:ea typeface="Open Sans" charset="0"/>
                         <a:cs typeface="Open Sans" charset="0"/>
@@ -10842,7 +10842,7 @@
                         <a:buNone/>
                       </a:pPr>
                       <a:r>
-                        <a:rPr lang="en-US" sz="1200" b="1" dirty="0">
+                        <a:rPr lang="en-US" sz="1400" b="1" dirty="0">
                           <a:solidFill>
                             <a:srgbClr val="C8102E"/>
                           </a:solidFill>
@@ -10852,7 +10852,7 @@
                         </a:rPr>
                         <a:t>3. Clean</a:t>
                       </a:r>
-                      <a:endParaRPr lang="en-US" sz="1200" dirty="0">
+                      <a:endParaRPr lang="en-US" sz="1400" dirty="0">
                         <a:latin typeface="Open Sans" charset="0"/>
                         <a:ea typeface="Open Sans" charset="0"/>
                         <a:cs typeface="Open Sans" charset="0"/>
@@ -10907,7 +10907,7 @@
                         <a:buNone/>
                       </a:pPr>
                       <a:r>
-                        <a:rPr lang="en-US" sz="1200" dirty="0">
+                        <a:rPr lang="en-US" sz="1400" dirty="0">
                           <a:solidFill>
                             <a:srgbClr val="333D4D"/>
                           </a:solidFill>
@@ -10917,7 +10917,7 @@
                         </a:rPr>
                         <a:t>Fix missing, remove duplicates, check for bias</a:t>
                       </a:r>
-                      <a:endParaRPr lang="en-US" sz="1200" dirty="0">
+                      <a:endParaRPr lang="en-US" sz="1400" dirty="0">
                         <a:latin typeface="Open Sans" charset="0"/>
                         <a:ea typeface="Open Sans" charset="0"/>
                         <a:cs typeface="Open Sans" charset="0"/>
@@ -10972,7 +10972,7 @@
                         <a:buNone/>
                       </a:pPr>
                       <a:r>
-                        <a:rPr lang="en-US" sz="1200" i="1" dirty="0">
+                        <a:rPr lang="en-US" sz="1400" i="1" dirty="0">
                           <a:solidFill>
                             <a:srgbClr val="C8102E"/>
                           </a:solidFill>
@@ -10982,7 +10982,7 @@
                         </a:rPr>
                         <a:t>Underestimating how long this takes</a:t>
                       </a:r>
-                      <a:endParaRPr lang="en-US" sz="1200" dirty="0">
+                      <a:endParaRPr lang="en-US" sz="1400" dirty="0">
                         <a:latin typeface="Open Sans" charset="0"/>
                         <a:ea typeface="Open Sans" charset="0"/>
                         <a:cs typeface="Open Sans" charset="0"/>
@@ -11039,7 +11039,7 @@
                         <a:buNone/>
                       </a:pPr>
                       <a:r>
-                        <a:rPr lang="en-US" sz="1200" b="1" dirty="0">
+                        <a:rPr lang="en-US" sz="1400" b="1" dirty="0">
                           <a:solidFill>
                             <a:srgbClr val="1B2A4A"/>
                           </a:solidFill>
@@ -11049,7 +11049,7 @@
                         </a:rPr>
                         <a:t>4. Train</a:t>
                       </a:r>
-                      <a:endParaRPr lang="en-US" sz="1200" dirty="0">
+                      <a:endParaRPr lang="en-US" sz="1400" dirty="0">
                         <a:latin typeface="Open Sans" charset="0"/>
                         <a:ea typeface="Open Sans" charset="0"/>
                         <a:cs typeface="Open Sans" charset="0"/>
@@ -11104,7 +11104,7 @@
                         <a:buNone/>
                       </a:pPr>
                       <a:r>
-                        <a:rPr lang="en-US" sz="1200" dirty="0">
+                        <a:rPr lang="en-US" sz="1400" dirty="0">
                           <a:solidFill>
                             <a:srgbClr val="333D4D"/>
                           </a:solidFill>
@@ -11114,7 +11114,7 @@
                         </a:rPr>
                         <a:t>Fit a model — or reuse a pre-trained one</a:t>
                       </a:r>
-                      <a:endParaRPr lang="en-US" sz="1200" dirty="0">
+                      <a:endParaRPr lang="en-US" sz="1400" dirty="0">
                         <a:latin typeface="Open Sans" charset="0"/>
                         <a:ea typeface="Open Sans" charset="0"/>
                         <a:cs typeface="Open Sans" charset="0"/>
@@ -11169,7 +11169,7 @@
                         <a:buNone/>
                       </a:pPr>
                       <a:r>
-                        <a:rPr lang="en-US" sz="1200" i="1" dirty="0">
+                        <a:rPr lang="en-US" sz="1400" i="1" dirty="0">
                           <a:solidFill>
                             <a:srgbClr val="C8102E"/>
                           </a:solidFill>
@@ -11179,7 +11179,7 @@
                         </a:rPr>
                         <a:t>Training from scratch when one exists</a:t>
                       </a:r>
-                      <a:endParaRPr lang="en-US" sz="1200" dirty="0">
+                      <a:endParaRPr lang="en-US" sz="1400" dirty="0">
                         <a:latin typeface="Open Sans" charset="0"/>
                         <a:ea typeface="Open Sans" charset="0"/>
                         <a:cs typeface="Open Sans" charset="0"/>
@@ -11236,7 +11236,7 @@
                         <a:buNone/>
                       </a:pPr>
                       <a:r>
-                        <a:rPr lang="en-US" sz="1200" b="1" dirty="0">
+                        <a:rPr lang="en-US" sz="1400" b="1" dirty="0">
                           <a:solidFill>
                             <a:srgbClr val="1B2A4A"/>
                           </a:solidFill>
@@ -11246,7 +11246,7 @@
                         </a:rPr>
                         <a:t>5. Evaluate</a:t>
                       </a:r>
-                      <a:endParaRPr lang="en-US" sz="1200" dirty="0">
+                      <a:endParaRPr lang="en-US" sz="1400" dirty="0">
                         <a:latin typeface="Open Sans" charset="0"/>
                         <a:ea typeface="Open Sans" charset="0"/>
                         <a:cs typeface="Open Sans" charset="0"/>
@@ -11301,7 +11301,7 @@
                         <a:buNone/>
                       </a:pPr>
                       <a:r>
-                        <a:rPr lang="en-US" sz="1200" dirty="0">
+                        <a:rPr lang="en-US" sz="1400" dirty="0">
                           <a:solidFill>
                             <a:srgbClr val="333D4D"/>
                           </a:solidFill>
@@ -11311,7 +11311,7 @@
                         </a:rPr>
                         <a:t>Hold-out test · check WHERE it's wrong</a:t>
                       </a:r>
-                      <a:endParaRPr lang="en-US" sz="1200" dirty="0">
+                      <a:endParaRPr lang="en-US" sz="1400" dirty="0">
                         <a:latin typeface="Open Sans" charset="0"/>
                         <a:ea typeface="Open Sans" charset="0"/>
                         <a:cs typeface="Open Sans" charset="0"/>
@@ -11366,7 +11366,7 @@
                         <a:buNone/>
                       </a:pPr>
                       <a:r>
-                        <a:rPr lang="en-US" sz="1200" i="1" dirty="0">
+                        <a:rPr lang="en-US" sz="1400" i="1" dirty="0">
                           <a:solidFill>
                             <a:srgbClr val="C8102E"/>
                           </a:solidFill>
@@ -11376,7 +11376,7 @@
                         </a:rPr>
                         <a:t>Reporting one accuracy number</a:t>
                       </a:r>
-                      <a:endParaRPr lang="en-US" sz="1200" dirty="0">
+                      <a:endParaRPr lang="en-US" sz="1400" dirty="0">
                         <a:latin typeface="Open Sans" charset="0"/>
                         <a:ea typeface="Open Sans" charset="0"/>
                         <a:cs typeface="Open Sans" charset="0"/>
@@ -11433,7 +11433,7 @@
                         <a:buNone/>
                       </a:pPr>
                       <a:r>
-                        <a:rPr lang="en-US" sz="1200" b="1" dirty="0">
+                        <a:rPr lang="en-US" sz="1400" b="1" dirty="0">
                           <a:solidFill>
                             <a:srgbClr val="2C5697"/>
                           </a:solidFill>
@@ -11443,7 +11443,7 @@
                         </a:rPr>
                         <a:t>6. Deploy</a:t>
                       </a:r>
-                      <a:endParaRPr lang="en-US" sz="1200" dirty="0">
+                      <a:endParaRPr lang="en-US" sz="1400" dirty="0">
                         <a:latin typeface="Open Sans" charset="0"/>
                         <a:ea typeface="Open Sans" charset="0"/>
                         <a:cs typeface="Open Sans" charset="0"/>
@@ -11498,7 +11498,7 @@
                         <a:buNone/>
                       </a:pPr>
                       <a:r>
-                        <a:rPr lang="en-US" sz="1200" dirty="0">
+                        <a:rPr lang="en-US" sz="1400" dirty="0">
                           <a:solidFill>
                             <a:srgbClr val="333D4D"/>
                           </a:solidFill>
@@ -11508,7 +11508,7 @@
                         </a:rPr>
                         <a:t>Pipeline · dashboard · API</a:t>
                       </a:r>
-                      <a:endParaRPr lang="en-US" sz="1200" dirty="0">
+                      <a:endParaRPr lang="en-US" sz="1400" dirty="0">
                         <a:latin typeface="Open Sans" charset="0"/>
                         <a:ea typeface="Open Sans" charset="0"/>
                         <a:cs typeface="Open Sans" charset="0"/>
@@ -11563,7 +11563,7 @@
                         <a:buNone/>
                       </a:pPr>
                       <a:r>
-                        <a:rPr lang="en-US" sz="1200" i="1" dirty="0">
+                        <a:rPr lang="en-US" sz="1400" i="1" dirty="0">
                           <a:solidFill>
                             <a:srgbClr val="C8102E"/>
                           </a:solidFill>
@@ -11573,7 +11573,7 @@
                         </a:rPr>
                         <a:t>Leaving the model stuck in a notebook</a:t>
                       </a:r>
-                      <a:endParaRPr lang="en-US" sz="1200" dirty="0">
+                      <a:endParaRPr lang="en-US" sz="1400" dirty="0">
                         <a:latin typeface="Open Sans" charset="0"/>
                         <a:ea typeface="Open Sans" charset="0"/>
                         <a:cs typeface="Open Sans" charset="0"/>
@@ -11630,7 +11630,7 @@
                         <a:buNone/>
                       </a:pPr>
                       <a:r>
-                        <a:rPr lang="en-US" sz="1200" b="1" dirty="0">
+                        <a:rPr lang="en-US" sz="1400" b="1" dirty="0">
                           <a:solidFill>
                             <a:srgbClr val="2C5697"/>
                           </a:solidFill>
@@ -11640,7 +11640,7 @@
                         </a:rPr>
                         <a:t>7. Monitor</a:t>
                       </a:r>
-                      <a:endParaRPr lang="en-US" sz="1200" dirty="0">
+                      <a:endParaRPr lang="en-US" sz="1400" dirty="0">
                         <a:latin typeface="Open Sans" charset="0"/>
                         <a:ea typeface="Open Sans" charset="0"/>
                         <a:cs typeface="Open Sans" charset="0"/>
@@ -11695,7 +11695,7 @@
                         <a:buNone/>
                       </a:pPr>
                       <a:r>
-                        <a:rPr lang="en-US" sz="1200" dirty="0">
+                        <a:rPr lang="en-US" sz="1400" dirty="0">
                           <a:solidFill>
                             <a:srgbClr val="333D4D"/>
                           </a:solidFill>
@@ -11705,7 +11705,7 @@
                         </a:rPr>
                         <a:t>Track performance over time</a:t>
                       </a:r>
-                      <a:endParaRPr lang="en-US" sz="1200" dirty="0">
+                      <a:endParaRPr lang="en-US" sz="1400" dirty="0">
                         <a:latin typeface="Open Sans" charset="0"/>
                         <a:ea typeface="Open Sans" charset="0"/>
                         <a:cs typeface="Open Sans" charset="0"/>
@@ -11760,7 +11760,7 @@
                         <a:buNone/>
                       </a:pPr>
                       <a:r>
-                        <a:rPr lang="en-US" sz="1200" i="1" dirty="0">
+                        <a:rPr lang="en-US" sz="1400" i="1" dirty="0">
                           <a:solidFill>
                             <a:srgbClr val="C8102E"/>
                           </a:solidFill>
@@ -11770,7 +11770,7 @@
                         </a:rPr>
                         <a:t>Assuming ‘trained once = good forever’</a:t>
                       </a:r>
-                      <a:endParaRPr lang="en-US" sz="1200" dirty="0">
+                      <a:endParaRPr lang="en-US" sz="1400" dirty="0">
                         <a:latin typeface="Open Sans" charset="0"/>
                         <a:ea typeface="Open Sans" charset="0"/>
                         <a:cs typeface="Open Sans" charset="0"/>
@@ -11903,7 +11903,7 @@
               <a:buNone/>
             </a:pPr>
             <a:r>
-              <a:rPr lang="en-US" sz="1400" b="1" dirty="0">
+              <a:rPr lang="en-US" sz="1600" b="1" dirty="0">
                 <a:solidFill>
                   <a:srgbClr val="FFFFFF"/>
                 </a:solidFill>
@@ -11913,7 +11913,7 @@
               </a:rPr>
               <a:t>Step 1 Is Where Projects Live or Die</a:t>
             </a:r>
-            <a:endParaRPr lang="en-US" sz="1400" dirty="0"/>
+            <a:endParaRPr lang="en-US" sz="1600" dirty="0"/>
           </a:p>
         </p:txBody>
       </p:sp>
@@ -11942,7 +11942,7 @@
               <a:buNone/>
             </a:pPr>
             <a:r>
-              <a:rPr lang="en-US" sz="1000" spc="200" kern="0" dirty="0">
+              <a:rPr lang="en-US" sz="1200" spc="200" kern="0" dirty="0">
                 <a:solidFill>
                   <a:srgbClr val="FFFFFF">
                     <a:alpha val="70000"/>
@@ -11954,7 +11954,7 @@
               </a:rPr>
               <a:t>L01 · Slide 19/22</a:t>
             </a:r>
-            <a:endParaRPr lang="en-US" sz="1000" dirty="0"/>
+            <a:endParaRPr lang="en-US" sz="1200" dirty="0"/>
           </a:p>
         </p:txBody>
       </p:sp>
@@ -12047,7 +12047,7 @@
               <a:buNone/>
             </a:pPr>
             <a:r>
-              <a:rPr lang="en-US" sz="2800" i="1" dirty="0">
+              <a:rPr lang="en-US" sz="3200" i="1" dirty="0">
                 <a:solidFill>
                   <a:srgbClr val="1B2A4A"/>
                 </a:solidFill>
@@ -12062,7 +12062,7 @@
               <a:buNone/>
             </a:pPr>
             <a:r>
-              <a:rPr lang="en-US" sz="2800" i="1" dirty="0">
+              <a:rPr lang="en-US" sz="3200" i="1" dirty="0">
                 <a:solidFill>
                   <a:srgbClr val="1B2A4A"/>
                 </a:solidFill>
@@ -12076,7 +12076,7 @@
               <a:buNone/>
             </a:pPr>
             <a:r>
-              <a:rPr lang="en-US" sz="2800" b="1" i="1" dirty="0">
+              <a:rPr lang="en-US" sz="3200" b="1" i="1" dirty="0">
                 <a:solidFill>
                   <a:srgbClr val="C8102E"/>
                 </a:solidFill>
@@ -12086,7 +12086,7 @@
               </a:rPr>
               <a:t>is worth zero.”</a:t>
             </a:r>
-            <a:endParaRPr lang="en-US" sz="2800" dirty="0"/>
+            <a:endParaRPr lang="en-US" sz="3200" dirty="0"/>
           </a:p>
         </p:txBody>
       </p:sp>
@@ -12115,7 +12115,7 @@
               <a:buNone/>
             </a:pPr>
             <a:r>
-              <a:rPr lang="en-US" sz="1200" b="1" spc="300" kern="0" dirty="0">
+              <a:rPr lang="en-US" sz="1400" b="1" spc="300" kern="0" dirty="0">
                 <a:solidFill>
                   <a:srgbClr val="5F6B7A"/>
                 </a:solidFill>
@@ -12125,7 +12125,7 @@
               </a:rPr>
               <a:t>The four questions every project must answer BEFORE touching data:</a:t>
             </a:r>
-            <a:endParaRPr lang="en-US" sz="1200" dirty="0"/>
+            <a:endParaRPr lang="en-US" sz="1400" dirty="0"/>
           </a:p>
         </p:txBody>
       </p:sp>
@@ -12229,7 +12229,7 @@
               <a:buNone/>
             </a:pPr>
             <a:r>
-              <a:rPr lang="en-US" sz="1800" b="1" dirty="0">
+              <a:rPr lang="en-US" sz="2200" b="1" dirty="0">
                 <a:solidFill>
                   <a:srgbClr val="FFFFFF"/>
                 </a:solidFill>
@@ -12239,7 +12239,7 @@
               </a:rPr>
               <a:t>1</a:t>
             </a:r>
-            <a:endParaRPr lang="en-US" sz="1800" dirty="0"/>
+            <a:endParaRPr lang="en-US" sz="2200" dirty="0"/>
           </a:p>
         </p:txBody>
       </p:sp>
@@ -12268,7 +12268,7 @@
               <a:buNone/>
             </a:pPr>
             <a:r>
-              <a:rPr lang="en-US" sz="1600" b="1" dirty="0">
+              <a:rPr lang="en-US" sz="1800" b="1" dirty="0">
                 <a:solidFill>
                   <a:srgbClr val="1B2A4A"/>
                 </a:solidFill>
@@ -12278,7 +12278,7 @@
               </a:rPr>
               <a:t>What is the question?</a:t>
             </a:r>
-            <a:endParaRPr lang="en-US" sz="1600" dirty="0"/>
+            <a:endParaRPr lang="en-US" sz="1800" dirty="0"/>
           </a:p>
         </p:txBody>
       </p:sp>
@@ -12307,7 +12307,7 @@
               <a:buNone/>
             </a:pPr>
             <a:r>
-              <a:rPr lang="en-US" sz="1100" dirty="0">
+              <a:rPr lang="en-US" sz="1300" dirty="0">
                 <a:solidFill>
                   <a:srgbClr val="333D4D"/>
                 </a:solidFill>
@@ -12317,7 +12317,7 @@
               </a:rPr>
               <a:t>Be precise. ‘Reduce churn’ isn't a question. ‘Predict which customers cancel within 30 days’ is.</a:t>
             </a:r>
-            <a:endParaRPr lang="en-US" sz="1100" dirty="0"/>
+            <a:endParaRPr lang="en-US" sz="1300" dirty="0"/>
           </a:p>
         </p:txBody>
       </p:sp>
@@ -12421,7 +12421,7 @@
               <a:buNone/>
             </a:pPr>
             <a:r>
-              <a:rPr lang="en-US" sz="1800" b="1" dirty="0">
+              <a:rPr lang="en-US" sz="2200" b="1" dirty="0">
                 <a:solidFill>
                   <a:srgbClr val="FFFFFF"/>
                 </a:solidFill>
@@ -12431,7 +12431,7 @@
               </a:rPr>
               <a:t>2</a:t>
             </a:r>
-            <a:endParaRPr lang="en-US" sz="1800" dirty="0"/>
+            <a:endParaRPr lang="en-US" sz="2200" dirty="0"/>
           </a:p>
         </p:txBody>
       </p:sp>
@@ -12460,7 +12460,7 @@
               <a:buNone/>
             </a:pPr>
             <a:r>
-              <a:rPr lang="en-US" sz="1600" b="1" dirty="0">
+              <a:rPr lang="en-US" sz="1800" b="1" dirty="0">
                 <a:solidFill>
                   <a:srgbClr val="1B2A4A"/>
                 </a:solidFill>
@@ -12470,7 +12470,7 @@
               </a:rPr>
               <a:t>Who acts on the answer?</a:t>
             </a:r>
-            <a:endParaRPr lang="en-US" sz="1600" dirty="0"/>
+            <a:endParaRPr lang="en-US" sz="1800" dirty="0"/>
           </a:p>
         </p:txBody>
       </p:sp>
@@ -12499,7 +12499,7 @@
               <a:buNone/>
             </a:pPr>
             <a:r>
-              <a:rPr lang="en-US" sz="1100" dirty="0">
+              <a:rPr lang="en-US" sz="1300" dirty="0">
                 <a:solidFill>
                   <a:srgbClr val="333D4D"/>
                 </a:solidFill>
@@ -12509,7 +12509,7 @@
               </a:rPr>
               <a:t>If nobody acts, no model matters. The action defines what ‘good’ means.</a:t>
             </a:r>
-            <a:endParaRPr lang="en-US" sz="1100" dirty="0"/>
+            <a:endParaRPr lang="en-US" sz="1300" dirty="0"/>
           </a:p>
         </p:txBody>
       </p:sp>
@@ -12613,7 +12613,7 @@
               <a:buNone/>
             </a:pPr>
             <a:r>
-              <a:rPr lang="en-US" sz="1800" b="1" dirty="0">
+              <a:rPr lang="en-US" sz="2200" b="1" dirty="0">
                 <a:solidFill>
                   <a:srgbClr val="FFFFFF"/>
                 </a:solidFill>
@@ -12623,7 +12623,7 @@
               </a:rPr>
               <a:t>3</a:t>
             </a:r>
-            <a:endParaRPr lang="en-US" sz="1800" dirty="0"/>
+            <a:endParaRPr lang="en-US" sz="2200" dirty="0"/>
           </a:p>
         </p:txBody>
       </p:sp>
@@ -12652,7 +12652,7 @@
               <a:buNone/>
             </a:pPr>
             <a:r>
-              <a:rPr lang="en-US" sz="1600" b="1" dirty="0">
+              <a:rPr lang="en-US" sz="1800" b="1" dirty="0">
                 <a:solidFill>
                   <a:srgbClr val="1B2A4A"/>
                 </a:solidFill>
@@ -12662,7 +12662,7 @@
               </a:rPr>
               <a:t>What's the success metric?</a:t>
             </a:r>
-            <a:endParaRPr lang="en-US" sz="1600" dirty="0"/>
+            <a:endParaRPr lang="en-US" sz="1800" dirty="0"/>
           </a:p>
         </p:txBody>
       </p:sp>
@@ -12691,7 +12691,7 @@
               <a:buNone/>
             </a:pPr>
             <a:r>
-              <a:rPr lang="en-US" sz="1100" dirty="0">
+              <a:rPr lang="en-US" sz="1300" dirty="0">
                 <a:solidFill>
                   <a:srgbClr val="333D4D"/>
                 </a:solidFill>
@@ -12701,7 +12701,7 @@
               </a:rPr>
               <a:t>Define it before you build. Choose one. Resist adding more later.</a:t>
             </a:r>
-            <a:endParaRPr lang="en-US" sz="1100" dirty="0"/>
+            <a:endParaRPr lang="en-US" sz="1300" dirty="0"/>
           </a:p>
         </p:txBody>
       </p:sp>
@@ -12805,7 +12805,7 @@
               <a:buNone/>
             </a:pPr>
             <a:r>
-              <a:rPr lang="en-US" sz="1800" b="1" dirty="0">
+              <a:rPr lang="en-US" sz="2200" b="1" dirty="0">
                 <a:solidFill>
                   <a:srgbClr val="FFFFFF"/>
                 </a:solidFill>
@@ -12815,7 +12815,7 @@
               </a:rPr>
               <a:t>4</a:t>
             </a:r>
-            <a:endParaRPr lang="en-US" sz="1800" dirty="0"/>
+            <a:endParaRPr lang="en-US" sz="2200" dirty="0"/>
           </a:p>
         </p:txBody>
       </p:sp>
@@ -12844,7 +12844,7 @@
               <a:buNone/>
             </a:pPr>
             <a:r>
-              <a:rPr lang="en-US" sz="1600" b="1" dirty="0">
+              <a:rPr lang="en-US" sz="1800" b="1" dirty="0">
                 <a:solidFill>
                   <a:srgbClr val="1B2A4A"/>
                 </a:solidFill>
@@ -12854,7 +12854,7 @@
               </a:rPr>
               <a:t>What's the cost of being wrong?</a:t>
             </a:r>
-            <a:endParaRPr lang="en-US" sz="1600" dirty="0"/>
+            <a:endParaRPr lang="en-US" sz="1800" dirty="0"/>
           </a:p>
         </p:txBody>
       </p:sp>
@@ -12883,7 +12883,7 @@
               <a:buNone/>
             </a:pPr>
             <a:r>
-              <a:rPr lang="en-US" sz="1100" dirty="0">
+              <a:rPr lang="en-US" sz="1300" dirty="0">
                 <a:solidFill>
                   <a:srgbClr val="333D4D"/>
                 </a:solidFill>
@@ -12893,7 +12893,7 @@
               </a:rPr>
               <a:t>Is a false positive worse than a false negative? Most domains have asymmetric costs.</a:t>
             </a:r>
-            <a:endParaRPr lang="en-US" sz="1100" dirty="0"/>
+            <a:endParaRPr lang="en-US" sz="1300" dirty="0"/>
           </a:p>
         </p:txBody>
       </p:sp>
@@ -12979,7 +12979,7 @@
               <a:buNone/>
             </a:pPr>
             <a:r>
-              <a:rPr lang="en-US" sz="1400" b="1" dirty="0">
+              <a:rPr lang="en-US" sz="1600" b="1" dirty="0">
                 <a:solidFill>
                   <a:srgbClr val="FFFFFF"/>
                 </a:solidFill>
@@ -12989,7 +12989,7 @@
               </a:rPr>
               <a:t>Where Does Machine Learning Fit?</a:t>
             </a:r>
-            <a:endParaRPr lang="en-US" sz="1400" dirty="0"/>
+            <a:endParaRPr lang="en-US" sz="1600" dirty="0"/>
           </a:p>
         </p:txBody>
       </p:sp>
@@ -13018,7 +13018,7 @@
               <a:buNone/>
             </a:pPr>
             <a:r>
-              <a:rPr lang="en-US" sz="1000" spc="200" kern="0" dirty="0">
+              <a:rPr lang="en-US" sz="1200" spc="200" kern="0" dirty="0">
                 <a:solidFill>
                   <a:srgbClr val="FFFFFF">
                     <a:alpha val="70000"/>
@@ -13030,7 +13030,7 @@
               </a:rPr>
               <a:t>L01 · Slide 2/22</a:t>
             </a:r>
-            <a:endParaRPr lang="en-US" sz="1000" dirty="0"/>
+            <a:endParaRPr lang="en-US" sz="1200" dirty="0"/>
           </a:p>
         </p:txBody>
       </p:sp>
@@ -13212,7 +13212,7 @@
               <a:buNone/>
             </a:pPr>
             <a:r>
-              <a:rPr lang="en-US" sz="1000" b="1" spc="400" kern="0" dirty="0">
+              <a:rPr lang="en-US" sz="1200" b="1" spc="400" kern="0" dirty="0">
                 <a:solidFill>
                   <a:srgbClr val="2C5697"/>
                 </a:solidFill>
@@ -13222,7 +13222,7 @@
               </a:rPr>
               <a:t>M1  ·  Data Analytics</a:t>
             </a:r>
-            <a:endParaRPr lang="en-US" sz="1000" dirty="0"/>
+            <a:endParaRPr lang="en-US" sz="1200" dirty="0"/>
           </a:p>
         </p:txBody>
       </p:sp>
@@ -13251,7 +13251,7 @@
               <a:buNone/>
             </a:pPr>
             <a:r>
-              <a:rPr lang="en-US" sz="2000" b="1" dirty="0">
+              <a:rPr lang="en-US" sz="2400" b="1" dirty="0">
                 <a:solidFill>
                   <a:srgbClr val="1B2A4A"/>
                 </a:solidFill>
@@ -13261,7 +13261,7 @@
               </a:rPr>
               <a:t>Summarise the past.</a:t>
             </a:r>
-            <a:endParaRPr lang="en-US" sz="2000" dirty="0"/>
+            <a:endParaRPr lang="en-US" sz="2400" dirty="0"/>
           </a:p>
         </p:txBody>
       </p:sp>
@@ -13290,7 +13290,7 @@
               <a:buNone/>
             </a:pPr>
             <a:r>
-              <a:rPr lang="en-US" sz="1300" dirty="0">
+              <a:rPr lang="en-US" sz="1500" dirty="0">
                 <a:solidFill>
                   <a:srgbClr val="333D4D"/>
                 </a:solidFill>
@@ -13300,7 +13300,7 @@
               </a:rPr>
               <a:t>Describe what happened.</a:t>
             </a:r>
-            <a:endParaRPr lang="en-US" sz="1300" dirty="0"/>
+            <a:endParaRPr lang="en-US" sz="1500" dirty="0"/>
           </a:p>
         </p:txBody>
       </p:sp>
@@ -13379,7 +13379,7 @@
               <a:buNone/>
             </a:pPr>
             <a:r>
-              <a:rPr lang="en-US" sz="900" b="1" spc="400" kern="0" dirty="0">
+              <a:rPr lang="en-US" sz="1100" b="1" spc="400" kern="0" dirty="0">
                 <a:solidFill>
                   <a:srgbClr val="2C5697"/>
                 </a:solidFill>
@@ -13389,7 +13389,7 @@
               </a:rPr>
               <a:t>SARAH</a:t>
             </a:r>
-            <a:endParaRPr lang="en-US" sz="900" dirty="0"/>
+            <a:endParaRPr lang="en-US" sz="1100" dirty="0"/>
           </a:p>
         </p:txBody>
       </p:sp>
@@ -13418,7 +13418,7 @@
               <a:buNone/>
             </a:pPr>
             <a:r>
-              <a:rPr lang="en-US" sz="1200" i="1" dirty="0">
+              <a:rPr lang="en-US" sz="1400" i="1" dirty="0">
                 <a:solidFill>
                   <a:srgbClr val="333D4D"/>
                 </a:solidFill>
@@ -13428,7 +13428,7 @@
               </a:rPr>
               <a:t>“Reviews dropped 12% last month.”</a:t>
             </a:r>
-            <a:endParaRPr lang="en-US" sz="1200" dirty="0"/>
+            <a:endParaRPr lang="en-US" sz="1400" dirty="0"/>
           </a:p>
         </p:txBody>
       </p:sp>
@@ -13507,7 +13507,7 @@
               <a:buNone/>
             </a:pPr>
             <a:r>
-              <a:rPr lang="en-US" sz="1000" b="1" spc="400" kern="0" dirty="0">
+              <a:rPr lang="en-US" sz="1200" b="1" spc="400" kern="0" dirty="0">
                 <a:solidFill>
                   <a:srgbClr val="0E7490"/>
                 </a:solidFill>
@@ -13517,7 +13517,7 @@
               </a:rPr>
               <a:t>M2  ·  Data Engineering</a:t>
             </a:r>
-            <a:endParaRPr lang="en-US" sz="1000" dirty="0"/>
+            <a:endParaRPr lang="en-US" sz="1200" dirty="0"/>
           </a:p>
         </p:txBody>
       </p:sp>
@@ -13546,7 +13546,7 @@
               <a:buNone/>
             </a:pPr>
             <a:r>
-              <a:rPr lang="en-US" sz="2000" b="1" dirty="0">
+              <a:rPr lang="en-US" sz="2400" b="1" dirty="0">
                 <a:solidFill>
                   <a:srgbClr val="1B2A4A"/>
                 </a:solidFill>
@@ -13556,7 +13556,7 @@
               </a:rPr>
               <a:t>Move &amp; store reliably.</a:t>
             </a:r>
-            <a:endParaRPr lang="en-US" sz="2000" dirty="0"/>
+            <a:endParaRPr lang="en-US" sz="2400" dirty="0"/>
           </a:p>
         </p:txBody>
       </p:sp>
@@ -13585,7 +13585,7 @@
               <a:buNone/>
             </a:pPr>
             <a:r>
-              <a:rPr lang="en-US" sz="1300" dirty="0">
+              <a:rPr lang="en-US" sz="1500" dirty="0">
                 <a:solidFill>
                   <a:srgbClr val="333D4D"/>
                 </a:solidFill>
@@ -13595,7 +13595,7 @@
               </a:rPr>
               <a:t>Build the pipes between systems.</a:t>
             </a:r>
-            <a:endParaRPr lang="en-US" sz="1300" dirty="0"/>
+            <a:endParaRPr lang="en-US" sz="1500" dirty="0"/>
           </a:p>
         </p:txBody>
       </p:sp>
@@ -13674,7 +13674,7 @@
               <a:buNone/>
             </a:pPr>
             <a:r>
-              <a:rPr lang="en-US" sz="900" b="1" spc="400" kern="0" dirty="0">
+              <a:rPr lang="en-US" sz="1100" b="1" spc="400" kern="0" dirty="0">
                 <a:solidFill>
                   <a:srgbClr val="0E7490"/>
                 </a:solidFill>
@@ -13684,7 +13684,7 @@
               </a:rPr>
               <a:t>SARAH</a:t>
             </a:r>
-            <a:endParaRPr lang="en-US" sz="900" dirty="0"/>
+            <a:endParaRPr lang="en-US" sz="1100" dirty="0"/>
           </a:p>
         </p:txBody>
       </p:sp>
@@ -13713,7 +13713,7 @@
               <a:buNone/>
             </a:pPr>
             <a:r>
-              <a:rPr lang="en-US" sz="1200" i="1" dirty="0">
+              <a:rPr lang="en-US" sz="1400" i="1" dirty="0">
                 <a:solidFill>
                   <a:srgbClr val="333D4D"/>
                 </a:solidFill>
@@ -13723,7 +13723,7 @@
               </a:rPr>
               <a:t>“Reviews land in the warehouse every night.”</a:t>
             </a:r>
-            <a:endParaRPr lang="en-US" sz="1200" dirty="0"/>
+            <a:endParaRPr lang="en-US" sz="1400" dirty="0"/>
           </a:p>
         </p:txBody>
       </p:sp>
@@ -13827,7 +13827,7 @@
               <a:buNone/>
             </a:pPr>
             <a:r>
-              <a:rPr lang="en-US" sz="900" b="1" spc="600" kern="0" dirty="0">
+              <a:rPr lang="en-US" sz="1100" b="1" spc="600" kern="0" dirty="0">
                 <a:solidFill>
                   <a:srgbClr val="FFFFFF"/>
                 </a:solidFill>
@@ -13837,7 +13837,7 @@
               </a:rPr>
               <a:t>YOU ARE HERE</a:t>
             </a:r>
-            <a:endParaRPr lang="en-US" sz="900" dirty="0"/>
+            <a:endParaRPr lang="en-US" sz="1100" dirty="0"/>
           </a:p>
         </p:txBody>
       </p:sp>
@@ -13866,7 +13866,7 @@
               <a:buNone/>
             </a:pPr>
             <a:r>
-              <a:rPr lang="en-US" sz="1000" b="1" spc="400" kern="0" dirty="0">
+              <a:rPr lang="en-US" sz="1200" b="1" spc="400" kern="0" dirty="0">
                 <a:solidFill>
                   <a:srgbClr val="C8102E"/>
                 </a:solidFill>
@@ -13876,7 +13876,7 @@
               </a:rPr>
               <a:t>M3  ·  Machine Learning</a:t>
             </a:r>
-            <a:endParaRPr lang="en-US" sz="1000" dirty="0"/>
+            <a:endParaRPr lang="en-US" sz="1200" dirty="0"/>
           </a:p>
         </p:txBody>
       </p:sp>
@@ -13905,7 +13905,7 @@
               <a:buNone/>
             </a:pPr>
             <a:r>
-              <a:rPr lang="en-US" sz="2000" b="1" dirty="0">
+              <a:rPr lang="en-US" sz="2400" b="1" dirty="0">
                 <a:solidFill>
                   <a:srgbClr val="1B2A4A"/>
                 </a:solidFill>
@@ -13915,7 +13915,7 @@
               </a:rPr>
               <a:t>Predict the unseen.</a:t>
             </a:r>
-            <a:endParaRPr lang="en-US" sz="2000" dirty="0"/>
+            <a:endParaRPr lang="en-US" sz="2400" dirty="0"/>
           </a:p>
         </p:txBody>
       </p:sp>
@@ -13944,7 +13944,7 @@
               <a:buNone/>
             </a:pPr>
             <a:r>
-              <a:rPr lang="en-US" sz="1300" dirty="0">
+              <a:rPr lang="en-US" sz="1500" dirty="0">
                 <a:solidFill>
                   <a:srgbClr val="333D4D"/>
                 </a:solidFill>
@@ -13954,7 +13954,7 @@
               </a:rPr>
               <a:t>Label or forecast things no human has seen yet.</a:t>
             </a:r>
-            <a:endParaRPr lang="en-US" sz="1300" dirty="0"/>
+            <a:endParaRPr lang="en-US" sz="1500" dirty="0"/>
           </a:p>
         </p:txBody>
       </p:sp>
@@ -14033,7 +14033,7 @@
               <a:buNone/>
             </a:pPr>
             <a:r>
-              <a:rPr lang="en-US" sz="900" b="1" spc="400" kern="0" dirty="0">
+              <a:rPr lang="en-US" sz="1100" b="1" spc="400" kern="0" dirty="0">
                 <a:solidFill>
                   <a:srgbClr val="C8102E"/>
                 </a:solidFill>
@@ -14043,7 +14043,7 @@
               </a:rPr>
               <a:t>SARAH</a:t>
             </a:r>
-            <a:endParaRPr lang="en-US" sz="900" dirty="0"/>
+            <a:endParaRPr lang="en-US" sz="1100" dirty="0"/>
           </a:p>
         </p:txBody>
       </p:sp>
@@ -14072,7 +14072,7 @@
               <a:buNone/>
             </a:pPr>
             <a:r>
-              <a:rPr lang="en-US" sz="1200" i="1" dirty="0">
+              <a:rPr lang="en-US" sz="1400" i="1" dirty="0">
                 <a:solidFill>
                   <a:srgbClr val="333D4D"/>
                 </a:solidFill>
@@ -14082,7 +14082,7 @@
               </a:rPr>
               <a:t>“Label 10,000 reviews — positive or negative.”</a:t>
             </a:r>
-            <a:endParaRPr lang="en-US" sz="1200" dirty="0"/>
+            <a:endParaRPr lang="en-US" sz="1400" dirty="0"/>
           </a:p>
         </p:txBody>
       </p:sp>
@@ -14168,7 +14168,7 @@
               <a:buNone/>
             </a:pPr>
             <a:r>
-              <a:rPr lang="en-US" sz="900" spc="300" kern="0" dirty="0">
+              <a:rPr lang="en-US" sz="1100" spc="300" kern="0" dirty="0">
                 <a:solidFill>
                   <a:srgbClr val="FFFFFF">
                     <a:alpha val="60000"/>
@@ -14180,7 +14180,7 @@
               </a:rPr>
               <a:t>L01 · Slide 20/22</a:t>
             </a:r>
-            <a:endParaRPr lang="en-US" sz="900" dirty="0"/>
+            <a:endParaRPr lang="en-US" sz="1100" dirty="0"/>
           </a:p>
         </p:txBody>
       </p:sp>
@@ -14236,7 +14236,7 @@
               <a:buNone/>
             </a:pPr>
             <a:r>
-              <a:rPr lang="en-US" sz="1100" b="1" spc="400" kern="0" dirty="0">
+              <a:rPr lang="en-US" sz="1300" b="1" spc="400" kern="0" dirty="0">
                 <a:solidFill>
                   <a:srgbClr val="FFFFFF"/>
                 </a:solidFill>
@@ -14246,7 +14246,7 @@
               </a:rPr>
               <a:t>CODE-ALONG</a:t>
             </a:r>
-            <a:endParaRPr lang="en-US" sz="1100" dirty="0"/>
+            <a:endParaRPr lang="en-US" sz="1300" dirty="0"/>
           </a:p>
         </p:txBody>
       </p:sp>
@@ -14275,7 +14275,7 @@
               <a:buNone/>
             </a:pPr>
             <a:r>
-              <a:rPr lang="en-US" sz="1100" b="1" spc="600" kern="0" dirty="0">
+              <a:rPr lang="en-US" sz="1300" b="1" spc="600" kern="0" dirty="0">
                 <a:solidFill>
                   <a:srgbClr val="FFFFFF">
                     <a:alpha val="70000"/>
@@ -14287,7 +14287,7 @@
               </a:rPr>
               <a:t>HANDS-ON</a:t>
             </a:r>
-            <a:endParaRPr lang="en-US" sz="1100" dirty="0"/>
+            <a:endParaRPr lang="en-US" sz="1300" dirty="0"/>
           </a:p>
         </p:txBody>
       </p:sp>
@@ -14316,7 +14316,7 @@
               <a:buNone/>
             </a:pPr>
             <a:r>
-              <a:rPr lang="en-US" sz="2200" b="1" dirty="0">
+              <a:rPr lang="en-US" sz="2600" b="1" dirty="0">
                 <a:solidFill>
                   <a:srgbClr val="C8102E"/>
                 </a:solidFill>
@@ -14326,7 +14326,7 @@
               </a:rPr>
               <a:t>Open:  04_ml_workflow.ipynb</a:t>
             </a:r>
-            <a:endParaRPr lang="en-US" sz="2200" dirty="0"/>
+            <a:endParaRPr lang="en-US" sz="2600" dirty="0"/>
           </a:p>
         </p:txBody>
       </p:sp>
@@ -14355,7 +14355,7 @@
               <a:buNone/>
             </a:pPr>
             <a:r>
-              <a:rPr lang="en-US" sz="1800" b="1" dirty="0">
+              <a:rPr lang="en-US" sz="2200" b="1" dirty="0">
                 <a:solidFill>
                   <a:srgbClr val="FFFFFF"/>
                 </a:solidFill>
@@ -14365,7 +14365,7 @@
               </a:rPr>
               <a:t>What you'll do</a:t>
             </a:r>
-            <a:endParaRPr lang="en-US" sz="1800" dirty="0"/>
+            <a:endParaRPr lang="en-US" sz="2200" dirty="0"/>
           </a:p>
         </p:txBody>
       </p:sp>
@@ -14419,7 +14419,7 @@
               <a:buNone/>
             </a:pPr>
             <a:r>
-              <a:rPr lang="en-US" sz="1200" b="1" dirty="0">
+              <a:rPr lang="en-US" sz="1400" b="1" dirty="0">
                 <a:solidFill>
                   <a:srgbClr val="FFFFFF"/>
                 </a:solidFill>
@@ -14429,7 +14429,7 @@
               </a:rPr>
               <a:t>1</a:t>
             </a:r>
-            <a:endParaRPr lang="en-US" sz="1200" dirty="0"/>
+            <a:endParaRPr lang="en-US" sz="1400" dirty="0"/>
           </a:p>
         </p:txBody>
       </p:sp>
@@ -14458,7 +14458,7 @@
               <a:buNone/>
             </a:pPr>
             <a:r>
-              <a:rPr lang="en-US" sz="1500" dirty="0">
+              <a:rPr lang="en-US" sz="1700" dirty="0">
                 <a:solidFill>
                   <a:srgbClr val="FFFFFF">
                     <a:alpha val="90000"/>
@@ -14470,7 +14470,7 @@
               </a:rPr>
               <a:t>Run Sarah's sentiment project through each of the 7 workflow steps.</a:t>
             </a:r>
-            <a:endParaRPr lang="en-US" sz="1500" dirty="0"/>
+            <a:endParaRPr lang="en-US" sz="1700" dirty="0"/>
           </a:p>
         </p:txBody>
       </p:sp>
@@ -14524,7 +14524,7 @@
               <a:buNone/>
             </a:pPr>
             <a:r>
-              <a:rPr lang="en-US" sz="1200" b="1" dirty="0">
+              <a:rPr lang="en-US" sz="1400" b="1" dirty="0">
                 <a:solidFill>
                   <a:srgbClr val="FFFFFF"/>
                 </a:solidFill>
@@ -14534,7 +14534,7 @@
               </a:rPr>
               <a:t>2</a:t>
             </a:r>
-            <a:endParaRPr lang="en-US" sz="1200" dirty="0"/>
+            <a:endParaRPr lang="en-US" sz="1400" dirty="0"/>
           </a:p>
         </p:txBody>
       </p:sp>
@@ -14563,7 +14563,7 @@
               <a:buNone/>
             </a:pPr>
             <a:r>
-              <a:rPr lang="en-US" sz="1500" dirty="0">
+              <a:rPr lang="en-US" sz="1700" dirty="0">
                 <a:solidFill>
                   <a:srgbClr val="FFFFFF">
                     <a:alpha val="90000"/>
@@ -14575,7 +14575,7 @@
               </a:rPr>
               <a:t>Identify the 5 questions she should have asked at Step 1.</a:t>
             </a:r>
-            <a:endParaRPr lang="en-US" sz="1500" dirty="0"/>
+            <a:endParaRPr lang="en-US" sz="1700" dirty="0"/>
           </a:p>
         </p:txBody>
       </p:sp>
@@ -14629,7 +14629,7 @@
               <a:buNone/>
             </a:pPr>
             <a:r>
-              <a:rPr lang="en-US" sz="1200" b="1" dirty="0">
+              <a:rPr lang="en-US" sz="1400" b="1" dirty="0">
                 <a:solidFill>
                   <a:srgbClr val="FFFFFF"/>
                 </a:solidFill>
@@ -14639,7 +14639,7 @@
               </a:rPr>
               <a:t>3</a:t>
             </a:r>
-            <a:endParaRPr lang="en-US" sz="1200" dirty="0"/>
+            <a:endParaRPr lang="en-US" sz="1400" dirty="0"/>
           </a:p>
         </p:txBody>
       </p:sp>
@@ -14668,7 +14668,7 @@
               <a:buNone/>
             </a:pPr>
             <a:r>
-              <a:rPr lang="en-US" sz="1500" dirty="0">
+              <a:rPr lang="en-US" sz="1700" dirty="0">
                 <a:solidFill>
                   <a:srgbClr val="FFFFFF">
                     <a:alpha val="90000"/>
@@ -14680,7 +14680,7 @@
               </a:rPr>
               <a:t>Spot-check the model against Sarah's hand-labels on 15 reviews.</a:t>
             </a:r>
-            <a:endParaRPr lang="en-US" sz="1500" dirty="0"/>
+            <a:endParaRPr lang="en-US" sz="1700" dirty="0"/>
           </a:p>
         </p:txBody>
       </p:sp>
@@ -14734,7 +14734,7 @@
               <a:buNone/>
             </a:pPr>
             <a:r>
-              <a:rPr lang="en-US" sz="3200" dirty="0">
+              <a:rPr lang="en-US" sz="3600" dirty="0">
                 <a:solidFill>
                   <a:srgbClr val="C8102E"/>
                 </a:solidFill>
@@ -14744,7 +14744,7 @@
               </a:rPr>
               <a:t>⏱</a:t>
             </a:r>
-            <a:endParaRPr lang="en-US" sz="3200" dirty="0"/>
+            <a:endParaRPr lang="en-US" sz="3600" dirty="0"/>
           </a:p>
         </p:txBody>
       </p:sp>
@@ -14773,7 +14773,7 @@
               <a:buNone/>
             </a:pPr>
             <a:r>
-              <a:rPr lang="en-US" sz="1800" b="1" dirty="0">
+              <a:rPr lang="en-US" sz="2200" b="1" dirty="0">
                 <a:solidFill>
                   <a:srgbClr val="FFFFFF"/>
                 </a:solidFill>
@@ -14787,7 +14787,7 @@
               <a:buNone/>
             </a:pPr>
             <a:r>
-              <a:rPr lang="en-US" sz="1200" dirty="0">
+              <a:rPr lang="en-US" sz="1400" dirty="0">
                 <a:solidFill>
                   <a:srgbClr val="FFFFFF">
                     <a:alpha val="70000"/>
@@ -14799,7 +14799,7 @@
               </a:rPr>
               <a:t>    ·    Stop at the 🟡 Extension marker    ·    Hospital exercise is post-class</a:t>
             </a:r>
-            <a:endParaRPr lang="en-US" sz="1800" dirty="0"/>
+            <a:endParaRPr lang="en-US" sz="2200" dirty="0"/>
           </a:p>
         </p:txBody>
       </p:sp>
@@ -14885,7 +14885,7 @@
               <a:buNone/>
             </a:pPr>
             <a:r>
-              <a:rPr lang="en-US" sz="900" spc="300" kern="0" dirty="0">
+              <a:rPr lang="en-US" sz="1100" spc="300" kern="0" dirty="0">
                 <a:solidFill>
                   <a:srgbClr val="FFFFFF">
                     <a:alpha val="60000"/>
@@ -14897,7 +14897,7 @@
               </a:rPr>
               <a:t>L01 · Slide 21/22</a:t>
             </a:r>
-            <a:endParaRPr lang="en-US" sz="900" dirty="0"/>
+            <a:endParaRPr lang="en-US" sz="1100" dirty="0"/>
           </a:p>
         </p:txBody>
       </p:sp>
@@ -14965,7 +14965,7 @@
               <a:buNone/>
             </a:pPr>
             <a:r>
-              <a:rPr lang="en-US" sz="1400" i="1" dirty="0">
+              <a:rPr lang="en-US" sz="1600" i="1" dirty="0">
                 <a:solidFill>
                   <a:srgbClr val="FFFFFF">
                     <a:alpha val="75000"/>
@@ -14977,7 +14977,7 @@
               </a:rPr>
               <a:t>Priya, after seeing Sarah's numbers…</a:t>
             </a:r>
-            <a:endParaRPr lang="en-US" sz="1400" dirty="0"/>
+            <a:endParaRPr lang="en-US" sz="1600" dirty="0"/>
           </a:p>
         </p:txBody>
       </p:sp>
@@ -15006,7 +15006,7 @@
               <a:buNone/>
             </a:pPr>
             <a:r>
-              <a:rPr lang="en-US" sz="2400" i="1" dirty="0">
+              <a:rPr lang="en-US" sz="2800" i="1" dirty="0">
                 <a:solidFill>
                   <a:srgbClr val="FFFFFF"/>
                 </a:solidFill>
@@ -15021,7 +15021,7 @@
               <a:buNone/>
             </a:pPr>
             <a:r>
-              <a:rPr lang="en-US" sz="2400" b="1" i="1" dirty="0">
+              <a:rPr lang="en-US" sz="2800" b="1" i="1" dirty="0">
                 <a:solidFill>
                   <a:srgbClr val="C8102E"/>
                 </a:solidFill>
@@ -15034,20 +15034,20 @@
             <a:pPr indent="0" marL="0">
               <a:buNone/>
             </a:pPr>
-            <a:endParaRPr lang="en-US" sz="2400" dirty="0"/>
-          </a:p>
-          <a:p>
-            <a:pPr indent="0" marL="0">
-              <a:buNone/>
-            </a:pPr>
-            <a:endParaRPr lang="en-US" sz="2400" dirty="0"/>
-          </a:p>
-          <a:p>
-            <a:pPr indent="0" marL="0">
-              <a:buNone/>
-            </a:pPr>
-            <a:r>
-              <a:rPr lang="en-US" sz="2400" i="1" dirty="0">
+            <a:endParaRPr lang="en-US" sz="2800" dirty="0"/>
+          </a:p>
+          <a:p>
+            <a:pPr indent="0" marL="0">
+              <a:buNone/>
+            </a:pPr>
+            <a:endParaRPr lang="en-US" sz="2800" dirty="0"/>
+          </a:p>
+          <a:p>
+            <a:pPr indent="0" marL="0">
+              <a:buNone/>
+            </a:pPr>
+            <a:r>
+              <a:rPr lang="en-US" sz="2800" i="1" dirty="0">
                 <a:solidFill>
                   <a:srgbClr val="FFFFFF"/>
                 </a:solidFill>
@@ -15057,14 +15057,14 @@
               </a:rPr>
               <a:t>The model put a label on every review. How do we know it isn't </a:t>
             </a:r>
-            <a:endParaRPr lang="en-US" sz="2400" dirty="0"/>
-          </a:p>
-          <a:p>
-            <a:pPr indent="0" marL="0">
-              <a:buNone/>
-            </a:pPr>
-            <a:r>
-              <a:rPr lang="en-US" sz="2400" b="1" i="1" dirty="0">
+            <a:endParaRPr lang="en-US" sz="2800" dirty="0"/>
+          </a:p>
+          <a:p>
+            <a:pPr indent="0" marL="0">
+              <a:buNone/>
+            </a:pPr>
+            <a:r>
+              <a:rPr lang="en-US" sz="2800" b="1" i="1" dirty="0">
                 <a:solidFill>
                   <a:srgbClr val="C8102E"/>
                 </a:solidFill>
@@ -15078,7 +15078,7 @@
               <a:buNone/>
             </a:pPr>
             <a:r>
-              <a:rPr lang="en-US" sz="2400" i="1" dirty="0">
+              <a:rPr lang="en-US" sz="2800" i="1" dirty="0">
                 <a:solidFill>
                   <a:srgbClr val="FFFFFF"/>
                 </a:solidFill>
@@ -15088,7 +15088,7 @@
               </a:rPr>
               <a:t> in ways we can't see from this deck?”</a:t>
             </a:r>
-            <a:endParaRPr lang="en-US" sz="2400" dirty="0"/>
+            <a:endParaRPr lang="en-US" sz="2800" dirty="0"/>
           </a:p>
         </p:txBody>
       </p:sp>
@@ -15167,7 +15167,7 @@
               <a:buNone/>
             </a:pPr>
             <a:r>
-              <a:rPr lang="en-US" sz="1100" b="1" spc="600" kern="0" dirty="0">
+              <a:rPr lang="en-US" sz="1300" b="1" spc="600" kern="0" dirty="0">
                 <a:solidFill>
                   <a:srgbClr val="C8102E"/>
                 </a:solidFill>
@@ -15177,7 +15177,7 @@
               </a:rPr>
               <a:t>LESSON 02  ·  PROBABILITY &amp; STATISTICS</a:t>
             </a:r>
-            <a:endParaRPr lang="en-US" sz="1100" dirty="0"/>
+            <a:endParaRPr lang="en-US" sz="1300" dirty="0"/>
           </a:p>
         </p:txBody>
       </p:sp>
@@ -15206,7 +15206,7 @@
               <a:buNone/>
             </a:pPr>
             <a:r>
-              <a:rPr lang="en-US" sz="1600" dirty="0">
+              <a:rPr lang="en-US" sz="1800" dirty="0">
                 <a:solidFill>
                   <a:srgbClr val="FFFFFF"/>
                 </a:solidFill>
@@ -15216,7 +15216,7 @@
               </a:rPr>
               <a:t>Distribution · Confidence Intervals · Hypothesis Testing — all in service of answering Priya.</a:t>
             </a:r>
-            <a:endParaRPr lang="en-US" sz="1600" dirty="0"/>
+            <a:endParaRPr lang="en-US" sz="1800" dirty="0"/>
           </a:p>
         </p:txBody>
       </p:sp>
@@ -15245,7 +15245,7 @@
               <a:buNone/>
             </a:pPr>
             <a:r>
-              <a:rPr lang="en-US" sz="1200" i="1" dirty="0">
+              <a:rPr lang="en-US" sz="1400" i="1" dirty="0">
                 <a:solidFill>
                   <a:srgbClr val="FFFFFF">
                     <a:alpha val="70000"/>
@@ -15257,7 +15257,7 @@
               </a:rPr>
               <a:t>Come to L02 ready to help Sarah answer the question.</a:t>
             </a:r>
-            <a:endParaRPr lang="en-US" sz="1200" dirty="0"/>
+            <a:endParaRPr lang="en-US" sz="1400" dirty="0"/>
           </a:p>
         </p:txBody>
       </p:sp>
@@ -15343,7 +15343,7 @@
               <a:buNone/>
             </a:pPr>
             <a:r>
-              <a:rPr lang="en-US" sz="1400" b="1" dirty="0">
+              <a:rPr lang="en-US" sz="1600" b="1" dirty="0">
                 <a:solidFill>
                   <a:srgbClr val="FFFFFF"/>
                 </a:solidFill>
@@ -15353,7 +15353,7 @@
               </a:rPr>
               <a:t>Assignment Preview &amp; Q&amp;A</a:t>
             </a:r>
-            <a:endParaRPr lang="en-US" sz="1400" dirty="0"/>
+            <a:endParaRPr lang="en-US" sz="1600" dirty="0"/>
           </a:p>
         </p:txBody>
       </p:sp>
@@ -15382,7 +15382,7 @@
               <a:buNone/>
             </a:pPr>
             <a:r>
-              <a:rPr lang="en-US" sz="1000" spc="200" kern="0" dirty="0">
+              <a:rPr lang="en-US" sz="1200" spc="200" kern="0" dirty="0">
                 <a:solidFill>
                   <a:srgbClr val="FFFFFF">
                     <a:alpha val="70000"/>
@@ -15394,7 +15394,7 @@
               </a:rPr>
               <a:t>L01 · Slide 22/22</a:t>
             </a:r>
-            <a:endParaRPr lang="en-US" sz="1000" dirty="0"/>
+            <a:endParaRPr lang="en-US" sz="1200" dirty="0"/>
           </a:p>
         </p:txBody>
       </p:sp>
@@ -15576,7 +15576,7 @@
               <a:buNone/>
             </a:pPr>
             <a:r>
-              <a:rPr lang="en-US" sz="1100" b="1" spc="500" kern="0" dirty="0">
+              <a:rPr lang="en-US" sz="1300" b="1" spc="500" kern="0" dirty="0">
                 <a:solidFill>
                   <a:srgbClr val="C8102E"/>
                 </a:solidFill>
@@ -15586,7 +15586,7 @@
               </a:rPr>
               <a:t>📝   ASSIGNMENT</a:t>
             </a:r>
-            <a:endParaRPr lang="en-US" sz="1100" dirty="0"/>
+            <a:endParaRPr lang="en-US" sz="1300" dirty="0"/>
           </a:p>
         </p:txBody>
       </p:sp>
@@ -15615,7 +15615,7 @@
               <a:buNone/>
             </a:pPr>
             <a:r>
-              <a:rPr lang="en-US" sz="1300" b="1" dirty="0">
+              <a:rPr lang="en-US" sz="1500" b="1" dirty="0">
                 <a:solidFill>
                   <a:srgbClr val="1B2A4A"/>
                 </a:solidFill>
@@ -15625,7 +15625,7 @@
               </a:rPr>
               <a:t>Open: notebooks/assignment.ipynb</a:t>
             </a:r>
-            <a:endParaRPr lang="en-US" sz="1300" dirty="0"/>
+            <a:endParaRPr lang="en-US" sz="1500" dirty="0"/>
           </a:p>
         </p:txBody>
       </p:sp>
@@ -15657,7 +15657,7 @@
               <a:buNone/>
             </a:pPr>
             <a:r>
-              <a:rPr lang="en-US" sz="1300" dirty="0">
+              <a:rPr lang="en-US" sz="1500" dirty="0">
                 <a:solidFill>
                   <a:srgbClr val="333D4D"/>
                 </a:solidFill>
@@ -15674,7 +15674,7 @@
               <a:buNone/>
             </a:pPr>
             <a:r>
-              <a:rPr lang="en-US" sz="1300" b="1" dirty="0">
+              <a:rPr lang="en-US" sz="1500" b="1" dirty="0">
                 <a:solidFill>
                   <a:srgbClr val="1B2A4A"/>
                 </a:solidFill>
@@ -15692,7 +15692,7 @@
               <a:buNone/>
             </a:pPr>
             <a:r>
-              <a:rPr lang="en-US" sz="1300" dirty="0">
+              <a:rPr lang="en-US" sz="1500" dirty="0">
                 <a:solidFill>
                   <a:srgbClr val="333D4D"/>
                 </a:solidFill>
@@ -15710,7 +15710,7 @@
               <a:buNone/>
             </a:pPr>
             <a:r>
-              <a:rPr lang="en-US" sz="1300" dirty="0">
+              <a:rPr lang="en-US" sz="1500" dirty="0">
                 <a:solidFill>
                   <a:srgbClr val="333D4D"/>
                 </a:solidFill>
@@ -15728,7 +15728,7 @@
               <a:buNone/>
             </a:pPr>
             <a:r>
-              <a:rPr lang="en-US" sz="1300" dirty="0">
+              <a:rPr lang="en-US" sz="1500" dirty="0">
                 <a:solidFill>
                   <a:srgbClr val="333D4D"/>
                 </a:solidFill>
@@ -15745,7 +15745,7 @@
               <a:buNone/>
             </a:pPr>
             <a:r>
-              <a:rPr lang="en-US" sz="1300" b="1" dirty="0">
+              <a:rPr lang="en-US" sz="1500" b="1" dirty="0">
                 <a:solidFill>
                   <a:srgbClr val="1B2A4A"/>
                 </a:solidFill>
@@ -15763,7 +15763,7 @@
               <a:buNone/>
             </a:pPr>
             <a:r>
-              <a:rPr lang="en-US" sz="1300" dirty="0">
+              <a:rPr lang="en-US" sz="1500" dirty="0">
                 <a:solidFill>
                   <a:srgbClr val="333D4D"/>
                 </a:solidFill>
@@ -15773,7 +15773,7 @@
               </a:rPr>
               <a:t>•  Sample solutions at the bottom.</a:t>
             </a:r>
-            <a:endParaRPr lang="en-US" sz="1300" dirty="0"/>
+            <a:endParaRPr lang="en-US" sz="1500" dirty="0"/>
           </a:p>
         </p:txBody>
       </p:sp>
@@ -15802,7 +15802,7 @@
               <a:buNone/>
             </a:pPr>
             <a:r>
-              <a:rPr lang="en-US" sz="1000" b="1" spc="500" kern="0" dirty="0">
+              <a:rPr lang="en-US" sz="1200" b="1" spc="500" kern="0" dirty="0">
                 <a:solidFill>
                   <a:srgbClr val="C8102E"/>
                 </a:solidFill>
@@ -15812,7 +15812,7 @@
               </a:rPr>
               <a:t>DUE  ·  BEFORE L02 SESSION</a:t>
             </a:r>
-            <a:endParaRPr lang="en-US" sz="1000" dirty="0"/>
+            <a:endParaRPr lang="en-US" sz="1200" dirty="0"/>
           </a:p>
         </p:txBody>
       </p:sp>
@@ -15891,7 +15891,7 @@
               <a:buNone/>
             </a:pPr>
             <a:r>
-              <a:rPr lang="en-US" sz="1100" b="1" spc="500" kern="0" dirty="0">
+              <a:rPr lang="en-US" sz="1300" b="1" spc="500" kern="0" dirty="0">
                 <a:solidFill>
                   <a:srgbClr val="2C5697"/>
                 </a:solidFill>
@@ -15901,7 +15901,7 @@
               </a:rPr>
               <a:t>💬   Q&amp;A</a:t>
             </a:r>
-            <a:endParaRPr lang="en-US" sz="1100" dirty="0"/>
+            <a:endParaRPr lang="en-US" sz="1300" dirty="0"/>
           </a:p>
         </p:txBody>
       </p:sp>
@@ -15930,7 +15930,7 @@
               <a:buNone/>
             </a:pPr>
             <a:r>
-              <a:rPr lang="en-US" sz="1300" b="1" dirty="0">
+              <a:rPr lang="en-US" sz="1500" b="1" dirty="0">
                 <a:solidFill>
                   <a:srgbClr val="1B2A4A"/>
                 </a:solidFill>
@@ -15940,7 +15940,7 @@
               </a:rPr>
               <a:t>Common questions:</a:t>
             </a:r>
-            <a:endParaRPr lang="en-US" sz="1300" dirty="0"/>
+            <a:endParaRPr lang="en-US" sz="1500" dirty="0"/>
           </a:p>
         </p:txBody>
       </p:sp>
@@ -15972,7 +15972,7 @@
               <a:buNone/>
             </a:pPr>
             <a:r>
-              <a:rPr lang="en-US" sz="1300" dirty="0">
+              <a:rPr lang="en-US" sz="1500" dirty="0">
                 <a:solidFill>
                   <a:srgbClr val="333D4D"/>
                 </a:solidFill>
@@ -15982,7 +15982,7 @@
               </a:rPr>
               <a:t>•  Why use a pre-trained model vs train your own?</a:t>
             </a:r>
-            <a:endParaRPr lang="en-US" sz="1300" dirty="0"/>
+            <a:endParaRPr lang="en-US" sz="1500" dirty="0"/>
           </a:p>
           <a:p>
             <a:pPr indent="0" marL="0">
@@ -15992,7 +15992,7 @@
               <a:buNone/>
             </a:pPr>
             <a:r>
-              <a:rPr lang="en-US" sz="1300" dirty="0">
+              <a:rPr lang="en-US" sz="1500" dirty="0">
                 <a:solidFill>
                   <a:srgbClr val="333D4D"/>
                 </a:solidFill>
@@ -16002,7 +16002,7 @@
               </a:rPr>
               <a:t>•  When should I trust the confidence score?</a:t>
             </a:r>
-            <a:endParaRPr lang="en-US" sz="1300" dirty="0"/>
+            <a:endParaRPr lang="en-US" sz="1500" dirty="0"/>
           </a:p>
           <a:p>
             <a:pPr indent="0" marL="0">
@@ -16012,7 +16012,7 @@
               <a:buNone/>
             </a:pPr>
             <a:r>
-              <a:rPr lang="en-US" sz="1300" dirty="0">
+              <a:rPr lang="en-US" sz="1500" dirty="0">
                 <a:solidFill>
                   <a:srgbClr val="333D4D"/>
                 </a:solidFill>
@@ -16022,7 +16022,7 @@
               </a:rPr>
               <a:t>•  What if my problem doesn't fit any of the three categories?</a:t>
             </a:r>
-            <a:endParaRPr lang="en-US" sz="1300" dirty="0"/>
+            <a:endParaRPr lang="en-US" sz="1500" dirty="0"/>
           </a:p>
           <a:p>
             <a:pPr indent="0" marL="0">
@@ -16032,7 +16032,7 @@
               <a:buNone/>
             </a:pPr>
             <a:r>
-              <a:rPr lang="en-US" sz="1300" dirty="0">
+              <a:rPr lang="en-US" sz="1500" dirty="0">
                 <a:solidFill>
                   <a:srgbClr val="333D4D"/>
                 </a:solidFill>
@@ -16042,7 +16042,7 @@
               </a:rPr>
               <a:t>•  Will we train neural networks in this course?</a:t>
             </a:r>
-            <a:endParaRPr lang="en-US" sz="1300" dirty="0"/>
+            <a:endParaRPr lang="en-US" sz="1500" dirty="0"/>
           </a:p>
         </p:txBody>
       </p:sp>
@@ -16071,7 +16071,7 @@
               <a:buNone/>
             </a:pPr>
             <a:r>
-              <a:rPr lang="en-US" sz="1000" b="1" spc="500" kern="0" dirty="0">
+              <a:rPr lang="en-US" sz="1200" b="1" spc="500" kern="0" dirty="0">
                 <a:solidFill>
                   <a:srgbClr val="2C5697"/>
                 </a:solidFill>
@@ -16081,7 +16081,7 @@
               </a:rPr>
               <a:t>BRING YOUR OWN  ·  EVERY QUESTION HELPS THE ROOM</a:t>
             </a:r>
-            <a:endParaRPr lang="en-US" sz="1000" dirty="0"/>
+            <a:endParaRPr lang="en-US" sz="1200" dirty="0"/>
           </a:p>
         </p:txBody>
       </p:sp>
@@ -16167,7 +16167,7 @@
               <a:buNone/>
             </a:pPr>
             <a:r>
-              <a:rPr lang="en-US" sz="1400" b="1" dirty="0">
+              <a:rPr lang="en-US" sz="1600" b="1" dirty="0">
                 <a:solidFill>
                   <a:srgbClr val="FFFFFF"/>
                 </a:solidFill>
@@ -16177,7 +16177,7 @@
               </a:rPr>
               <a:t>The Shift in M3</a:t>
             </a:r>
-            <a:endParaRPr lang="en-US" sz="1400" dirty="0"/>
+            <a:endParaRPr lang="en-US" sz="1600" dirty="0"/>
           </a:p>
         </p:txBody>
       </p:sp>
@@ -16206,7 +16206,7 @@
               <a:buNone/>
             </a:pPr>
             <a:r>
-              <a:rPr lang="en-US" sz="1000" spc="200" kern="0" dirty="0">
+              <a:rPr lang="en-US" sz="1200" spc="200" kern="0" dirty="0">
                 <a:solidFill>
                   <a:srgbClr val="FFFFFF">
                     <a:alpha val="70000"/>
@@ -16218,7 +16218,7 @@
               </a:rPr>
               <a:t>L01 · Slide 3/22</a:t>
             </a:r>
-            <a:endParaRPr lang="en-US" sz="1000" dirty="0"/>
+            <a:endParaRPr lang="en-US" sz="1200" dirty="0"/>
           </a:p>
         </p:txBody>
       </p:sp>
@@ -16311,7 +16311,7 @@
               <a:buNone/>
             </a:pPr>
             <a:r>
-              <a:rPr lang="en-US" sz="2400" dirty="0">
+              <a:rPr lang="en-US" sz="2800" dirty="0">
                 <a:solidFill>
                   <a:srgbClr val="1B2A4A"/>
                 </a:solidFill>
@@ -16321,7 +16321,7 @@
               </a:rPr>
               <a:t>Same toolkit (Python, SQL, stats) — fundamentally new question.</a:t>
             </a:r>
-            <a:endParaRPr lang="en-US" sz="2400" dirty="0"/>
+            <a:endParaRPr lang="en-US" sz="2800" dirty="0"/>
           </a:p>
         </p:txBody>
       </p:sp>
@@ -16400,7 +16400,7 @@
               <a:buNone/>
             </a:pPr>
             <a:r>
-              <a:rPr lang="en-US" sz="1000" b="1" spc="600" kern="0" dirty="0">
+              <a:rPr lang="en-US" sz="1200" b="1" spc="600" kern="0" dirty="0">
                 <a:solidFill>
                   <a:srgbClr val="C8102E"/>
                 </a:solidFill>
@@ -16410,7 +16410,7 @@
               </a:rPr>
               <a:t>THE DEFINING SHIFT</a:t>
             </a:r>
-            <a:endParaRPr lang="en-US" sz="1000" dirty="0"/>
+            <a:endParaRPr lang="en-US" sz="1200" dirty="0"/>
           </a:p>
         </p:txBody>
       </p:sp>
@@ -16439,7 +16439,7 @@
               <a:buNone/>
             </a:pPr>
             <a:r>
-              <a:rPr lang="en-US" sz="1800" i="1" dirty="0">
+              <a:rPr lang="en-US" sz="2200" i="1" dirty="0">
                 <a:solidFill>
                   <a:srgbClr val="1B2A4A"/>
                 </a:solidFill>
@@ -16453,7 +16453,7 @@
               <a:buNone/>
             </a:pPr>
             <a:r>
-              <a:rPr lang="en-US" sz="1800" b="1" i="1" dirty="0">
+              <a:rPr lang="en-US" sz="2200" b="1" i="1" dirty="0">
                 <a:solidFill>
                   <a:srgbClr val="C8102E"/>
                 </a:solidFill>
@@ -16467,7 +16467,7 @@
               <a:buNone/>
             </a:pPr>
             <a:r>
-              <a:rPr lang="en-US" sz="1800" i="1" dirty="0">
+              <a:rPr lang="en-US" sz="2200" i="1" dirty="0">
                 <a:solidFill>
                   <a:srgbClr val="1B2A4A"/>
                 </a:solidFill>
@@ -16477,7 +16477,7 @@
               </a:rPr>
               <a:t>”</a:t>
             </a:r>
-            <a:endParaRPr lang="en-US" sz="1800" dirty="0"/>
+            <a:endParaRPr lang="en-US" sz="2200" dirty="0"/>
           </a:p>
         </p:txBody>
       </p:sp>
@@ -16556,7 +16556,7 @@
               <a:buNone/>
             </a:pPr>
             <a:r>
-              <a:rPr lang="en-US" sz="1000" b="1" spc="600" kern="0" dirty="0">
+              <a:rPr lang="en-US" sz="1200" b="1" spc="600" kern="0" dirty="0">
                 <a:solidFill>
                   <a:srgbClr val="2C5697"/>
                 </a:solidFill>
@@ -16566,7 +16566,7 @@
               </a:rPr>
               <a:t>WHAT YOU ALREADY HAVE</a:t>
             </a:r>
-            <a:endParaRPr lang="en-US" sz="1000" dirty="0"/>
+            <a:endParaRPr lang="en-US" sz="1200" dirty="0"/>
           </a:p>
         </p:txBody>
       </p:sp>
@@ -16598,7 +16598,7 @@
               <a:buNone/>
             </a:pPr>
             <a:r>
-              <a:rPr lang="en-US" sz="1300" dirty="0">
+              <a:rPr lang="en-US" sz="1500" dirty="0">
                 <a:solidFill>
                   <a:srgbClr val="333D4D"/>
                 </a:solidFill>
@@ -16608,7 +16608,7 @@
               </a:rPr>
               <a:t>✓  Python · SQL · pandas · matplotlib · descriptive statistics</a:t>
             </a:r>
-            <a:endParaRPr lang="en-US" sz="1300" dirty="0"/>
+            <a:endParaRPr lang="en-US" sz="1500" dirty="0"/>
           </a:p>
           <a:p>
             <a:pPr indent="0" marL="0">
@@ -16618,7 +16618,7 @@
               <a:buNone/>
             </a:pPr>
             <a:r>
-              <a:rPr lang="en-US" sz="1300" dirty="0">
+              <a:rPr lang="en-US" sz="1500" dirty="0">
                 <a:solidFill>
                   <a:srgbClr val="333D4D"/>
                 </a:solidFill>
@@ -16628,7 +16628,7 @@
               </a:rPr>
               <a:t>✓  Reading data, joining tables, cleaning columns</a:t>
             </a:r>
-            <a:endParaRPr lang="en-US" sz="1300" dirty="0"/>
+            <a:endParaRPr lang="en-US" sz="1500" dirty="0"/>
           </a:p>
           <a:p>
             <a:pPr indent="0" marL="0">
@@ -16638,7 +16638,7 @@
               <a:buNone/>
             </a:pPr>
             <a:r>
-              <a:rPr lang="en-US" sz="1300" dirty="0">
+              <a:rPr lang="en-US" sz="1500" dirty="0">
                 <a:solidFill>
                   <a:srgbClr val="333D4D"/>
                 </a:solidFill>
@@ -16648,7 +16648,7 @@
               </a:rPr>
               <a:t>✓  Producing charts and dashboards that summarise the past</a:t>
             </a:r>
-            <a:endParaRPr lang="en-US" sz="1300" dirty="0"/>
+            <a:endParaRPr lang="en-US" sz="1500" dirty="0"/>
           </a:p>
         </p:txBody>
       </p:sp>
@@ -16727,7 +16727,7 @@
               <a:buNone/>
             </a:pPr>
             <a:r>
-              <a:rPr lang="en-US" sz="1000" b="1" spc="600" kern="0" dirty="0">
+              <a:rPr lang="en-US" sz="1200" b="1" spc="600" kern="0" dirty="0">
                 <a:solidFill>
                   <a:srgbClr val="C8102E"/>
                 </a:solidFill>
@@ -16737,7 +16737,7 @@
               </a:rPr>
               <a:t>WHAT IS GENUINELY NEW</a:t>
             </a:r>
-            <a:endParaRPr lang="en-US" sz="1000" dirty="0"/>
+            <a:endParaRPr lang="en-US" sz="1200" dirty="0"/>
           </a:p>
         </p:txBody>
       </p:sp>
@@ -16766,7 +16766,7 @@
               <a:buNone/>
             </a:pPr>
             <a:r>
-              <a:rPr lang="en-US" sz="1300" b="1" dirty="0">
+              <a:rPr lang="en-US" sz="1500" b="1" dirty="0">
                 <a:solidFill>
                   <a:srgbClr val="C8102E"/>
                 </a:solidFill>
@@ -16780,7 +16780,7 @@
               <a:buNone/>
             </a:pPr>
             <a:r>
-              <a:rPr lang="en-US" sz="1300" dirty="0">
+              <a:rPr lang="en-US" sz="1500" dirty="0">
                 <a:solidFill>
                   <a:srgbClr val="333D4D"/>
                 </a:solidFill>
@@ -16795,7 +16795,7 @@
               <a:buNone/>
             </a:pPr>
             <a:r>
-              <a:rPr lang="en-US" sz="1300" b="1" dirty="0">
+              <a:rPr lang="en-US" sz="1500" b="1" dirty="0">
                 <a:solidFill>
                   <a:srgbClr val="C8102E"/>
                 </a:solidFill>
@@ -16809,7 +16809,7 @@
               <a:buNone/>
             </a:pPr>
             <a:r>
-              <a:rPr lang="en-US" sz="1300" dirty="0">
+              <a:rPr lang="en-US" sz="1500" dirty="0">
                 <a:solidFill>
                   <a:srgbClr val="333D4D"/>
                 </a:solidFill>
@@ -16819,7 +16819,7 @@
               </a:rPr>
               <a:t>A new vocabulary: training · inference · features · labels · supervised vs unsupervised.</a:t>
             </a:r>
-            <a:endParaRPr lang="en-US" sz="1300" dirty="0"/>
+            <a:endParaRPr lang="en-US" sz="1500" dirty="0"/>
           </a:p>
         </p:txBody>
       </p:sp>
@@ -16905,7 +16905,7 @@
               <a:buNone/>
             </a:pPr>
             <a:r>
-              <a:rPr lang="en-US" sz="1400" b="1" dirty="0">
+              <a:rPr lang="en-US" sz="1600" b="1" dirty="0">
                 <a:solidFill>
                   <a:srgbClr val="FFFFFF"/>
                 </a:solidFill>
@@ -16915,7 +16915,7 @@
               </a:rPr>
               <a:t>Meet Sarah Chen</a:t>
             </a:r>
-            <a:endParaRPr lang="en-US" sz="1400" dirty="0"/>
+            <a:endParaRPr lang="en-US" sz="1600" dirty="0"/>
           </a:p>
         </p:txBody>
       </p:sp>
@@ -16944,7 +16944,7 @@
               <a:buNone/>
             </a:pPr>
             <a:r>
-              <a:rPr lang="en-US" sz="1000" spc="200" kern="0" dirty="0">
+              <a:rPr lang="en-US" sz="1200" spc="200" kern="0" dirty="0">
                 <a:solidFill>
                   <a:srgbClr val="FFFFFF">
                     <a:alpha val="70000"/>
@@ -16956,7 +16956,7 @@
               </a:rPr>
               <a:t>L01 · Slide 4/22</a:t>
             </a:r>
-            <a:endParaRPr lang="en-US" sz="1000" dirty="0"/>
+            <a:endParaRPr lang="en-US" sz="1200" dirty="0"/>
           </a:p>
         </p:txBody>
       </p:sp>
@@ -17088,7 +17088,7 @@
               <a:buNone/>
             </a:pPr>
             <a:r>
-              <a:rPr lang="en-US" sz="1400" i="1" dirty="0">
+              <a:rPr lang="en-US" sz="1600" i="1" dirty="0">
                 <a:solidFill>
                   <a:srgbClr val="5F6B7A"/>
                 </a:solidFill>
@@ -17098,7 +17098,7 @@
               </a:rPr>
               <a:t>Customer Experience Analyst, NorthStar Retail — our protagonist for all of M3.</a:t>
             </a:r>
-            <a:endParaRPr lang="en-US" sz="1400" dirty="0"/>
+            <a:endParaRPr lang="en-US" sz="1600" dirty="0"/>
           </a:p>
         </p:txBody>
       </p:sp>
@@ -17202,7 +17202,7 @@
               <a:buNone/>
             </a:pPr>
             <a:r>
-              <a:rPr lang="en-US" sz="4400" b="1" dirty="0">
+              <a:rPr lang="en-US" sz="5000" b="1" dirty="0">
                 <a:solidFill>
                   <a:srgbClr val="FFFFFF"/>
                 </a:solidFill>
@@ -17212,7 +17212,7 @@
               </a:rPr>
               <a:t>SC</a:t>
             </a:r>
-            <a:endParaRPr lang="en-US" sz="4400" dirty="0"/>
+            <a:endParaRPr lang="en-US" sz="5000" dirty="0"/>
           </a:p>
         </p:txBody>
       </p:sp>
@@ -17241,7 +17241,7 @@
               <a:buNone/>
             </a:pPr>
             <a:r>
-              <a:rPr lang="en-US" sz="2200" b="1" dirty="0">
+              <a:rPr lang="en-US" sz="2600" b="1" dirty="0">
                 <a:solidFill>
                   <a:srgbClr val="1B2A4A"/>
                 </a:solidFill>
@@ -17251,7 +17251,7 @@
               </a:rPr>
               <a:t>Sarah Chen</a:t>
             </a:r>
-            <a:endParaRPr lang="en-US" sz="2200" dirty="0"/>
+            <a:endParaRPr lang="en-US" sz="2600" dirty="0"/>
           </a:p>
         </p:txBody>
       </p:sp>
@@ -17280,7 +17280,7 @@
               <a:buNone/>
             </a:pPr>
             <a:r>
-              <a:rPr lang="en-US" sz="1200" dirty="0">
+              <a:rPr lang="en-US" sz="1400" dirty="0">
                 <a:solidFill>
                   <a:srgbClr val="333D4D"/>
                 </a:solidFill>
@@ -17290,7 +17290,7 @@
               </a:rPr>
               <a:t>Customer Experience Analyst</a:t>
             </a:r>
-            <a:endParaRPr lang="en-US" sz="1200" dirty="0"/>
+            <a:endParaRPr lang="en-US" sz="1400" dirty="0"/>
           </a:p>
         </p:txBody>
       </p:sp>
@@ -17319,7 +17319,7 @@
               <a:buNone/>
             </a:pPr>
             <a:r>
-              <a:rPr lang="en-US" sz="900" b="1" spc="500" kern="0" dirty="0">
+              <a:rPr lang="en-US" sz="1100" b="1" spc="500" kern="0" dirty="0">
                 <a:solidFill>
                   <a:srgbClr val="C8102E"/>
                 </a:solidFill>
@@ -17329,7 +17329,7 @@
               </a:rPr>
               <a:t>NORTHSTAR RETAIL  ·  2ND WEEK</a:t>
             </a:r>
-            <a:endParaRPr lang="en-US" sz="900" dirty="0"/>
+            <a:endParaRPr lang="en-US" sz="1100" dirty="0"/>
           </a:p>
         </p:txBody>
       </p:sp>
@@ -17358,7 +17358,7 @@
               <a:buNone/>
             </a:pPr>
             <a:r>
-              <a:rPr lang="en-US" sz="1100" i="1" dirty="0">
+              <a:rPr lang="en-US" sz="1300" i="1" dirty="0">
                 <a:solidFill>
                   <a:srgbClr val="5F6B7A"/>
                 </a:solidFill>
@@ -17368,14 +17368,14 @@
               </a:rPr>
               <a:t>Smart, motivated, a little nervous.</a:t>
             </a:r>
-            <a:endParaRPr lang="en-US" sz="1100" dirty="0"/>
+            <a:endParaRPr lang="en-US" sz="1300" dirty="0"/>
           </a:p>
           <a:p>
             <a:pPr algn="ctr" indent="0" marL="0">
               <a:buNone/>
             </a:pPr>
             <a:r>
-              <a:rPr lang="en-US" sz="1100" i="1" dirty="0">
+              <a:rPr lang="en-US" sz="1300" i="1" dirty="0">
                 <a:solidFill>
                   <a:srgbClr val="5F6B7A"/>
                 </a:solidFill>
@@ -17385,7 +17385,7 @@
               </a:rPr>
               <a:t>First real ML task this week.</a:t>
             </a:r>
-            <a:endParaRPr lang="en-US" sz="1100" dirty="0"/>
+            <a:endParaRPr lang="en-US" sz="1300" dirty="0"/>
           </a:p>
         </p:txBody>
       </p:sp>
@@ -17464,7 +17464,7 @@
               <a:buNone/>
             </a:pPr>
             <a:r>
-              <a:rPr lang="en-US" sz="1000" b="1" spc="500" kern="0" dirty="0">
+              <a:rPr lang="en-US" sz="1200" b="1" spc="500" kern="0" dirty="0">
                 <a:solidFill>
                   <a:srgbClr val="C8102E"/>
                 </a:solidFill>
@@ -17474,7 +17474,7 @@
               </a:rPr>
               <a:t>HER FIRST BIG ASK, DROPPED ON HER DESK:</a:t>
             </a:r>
-            <a:endParaRPr lang="en-US" sz="1000" dirty="0"/>
+            <a:endParaRPr lang="en-US" sz="1200" dirty="0"/>
           </a:p>
         </p:txBody>
       </p:sp>
@@ -17503,7 +17503,7 @@
               <a:buNone/>
             </a:pPr>
             <a:r>
-              <a:rPr lang="en-US" sz="1700" i="1" dirty="0">
+              <a:rPr lang="en-US" sz="2000" i="1" dirty="0">
                 <a:solidFill>
                   <a:srgbClr val="1B2A4A"/>
                 </a:solidFill>
@@ -17517,7 +17517,7 @@
               <a:buNone/>
             </a:pPr>
             <a:r>
-              <a:rPr lang="en-US" sz="1700" b="1" i="1" dirty="0">
+              <a:rPr lang="en-US" sz="2000" b="1" i="1" dirty="0">
                 <a:solidFill>
                   <a:srgbClr val="C8102E"/>
                 </a:solidFill>
@@ -17531,7 +17531,7 @@
               <a:buNone/>
             </a:pPr>
             <a:r>
-              <a:rPr lang="en-US" sz="1700" i="1" dirty="0">
+              <a:rPr lang="en-US" sz="2000" i="1" dirty="0">
                 <a:solidFill>
                   <a:srgbClr val="1B2A4A"/>
                 </a:solidFill>
@@ -17541,20 +17541,20 @@
               </a:rPr>
               <a:t> are positive and which are negative.</a:t>
             </a:r>
-            <a:endParaRPr lang="en-US" sz="1700" dirty="0"/>
-          </a:p>
-          <a:p>
-            <a:pPr indent="0" marL="0">
-              <a:buNone/>
-            </a:pPr>
-            <a:endParaRPr lang="en-US" sz="1700" dirty="0"/>
-          </a:p>
-          <a:p>
-            <a:pPr indent="0" marL="0">
-              <a:buNone/>
-            </a:pPr>
-            <a:r>
-              <a:rPr lang="en-US" sz="1700" i="1" dirty="0">
+            <a:endParaRPr lang="en-US" sz="2000" dirty="0"/>
+          </a:p>
+          <a:p>
+            <a:pPr indent="0" marL="0">
+              <a:buNone/>
+            </a:pPr>
+            <a:endParaRPr lang="en-US" sz="2000" dirty="0"/>
+          </a:p>
+          <a:p>
+            <a:pPr indent="0" marL="0">
+              <a:buNone/>
+            </a:pPr>
+            <a:r>
+              <a:rPr lang="en-US" sz="2000" i="1" dirty="0">
                 <a:solidFill>
                   <a:srgbClr val="1B2A4A"/>
                 </a:solidFill>
@@ -17564,20 +17564,20 @@
               </a:rPr>
               <a:t>Hand-reading them would take a full work-week.</a:t>
             </a:r>
-            <a:endParaRPr lang="en-US" sz="1700" dirty="0"/>
-          </a:p>
-          <a:p>
-            <a:pPr indent="0" marL="0">
-              <a:buNone/>
-            </a:pPr>
-            <a:endParaRPr lang="en-US" sz="1700" dirty="0"/>
-          </a:p>
-          <a:p>
-            <a:pPr indent="0" marL="0">
-              <a:buNone/>
-            </a:pPr>
-            <a:r>
-              <a:rPr lang="en-US" sz="1700" i="1" dirty="0">
+            <a:endParaRPr lang="en-US" sz="2000" dirty="0"/>
+          </a:p>
+          <a:p>
+            <a:pPr indent="0" marL="0">
+              <a:buNone/>
+            </a:pPr>
+            <a:endParaRPr lang="en-US" sz="2000" dirty="0"/>
+          </a:p>
+          <a:p>
+            <a:pPr indent="0" marL="0">
+              <a:buNone/>
+            </a:pPr>
+            <a:r>
+              <a:rPr lang="en-US" sz="2000" i="1" dirty="0">
                 <a:solidFill>
                   <a:srgbClr val="1B2A4A"/>
                 </a:solidFill>
@@ -17587,7 +17587,7 @@
               </a:rPr>
               <a:t>Figure something out.”</a:t>
             </a:r>
-            <a:endParaRPr lang="en-US" sz="1700" dirty="0"/>
+            <a:endParaRPr lang="en-US" sz="2000" dirty="0"/>
           </a:p>
         </p:txBody>
       </p:sp>
@@ -17616,7 +17616,7 @@
               <a:buNone/>
             </a:pPr>
             <a:r>
-              <a:rPr lang="en-US" sz="1000" b="1" spc="400" kern="0" dirty="0">
+              <a:rPr lang="en-US" sz="1200" b="1" spc="400" kern="0" dirty="0">
                 <a:solidFill>
                   <a:srgbClr val="5F6B7A"/>
                 </a:solidFill>
@@ -17626,7 +17626,7 @@
               </a:rPr>
               <a:t>— Priya  ·  Sarah's manager</a:t>
             </a:r>
-            <a:endParaRPr lang="en-US" sz="1000" dirty="0"/>
+            <a:endParaRPr lang="en-US" sz="1200" dirty="0"/>
           </a:p>
         </p:txBody>
       </p:sp>
@@ -17712,7 +17712,7 @@
               <a:buNone/>
             </a:pPr>
             <a:r>
-              <a:rPr lang="en-US" sz="1400" b="1" dirty="0">
+              <a:rPr lang="en-US" sz="1600" b="1" dirty="0">
                 <a:solidFill>
                   <a:srgbClr val="FFFFFF"/>
                 </a:solidFill>
@@ -17722,7 +17722,7 @@
               </a:rPr>
               <a:t>The Scale Problem</a:t>
             </a:r>
-            <a:endParaRPr lang="en-US" sz="1400" dirty="0"/>
+            <a:endParaRPr lang="en-US" sz="1600" dirty="0"/>
           </a:p>
         </p:txBody>
       </p:sp>
@@ -17751,7 +17751,7 @@
               <a:buNone/>
             </a:pPr>
             <a:r>
-              <a:rPr lang="en-US" sz="1000" spc="200" kern="0" dirty="0">
+              <a:rPr lang="en-US" sz="1200" spc="200" kern="0" dirty="0">
                 <a:solidFill>
                   <a:srgbClr val="FFFFFF">
                     <a:alpha val="70000"/>
@@ -17763,7 +17763,7 @@
               </a:rPr>
               <a:t>L01 · Slide 5/22</a:t>
             </a:r>
-            <a:endParaRPr lang="en-US" sz="1000" dirty="0"/>
+            <a:endParaRPr lang="en-US" sz="1200" dirty="0"/>
           </a:p>
         </p:txBody>
       </p:sp>
@@ -17945,7 +17945,7 @@
               <a:buNone/>
             </a:pPr>
             <a:r>
-              <a:rPr lang="en-US" sz="4400" b="1" dirty="0">
+              <a:rPr lang="en-US" sz="5000" b="1" dirty="0">
                 <a:solidFill>
                   <a:srgbClr val="1B2A4A"/>
                 </a:solidFill>
@@ -17955,7 +17955,7 @@
               </a:rPr>
               <a:t>10,000</a:t>
             </a:r>
-            <a:endParaRPr lang="en-US" sz="4400" dirty="0"/>
+            <a:endParaRPr lang="en-US" sz="5000" dirty="0"/>
           </a:p>
         </p:txBody>
       </p:sp>
@@ -17984,7 +17984,7 @@
               <a:buNone/>
             </a:pPr>
             <a:r>
-              <a:rPr lang="en-US" sz="1100" b="1" spc="300" kern="0" dirty="0">
+              <a:rPr lang="en-US" sz="1300" b="1" spc="300" kern="0" dirty="0">
                 <a:solidFill>
                   <a:srgbClr val="5F6B7A"/>
                 </a:solidFill>
@@ -17994,7 +17994,7 @@
               </a:rPr>
               <a:t>Customer reviews</a:t>
             </a:r>
-            <a:endParaRPr lang="en-US" sz="1100" dirty="0"/>
+            <a:endParaRPr lang="en-US" sz="1300" dirty="0"/>
           </a:p>
         </p:txBody>
       </p:sp>
@@ -18073,7 +18073,7 @@
               <a:buNone/>
             </a:pPr>
             <a:r>
-              <a:rPr lang="en-US" sz="4400" b="1" dirty="0">
+              <a:rPr lang="en-US" sz="5000" b="1" dirty="0">
                 <a:solidFill>
                   <a:srgbClr val="1B2A4A"/>
                 </a:solidFill>
@@ -18083,7 +18083,7 @@
               </a:rPr>
               <a:t>~30s</a:t>
             </a:r>
-            <a:endParaRPr lang="en-US" sz="4400" dirty="0"/>
+            <a:endParaRPr lang="en-US" sz="5000" dirty="0"/>
           </a:p>
         </p:txBody>
       </p:sp>
@@ -18112,7 +18112,7 @@
               <a:buNone/>
             </a:pPr>
             <a:r>
-              <a:rPr lang="en-US" sz="1100" b="1" spc="300" kern="0" dirty="0">
+              <a:rPr lang="en-US" sz="1300" b="1" spc="300" kern="0" dirty="0">
                 <a:solidFill>
                   <a:srgbClr val="5F6B7A"/>
                 </a:solidFill>
@@ -18122,7 +18122,7 @@
               </a:rPr>
               <a:t>To read each carefully</a:t>
             </a:r>
-            <a:endParaRPr lang="en-US" sz="1100" dirty="0"/>
+            <a:endParaRPr lang="en-US" sz="1300" dirty="0"/>
           </a:p>
         </p:txBody>
       </p:sp>
@@ -18201,7 +18201,7 @@
               <a:buNone/>
             </a:pPr>
             <a:r>
-              <a:rPr lang="en-US" sz="4400" b="1" dirty="0">
+              <a:rPr lang="en-US" sz="5000" b="1" dirty="0">
                 <a:solidFill>
                   <a:srgbClr val="C8102E"/>
                 </a:solidFill>
@@ -18211,7 +18211,7 @@
               </a:rPr>
               <a:t>83 hrs</a:t>
             </a:r>
-            <a:endParaRPr lang="en-US" sz="4400" dirty="0"/>
+            <a:endParaRPr lang="en-US" sz="5000" dirty="0"/>
           </a:p>
         </p:txBody>
       </p:sp>
@@ -18240,7 +18240,7 @@
               <a:buNone/>
             </a:pPr>
             <a:r>
-              <a:rPr lang="en-US" sz="1100" b="1" spc="300" kern="0" dirty="0">
+              <a:rPr lang="en-US" sz="1300" b="1" spc="300" kern="0" dirty="0">
                 <a:solidFill>
                   <a:srgbClr val="5F6B7A"/>
                 </a:solidFill>
@@ -18250,7 +18250,7 @@
               </a:rPr>
               <a:t>To read them all</a:t>
             </a:r>
-            <a:endParaRPr lang="en-US" sz="1100" dirty="0"/>
+            <a:endParaRPr lang="en-US" sz="1300" dirty="0"/>
           </a:p>
         </p:txBody>
       </p:sp>
@@ -18329,7 +18329,7 @@
               <a:buNone/>
             </a:pPr>
             <a:r>
-              <a:rPr lang="en-US" sz="4400" b="1" dirty="0">
+              <a:rPr lang="en-US" sz="5000" b="1" dirty="0">
                 <a:solidFill>
                   <a:srgbClr val="1B2A4A"/>
                 </a:solidFill>
@@ -18339,7 +18339,7 @@
               </a:rPr>
               <a:t>5 days</a:t>
             </a:r>
-            <a:endParaRPr lang="en-US" sz="4400" dirty="0"/>
+            <a:endParaRPr lang="en-US" sz="5000" dirty="0"/>
           </a:p>
         </p:txBody>
       </p:sp>
@@ -18368,7 +18368,7 @@
               <a:buNone/>
             </a:pPr>
             <a:r>
-              <a:rPr lang="en-US" sz="1100" b="1" spc="300" kern="0" dirty="0">
+              <a:rPr lang="en-US" sz="1300" b="1" spc="300" kern="0" dirty="0">
                 <a:solidFill>
                   <a:srgbClr val="5F6B7A"/>
                 </a:solidFill>
@@ -18378,7 +18378,7 @@
               </a:rPr>
               <a:t>Until Priya's meeting</a:t>
             </a:r>
-            <a:endParaRPr lang="en-US" sz="1100" dirty="0"/>
+            <a:endParaRPr lang="en-US" sz="1300" dirty="0"/>
           </a:p>
         </p:txBody>
       </p:sp>
@@ -18457,7 +18457,7 @@
               <a:buNone/>
             </a:pPr>
             <a:r>
-              <a:rPr lang="en-US" sz="1000" b="1" spc="500" kern="0" dirty="0">
+              <a:rPr lang="en-US" sz="1200" b="1" spc="500" kern="0" dirty="0">
                 <a:solidFill>
                   <a:srgbClr val="C8102E"/>
                 </a:solidFill>
@@ -18467,7 +18467,7 @@
               </a:rPr>
               <a:t>SARAH'S FIRST THOUGHT</a:t>
             </a:r>
-            <a:endParaRPr lang="en-US" sz="1000" dirty="0"/>
+            <a:endParaRPr lang="en-US" sz="1200" dirty="0"/>
           </a:p>
         </p:txBody>
       </p:sp>
@@ -18496,7 +18496,7 @@
               <a:buNone/>
             </a:pPr>
             <a:r>
-              <a:rPr lang="en-US" sz="1600" i="1" dirty="0">
+              <a:rPr lang="en-US" sz="1800" i="1" dirty="0">
                 <a:solidFill>
                   <a:srgbClr val="1B2A4A"/>
                 </a:solidFill>
@@ -18510,7 +18510,7 @@
               <a:buNone/>
             </a:pPr>
             <a:r>
-              <a:rPr lang="en-US" sz="1600" b="1" i="1" dirty="0">
+              <a:rPr lang="en-US" sz="1800" b="1" i="1" dirty="0">
                 <a:solidFill>
                   <a:srgbClr val="2C5697"/>
                 </a:solidFill>
@@ -18524,7 +18524,7 @@
               <a:buNone/>
             </a:pPr>
             <a:r>
-              <a:rPr lang="en-US" sz="1600" i="1" dirty="0">
+              <a:rPr lang="en-US" sz="1800" i="1" dirty="0">
                 <a:solidFill>
                   <a:srgbClr val="1B2A4A"/>
                 </a:solidFill>
@@ -18538,7 +18538,7 @@
               <a:buNone/>
             </a:pPr>
             <a:r>
-              <a:rPr lang="en-US" sz="1600" b="1" i="1" dirty="0">
+              <a:rPr lang="en-US" sz="1800" b="1" i="1" dirty="0">
                 <a:solidFill>
                   <a:srgbClr val="2C5697"/>
                 </a:solidFill>
@@ -18552,7 +18552,7 @@
               <a:buNone/>
             </a:pPr>
             <a:r>
-              <a:rPr lang="en-US" sz="1600" i="1" dirty="0">
+              <a:rPr lang="en-US" sz="1800" i="1" dirty="0">
                 <a:solidFill>
                   <a:srgbClr val="1B2A4A"/>
                 </a:solidFill>
@@ -18567,7 +18567,7 @@
               <a:buNone/>
             </a:pPr>
             <a:r>
-              <a:rPr lang="en-US" sz="1600" b="1" i="1" dirty="0">
+              <a:rPr lang="en-US" sz="1800" b="1" i="1" dirty="0">
                 <a:solidFill>
                   <a:srgbClr val="5F6B7A"/>
                 </a:solidFill>
@@ -18577,7 +18577,7 @@
               </a:rPr>
               <a:t>→  That's rule-based programming. Let's try it.</a:t>
             </a:r>
-            <a:endParaRPr lang="en-US" sz="1600" dirty="0"/>
+            <a:endParaRPr lang="en-US" sz="1800" dirty="0"/>
           </a:p>
         </p:txBody>
       </p:sp>
@@ -18663,7 +18663,7 @@
               <a:buNone/>
             </a:pPr>
             <a:r>
-              <a:rPr lang="en-US" sz="1400" b="1" dirty="0">
+              <a:rPr lang="en-US" sz="1600" b="1" dirty="0">
                 <a:solidFill>
                   <a:srgbClr val="FFFFFF"/>
                 </a:solidFill>
@@ -18673,7 +18673,7 @@
               </a:rPr>
               <a:t>Approach 1: Rule-Based Programming</a:t>
             </a:r>
-            <a:endParaRPr lang="en-US" sz="1400" dirty="0"/>
+            <a:endParaRPr lang="en-US" sz="1600" dirty="0"/>
           </a:p>
         </p:txBody>
       </p:sp>
@@ -18702,7 +18702,7 @@
               <a:buNone/>
             </a:pPr>
             <a:r>
-              <a:rPr lang="en-US" sz="1000" spc="200" kern="0" dirty="0">
+              <a:rPr lang="en-US" sz="1200" spc="200" kern="0" dirty="0">
                 <a:solidFill>
                   <a:srgbClr val="FFFFFF">
                     <a:alpha val="70000"/>
@@ -18714,7 +18714,7 @@
               </a:rPr>
               <a:t>L01 · Slide 6/22</a:t>
             </a:r>
-            <a:endParaRPr lang="en-US" sz="1000" dirty="0"/>
+            <a:endParaRPr lang="en-US" sz="1200" dirty="0"/>
           </a:p>
         </p:txBody>
       </p:sp>
@@ -18896,7 +18896,7 @@
               <a:buNone/>
             </a:pPr>
             <a:r>
-              <a:rPr lang="en-US" sz="1000" b="1" spc="500" kern="0" dirty="0">
+              <a:rPr lang="en-US" sz="1200" b="1" spc="500" kern="0" dirty="0">
                 <a:solidFill>
                   <a:srgbClr val="2C5697"/>
                 </a:solidFill>
@@ -18906,7 +18906,7 @@
               </a:rPr>
               <a:t>THE PLAN</a:t>
             </a:r>
-            <a:endParaRPr lang="en-US" sz="1000" dirty="0"/>
+            <a:endParaRPr lang="en-US" sz="1200" dirty="0"/>
           </a:p>
         </p:txBody>
       </p:sp>
@@ -18960,7 +18960,7 @@
               <a:buNone/>
             </a:pPr>
             <a:r>
-              <a:rPr lang="en-US" sz="1200" b="1" dirty="0">
+              <a:rPr lang="en-US" sz="1400" b="1" dirty="0">
                 <a:solidFill>
                   <a:srgbClr val="FFFFFF"/>
                 </a:solidFill>
@@ -18970,7 +18970,7 @@
               </a:rPr>
               <a:t>1</a:t>
             </a:r>
-            <a:endParaRPr lang="en-US" sz="1200" dirty="0"/>
+            <a:endParaRPr lang="en-US" sz="1400" dirty="0"/>
           </a:p>
         </p:txBody>
       </p:sp>
@@ -18999,7 +18999,7 @@
               <a:buNone/>
             </a:pPr>
             <a:r>
-              <a:rPr lang="en-US" sz="1300" dirty="0">
+              <a:rPr lang="en-US" sz="1500" dirty="0">
                 <a:solidFill>
                   <a:srgbClr val="333D4D"/>
                 </a:solidFill>
@@ -19009,7 +19009,7 @@
               </a:rPr>
               <a:t>List positive words:  love, perfect, great, nice…</a:t>
             </a:r>
-            <a:endParaRPr lang="en-US" sz="1300" dirty="0"/>
+            <a:endParaRPr lang="en-US" sz="1500" dirty="0"/>
           </a:p>
         </p:txBody>
       </p:sp>
@@ -19063,7 +19063,7 @@
               <a:buNone/>
             </a:pPr>
             <a:r>
-              <a:rPr lang="en-US" sz="1200" b="1" dirty="0">
+              <a:rPr lang="en-US" sz="1400" b="1" dirty="0">
                 <a:solidFill>
                   <a:srgbClr val="FFFFFF"/>
                 </a:solidFill>
@@ -19073,7 +19073,7 @@
               </a:rPr>
               <a:t>2</a:t>
             </a:r>
-            <a:endParaRPr lang="en-US" sz="1200" dirty="0"/>
+            <a:endParaRPr lang="en-US" sz="1400" dirty="0"/>
           </a:p>
         </p:txBody>
       </p:sp>
@@ -19102,7 +19102,7 @@
               <a:buNone/>
             </a:pPr>
             <a:r>
-              <a:rPr lang="en-US" sz="1300" dirty="0">
+              <a:rPr lang="en-US" sz="1500" dirty="0">
                 <a:solidFill>
                   <a:srgbClr val="333D4D"/>
                 </a:solidFill>
@@ -19112,7 +19112,7 @@
               </a:rPr>
               <a:t>List negative words:  terrible, cheap, bad, awful…</a:t>
             </a:r>
-            <a:endParaRPr lang="en-US" sz="1300" dirty="0"/>
+            <a:endParaRPr lang="en-US" sz="1500" dirty="0"/>
           </a:p>
         </p:txBody>
       </p:sp>
@@ -19166,7 +19166,7 @@
               <a:buNone/>
             </a:pPr>
             <a:r>
-              <a:rPr lang="en-US" sz="1200" b="1" dirty="0">
+              <a:rPr lang="en-US" sz="1400" b="1" dirty="0">
                 <a:solidFill>
                   <a:srgbClr val="FFFFFF"/>
                 </a:solidFill>
@@ -19176,7 +19176,7 @@
               </a:rPr>
               <a:t>3</a:t>
             </a:r>
-            <a:endParaRPr lang="en-US" sz="1200" dirty="0"/>
+            <a:endParaRPr lang="en-US" sz="1400" dirty="0"/>
           </a:p>
         </p:txBody>
       </p:sp>
@@ -19205,7 +19205,7 @@
               <a:buNone/>
             </a:pPr>
             <a:r>
-              <a:rPr lang="en-US" sz="1300" dirty="0">
+              <a:rPr lang="en-US" sz="1500" dirty="0">
                 <a:solidFill>
                   <a:srgbClr val="333D4D"/>
                 </a:solidFill>
@@ -19215,7 +19215,7 @@
               </a:rPr>
               <a:t>For each review, count hits on each list.</a:t>
             </a:r>
-            <a:endParaRPr lang="en-US" sz="1300" dirty="0"/>
+            <a:endParaRPr lang="en-US" sz="1500" dirty="0"/>
           </a:p>
         </p:txBody>
       </p:sp>
@@ -19269,7 +19269,7 @@
               <a:buNone/>
             </a:pPr>
             <a:r>
-              <a:rPr lang="en-US" sz="1200" b="1" dirty="0">
+              <a:rPr lang="en-US" sz="1400" b="1" dirty="0">
                 <a:solidFill>
                   <a:srgbClr val="FFFFFF"/>
                 </a:solidFill>
@@ -19279,7 +19279,7 @@
               </a:rPr>
               <a:t>4</a:t>
             </a:r>
-            <a:endParaRPr lang="en-US" sz="1200" dirty="0"/>
+            <a:endParaRPr lang="en-US" sz="1400" dirty="0"/>
           </a:p>
         </p:txBody>
       </p:sp>
@@ -19308,7 +19308,7 @@
               <a:buNone/>
             </a:pPr>
             <a:r>
-              <a:rPr lang="en-US" sz="1300" dirty="0">
+              <a:rPr lang="en-US" sz="1500" dirty="0">
                 <a:solidFill>
                   <a:srgbClr val="333D4D"/>
                 </a:solidFill>
@@ -19318,7 +19318,7 @@
               </a:rPr>
               <a:t>Whichever count is bigger wins.</a:t>
             </a:r>
-            <a:endParaRPr lang="en-US" sz="1300" dirty="0"/>
+            <a:endParaRPr lang="en-US" sz="1500" dirty="0"/>
           </a:p>
         </p:txBody>
       </p:sp>
@@ -19397,7 +19397,7 @@
               <a:buNone/>
             </a:pPr>
             <a:r>
-              <a:rPr lang="en-US" sz="1000" b="1" spc="500" kern="0" dirty="0">
+              <a:rPr lang="en-US" sz="1200" b="1" spc="500" kern="0" dirty="0">
                 <a:solidFill>
                   <a:srgbClr val="C8102E"/>
                 </a:solidFill>
@@ -19407,7 +19407,7 @@
               </a:rPr>
               <a:t>HALLMARKS OF RULE-BASED CODE</a:t>
             </a:r>
-            <a:endParaRPr lang="en-US" sz="1000" dirty="0"/>
+            <a:endParaRPr lang="en-US" sz="1200" dirty="0"/>
           </a:p>
         </p:txBody>
       </p:sp>
@@ -19436,7 +19436,7 @@
               <a:buNone/>
             </a:pPr>
             <a:r>
-              <a:rPr lang="en-US" sz="1600" b="1" dirty="0">
+              <a:rPr lang="en-US" sz="1800" b="1" dirty="0">
                 <a:solidFill>
                   <a:srgbClr val="1F6B3A"/>
                 </a:solidFill>
@@ -19446,7 +19446,7 @@
               </a:rPr>
               <a:t>✓</a:t>
             </a:r>
-            <a:endParaRPr lang="en-US" sz="1600" dirty="0"/>
+            <a:endParaRPr lang="en-US" sz="1800" dirty="0"/>
           </a:p>
         </p:txBody>
       </p:sp>
@@ -19475,7 +19475,7 @@
               <a:buNone/>
             </a:pPr>
             <a:r>
-              <a:rPr lang="en-US" sz="1300" dirty="0">
+              <a:rPr lang="en-US" sz="1500" dirty="0">
                 <a:solidFill>
                   <a:srgbClr val="333D4D"/>
                 </a:solidFill>
@@ -19485,7 +19485,7 @@
               </a:rPr>
               <a:t>You write the rules</a:t>
             </a:r>
-            <a:endParaRPr lang="en-US" sz="1300" dirty="0"/>
+            <a:endParaRPr lang="en-US" sz="1500" dirty="0"/>
           </a:p>
         </p:txBody>
       </p:sp>
@@ -19514,7 +19514,7 @@
               <a:buNone/>
             </a:pPr>
             <a:r>
-              <a:rPr lang="en-US" sz="1600" b="1" dirty="0">
+              <a:rPr lang="en-US" sz="1800" b="1" dirty="0">
                 <a:solidFill>
                   <a:srgbClr val="1F6B3A"/>
                 </a:solidFill>
@@ -19524,7 +19524,7 @@
               </a:rPr>
               <a:t>✓</a:t>
             </a:r>
-            <a:endParaRPr lang="en-US" sz="1600" dirty="0"/>
+            <a:endParaRPr lang="en-US" sz="1800" dirty="0"/>
           </a:p>
         </p:txBody>
       </p:sp>
@@ -19553,7 +19553,7 @@
               <a:buNone/>
             </a:pPr>
             <a:r>
-              <a:rPr lang="en-US" sz="1300" dirty="0">
+              <a:rPr lang="en-US" sz="1500" dirty="0">
                 <a:solidFill>
                   <a:srgbClr val="333D4D"/>
                 </a:solidFill>
@@ -19563,7 +19563,7 @@
               </a:rPr>
               <a:t>Computer follows them exactly</a:t>
             </a:r>
-            <a:endParaRPr lang="en-US" sz="1300" dirty="0"/>
+            <a:endParaRPr lang="en-US" sz="1500" dirty="0"/>
           </a:p>
         </p:txBody>
       </p:sp>
@@ -19592,7 +19592,7 @@
               <a:buNone/>
             </a:pPr>
             <a:r>
-              <a:rPr lang="en-US" sz="1600" b="1" dirty="0">
+              <a:rPr lang="en-US" sz="1800" b="1" dirty="0">
                 <a:solidFill>
                   <a:srgbClr val="1F6B3A"/>
                 </a:solidFill>
@@ -19602,7 +19602,7 @@
               </a:rPr>
               <a:t>✓</a:t>
             </a:r>
-            <a:endParaRPr lang="en-US" sz="1600" dirty="0"/>
+            <a:endParaRPr lang="en-US" sz="1800" dirty="0"/>
           </a:p>
         </p:txBody>
       </p:sp>
@@ -19631,7 +19631,7 @@
               <a:buNone/>
             </a:pPr>
             <a:r>
-              <a:rPr lang="en-US" sz="1300" dirty="0">
+              <a:rPr lang="en-US" sz="1500" dirty="0">
                 <a:solidFill>
                   <a:srgbClr val="333D4D"/>
                 </a:solidFill>
@@ -19641,7 +19641,7 @@
               </a:rPr>
               <a:t>Deterministic — same input, same output</a:t>
             </a:r>
-            <a:endParaRPr lang="en-US" sz="1300" dirty="0"/>
+            <a:endParaRPr lang="en-US" sz="1500" dirty="0"/>
           </a:p>
         </p:txBody>
       </p:sp>
@@ -19670,7 +19670,7 @@
               <a:buNone/>
             </a:pPr>
             <a:r>
-              <a:rPr lang="en-US" sz="1600" b="1" dirty="0">
+              <a:rPr lang="en-US" sz="1800" b="1" dirty="0">
                 <a:solidFill>
                   <a:srgbClr val="C8102E"/>
                 </a:solidFill>
@@ -19680,7 +19680,7 @@
               </a:rPr>
               <a:t>✗</a:t>
             </a:r>
-            <a:endParaRPr lang="en-US" sz="1600" dirty="0"/>
+            <a:endParaRPr lang="en-US" sz="1800" dirty="0"/>
           </a:p>
         </p:txBody>
       </p:sp>
@@ -19709,7 +19709,7 @@
               <a:buNone/>
             </a:pPr>
             <a:r>
-              <a:rPr lang="en-US" sz="1300" dirty="0">
+              <a:rPr lang="en-US" sz="1500" dirty="0">
                 <a:solidFill>
                   <a:srgbClr val="5F6B7A"/>
                 </a:solidFill>
@@ -19719,7 +19719,7 @@
               </a:rPr>
               <a:t>Only handles cases the rules covered</a:t>
             </a:r>
-            <a:endParaRPr lang="en-US" sz="1300" dirty="0"/>
+            <a:endParaRPr lang="en-US" sz="1500" dirty="0"/>
           </a:p>
         </p:txBody>
       </p:sp>
@@ -19748,7 +19748,7 @@
               <a:buNone/>
             </a:pPr>
             <a:r>
-              <a:rPr lang="en-US" sz="1600" b="1" dirty="0">
+              <a:rPr lang="en-US" sz="1800" b="1" dirty="0">
                 <a:solidFill>
                   <a:srgbClr val="C8102E"/>
                 </a:solidFill>
@@ -19758,7 +19758,7 @@
               </a:rPr>
               <a:t>✗</a:t>
             </a:r>
-            <a:endParaRPr lang="en-US" sz="1600" dirty="0"/>
+            <a:endParaRPr lang="en-US" sz="1800" dirty="0"/>
           </a:p>
         </p:txBody>
       </p:sp>
@@ -19787,7 +19787,7 @@
               <a:buNone/>
             </a:pPr>
             <a:r>
-              <a:rPr lang="en-US" sz="1300" dirty="0">
+              <a:rPr lang="en-US" sz="1500" dirty="0">
                 <a:solidFill>
                   <a:srgbClr val="5F6B7A"/>
                 </a:solidFill>
@@ -19797,7 +19797,7 @@
               </a:rPr>
               <a:t>Maintenance is whack-a-mole</a:t>
             </a:r>
-            <a:endParaRPr lang="en-US" sz="1300" dirty="0"/>
+            <a:endParaRPr lang="en-US" sz="1500" dirty="0"/>
           </a:p>
         </p:txBody>
       </p:sp>
@@ -19826,7 +19826,7 @@
               <a:buNone/>
             </a:pPr>
             <a:r>
-              <a:rPr lang="en-US" sz="1600" b="1" dirty="0">
+              <a:rPr lang="en-US" sz="1800" b="1" dirty="0">
                 <a:solidFill>
                   <a:srgbClr val="C8102E"/>
                 </a:solidFill>
@@ -19836,7 +19836,7 @@
               </a:rPr>
               <a:t>✗</a:t>
             </a:r>
-            <a:endParaRPr lang="en-US" sz="1600" dirty="0"/>
+            <a:endParaRPr lang="en-US" sz="1800" dirty="0"/>
           </a:p>
         </p:txBody>
       </p:sp>
@@ -19865,7 +19865,7 @@
               <a:buNone/>
             </a:pPr>
             <a:r>
-              <a:rPr lang="en-US" sz="1300" dirty="0">
+              <a:rPr lang="en-US" sz="1500" dirty="0">
                 <a:solidFill>
                   <a:srgbClr val="5F6B7A"/>
                 </a:solidFill>
@@ -19875,7 +19875,7 @@
               </a:rPr>
               <a:t>No notion of ‘confidence’</a:t>
             </a:r>
-            <a:endParaRPr lang="en-US" sz="1300" dirty="0"/>
+            <a:endParaRPr lang="en-US" sz="1500" dirty="0"/>
           </a:p>
         </p:txBody>
       </p:sp>
@@ -19961,7 +19961,7 @@
               <a:buNone/>
             </a:pPr>
             <a:r>
-              <a:rPr lang="en-US" sz="1400" b="1" dirty="0">
+              <a:rPr lang="en-US" sz="1600" b="1" dirty="0">
                 <a:solidFill>
                   <a:srgbClr val="FFFFFF"/>
                 </a:solidFill>
@@ -19971,7 +19971,7 @@
               </a:rPr>
               <a:t>Rule-Based Code</a:t>
             </a:r>
-            <a:endParaRPr lang="en-US" sz="1400" dirty="0"/>
+            <a:endParaRPr lang="en-US" sz="1600" dirty="0"/>
           </a:p>
         </p:txBody>
       </p:sp>
@@ -20000,7 +20000,7 @@
               <a:buNone/>
             </a:pPr>
             <a:r>
-              <a:rPr lang="en-US" sz="1000" spc="200" kern="0" dirty="0">
+              <a:rPr lang="en-US" sz="1200" spc="200" kern="0" dirty="0">
                 <a:solidFill>
                   <a:srgbClr val="FFFFFF">
                     <a:alpha val="70000"/>
@@ -20012,7 +20012,7 @@
               </a:rPr>
               <a:t>L01 · Slide 7/22</a:t>
             </a:r>
-            <a:endParaRPr lang="en-US" sz="1000" dirty="0"/>
+            <a:endParaRPr lang="en-US" sz="1200" dirty="0"/>
           </a:p>
         </p:txBody>
       </p:sp>
@@ -20105,7 +20105,7 @@
               <a:buNone/>
             </a:pPr>
             <a:r>
-              <a:rPr lang="en-US" sz="2400" dirty="0">
+              <a:rPr lang="en-US" sz="2800" dirty="0">
                 <a:solidFill>
                   <a:srgbClr val="1B2A4A"/>
                 </a:solidFill>
@@ -20115,7 +20115,7 @@
               </a:rPr>
               <a:t>The code itself: short, readable — and quietly fragile.</a:t>
             </a:r>
-            <a:endParaRPr lang="en-US" sz="2400" dirty="0"/>
+            <a:endParaRPr lang="en-US" sz="2800" dirty="0"/>
           </a:p>
         </p:txBody>
       </p:sp>
@@ -20194,7 +20194,7 @@
               <a:buNone/>
             </a:pPr>
             <a:r>
-              <a:rPr lang="en-US" sz="900" b="1" spc="500" kern="0" dirty="0">
+              <a:rPr lang="en-US" sz="1100" b="1" spc="500" kern="0" dirty="0">
                 <a:solidFill>
                   <a:srgbClr val="C8102E"/>
                 </a:solidFill>
@@ -20204,7 +20204,7 @@
               </a:rPr>
               <a:t>PYTHON</a:t>
             </a:r>
-            <a:endParaRPr lang="en-US" sz="900" dirty="0"/>
+            <a:endParaRPr lang="en-US" sz="1100" dirty="0"/>
           </a:p>
         </p:txBody>
       </p:sp>
@@ -20233,7 +20233,7 @@
               <a:buNone/>
             </a:pPr>
             <a:r>
-              <a:rPr lang="en-US" sz="1250" dirty="0">
+              <a:rPr lang="en-US" sz="1450" dirty="0">
                 <a:solidFill>
                   <a:srgbClr val="FFFFFF"/>
                 </a:solidFill>
@@ -20243,14 +20243,14 @@
               </a:rPr>
               <a:t>positive_words = ["love", "perfect", "great", "nice", "soft"]</a:t>
             </a:r>
-            <a:endParaRPr lang="en-US" sz="1250" dirty="0"/>
-          </a:p>
-          <a:p>
-            <a:pPr indent="0" marL="0">
-              <a:buNone/>
-            </a:pPr>
-            <a:r>
-              <a:rPr lang="en-US" sz="1250" dirty="0">
+            <a:endParaRPr lang="en-US" sz="1450" dirty="0"/>
+          </a:p>
+          <a:p>
+            <a:pPr indent="0" marL="0">
+              <a:buNone/>
+            </a:pPr>
+            <a:r>
+              <a:rPr lang="en-US" sz="1450" dirty="0">
                 <a:solidFill>
                   <a:srgbClr val="FFFFFF"/>
                 </a:solidFill>
@@ -20260,20 +20260,20 @@
               </a:rPr>
               <a:t>negative_words = ["terrible", "cheap", "disappointed", "bad", "late"]</a:t>
             </a:r>
-            <a:endParaRPr lang="en-US" sz="1250" dirty="0"/>
-          </a:p>
-          <a:p>
-            <a:pPr indent="0" marL="0">
-              <a:buNone/>
-            </a:pPr>
-            <a:endParaRPr lang="en-US" sz="1250" dirty="0"/>
-          </a:p>
-          <a:p>
-            <a:pPr indent="0" marL="0">
-              <a:buNone/>
-            </a:pPr>
-            <a:r>
-              <a:rPr lang="en-US" sz="1250" dirty="0">
+            <a:endParaRPr lang="en-US" sz="1450" dirty="0"/>
+          </a:p>
+          <a:p>
+            <a:pPr indent="0" marL="0">
+              <a:buNone/>
+            </a:pPr>
+            <a:endParaRPr lang="en-US" sz="1450" dirty="0"/>
+          </a:p>
+          <a:p>
+            <a:pPr indent="0" marL="0">
+              <a:buNone/>
+            </a:pPr>
+            <a:r>
+              <a:rPr lang="en-US" sz="1450" dirty="0">
                 <a:solidFill>
                   <a:srgbClr val="FFFFFF"/>
                 </a:solidFill>
@@ -20283,14 +20283,14 @@
               </a:rPr>
               <a:t>def rule_based_sentiment(review):</a:t>
             </a:r>
-            <a:endParaRPr lang="en-US" sz="1250" dirty="0"/>
-          </a:p>
-          <a:p>
-            <a:pPr indent="0" marL="0">
-              <a:buNone/>
-            </a:pPr>
-            <a:r>
-              <a:rPr lang="en-US" sz="1250" dirty="0">
+            <a:endParaRPr lang="en-US" sz="1450" dirty="0"/>
+          </a:p>
+          <a:p>
+            <a:pPr indent="0" marL="0">
+              <a:buNone/>
+            </a:pPr>
+            <a:r>
+              <a:rPr lang="en-US" sz="1450" dirty="0">
                 <a:solidFill>
                   <a:srgbClr val="FFFFFF"/>
                 </a:solidFill>
@@ -20300,14 +20300,14 @@
               </a:rPr>
               <a:t>    text = review.lower()</a:t>
             </a:r>
-            <a:endParaRPr lang="en-US" sz="1250" dirty="0"/>
-          </a:p>
-          <a:p>
-            <a:pPr indent="0" marL="0">
-              <a:buNone/>
-            </a:pPr>
-            <a:r>
-              <a:rPr lang="en-US" sz="1250" dirty="0">
+            <a:endParaRPr lang="en-US" sz="1450" dirty="0"/>
+          </a:p>
+          <a:p>
+            <a:pPr indent="0" marL="0">
+              <a:buNone/>
+            </a:pPr>
+            <a:r>
+              <a:rPr lang="en-US" sz="1450" dirty="0">
                 <a:solidFill>
                   <a:srgbClr val="FFFFFF"/>
                 </a:solidFill>
@@ -20317,14 +20317,14 @@
               </a:rPr>
               <a:t>    pos_hits = sum(1 for w in positive_words if w in text)</a:t>
             </a:r>
-            <a:endParaRPr lang="en-US" sz="1250" dirty="0"/>
-          </a:p>
-          <a:p>
-            <a:pPr indent="0" marL="0">
-              <a:buNone/>
-            </a:pPr>
-            <a:r>
-              <a:rPr lang="en-US" sz="1250" dirty="0">
+            <a:endParaRPr lang="en-US" sz="1450" dirty="0"/>
+          </a:p>
+          <a:p>
+            <a:pPr indent="0" marL="0">
+              <a:buNone/>
+            </a:pPr>
+            <a:r>
+              <a:rPr lang="en-US" sz="1450" dirty="0">
                 <a:solidFill>
                   <a:srgbClr val="FFFFFF"/>
                 </a:solidFill>
@@ -20334,14 +20334,14 @@
               </a:rPr>
               <a:t>    neg_hits = sum(1 for w in negative_words if w in text)</a:t>
             </a:r>
-            <a:endParaRPr lang="en-US" sz="1250" dirty="0"/>
-          </a:p>
-          <a:p>
-            <a:pPr indent="0" marL="0">
-              <a:buNone/>
-            </a:pPr>
-            <a:r>
-              <a:rPr lang="en-US" sz="1250" dirty="0">
+            <a:endParaRPr lang="en-US" sz="1450" dirty="0"/>
+          </a:p>
+          <a:p>
+            <a:pPr indent="0" marL="0">
+              <a:buNone/>
+            </a:pPr>
+            <a:r>
+              <a:rPr lang="en-US" sz="1450" dirty="0">
                 <a:solidFill>
                   <a:srgbClr val="FFFFFF"/>
                 </a:solidFill>
@@ -20351,14 +20351,14 @@
               </a:rPr>
               <a:t>    if pos_hits &gt; neg_hits:   return "POSITIVE"</a:t>
             </a:r>
-            <a:endParaRPr lang="en-US" sz="1250" dirty="0"/>
-          </a:p>
-          <a:p>
-            <a:pPr indent="0" marL="0">
-              <a:buNone/>
-            </a:pPr>
-            <a:r>
-              <a:rPr lang="en-US" sz="1250" dirty="0">
+            <a:endParaRPr lang="en-US" sz="1450" dirty="0"/>
+          </a:p>
+          <a:p>
+            <a:pPr indent="0" marL="0">
+              <a:buNone/>
+            </a:pPr>
+            <a:r>
+              <a:rPr lang="en-US" sz="1450" dirty="0">
                 <a:solidFill>
                   <a:srgbClr val="FFFFFF"/>
                 </a:solidFill>
@@ -20368,14 +20368,14 @@
               </a:rPr>
               <a:t>    elif neg_hits &gt; pos_hits: return "NEGATIVE"</a:t>
             </a:r>
-            <a:endParaRPr lang="en-US" sz="1250" dirty="0"/>
-          </a:p>
-          <a:p>
-            <a:pPr indent="0" marL="0">
-              <a:buNone/>
-            </a:pPr>
-            <a:r>
-              <a:rPr lang="en-US" sz="1250" dirty="0">
+            <a:endParaRPr lang="en-US" sz="1450" dirty="0"/>
+          </a:p>
+          <a:p>
+            <a:pPr indent="0" marL="0">
+              <a:buNone/>
+            </a:pPr>
+            <a:r>
+              <a:rPr lang="en-US" sz="1450" dirty="0">
                 <a:solidFill>
                   <a:srgbClr val="FFFFFF"/>
                 </a:solidFill>
@@ -20385,20 +20385,20 @@
               </a:rPr>
               <a:t>    else:                     return "NEUTRAL"</a:t>
             </a:r>
-            <a:endParaRPr lang="en-US" sz="1250" dirty="0"/>
-          </a:p>
-          <a:p>
-            <a:pPr indent="0" marL="0">
-              <a:buNone/>
-            </a:pPr>
-            <a:endParaRPr lang="en-US" sz="1250" dirty="0"/>
-          </a:p>
-          <a:p>
-            <a:pPr indent="0" marL="0">
-              <a:buNone/>
-            </a:pPr>
-            <a:r>
-              <a:rPr lang="en-US" sz="1250" dirty="0">
+            <a:endParaRPr lang="en-US" sz="1450" dirty="0"/>
+          </a:p>
+          <a:p>
+            <a:pPr indent="0" marL="0">
+              <a:buNone/>
+            </a:pPr>
+            <a:endParaRPr lang="en-US" sz="1450" dirty="0"/>
+          </a:p>
+          <a:p>
+            <a:pPr indent="0" marL="0">
+              <a:buNone/>
+            </a:pPr>
+            <a:r>
+              <a:rPr lang="en-US" sz="1450" dirty="0">
                 <a:solidFill>
                   <a:srgbClr val="FFFFFF"/>
                 </a:solidFill>
@@ -20408,14 +20408,14 @@
               </a:rPr>
               <a:t>for r in reviews:</a:t>
             </a:r>
-            <a:endParaRPr lang="en-US" sz="1250" dirty="0"/>
-          </a:p>
-          <a:p>
-            <a:pPr indent="0" marL="0">
-              <a:buNone/>
-            </a:pPr>
-            <a:r>
-              <a:rPr lang="en-US" sz="1250" dirty="0">
+            <a:endParaRPr lang="en-US" sz="1450" dirty="0"/>
+          </a:p>
+          <a:p>
+            <a:pPr indent="0" marL="0">
+              <a:buNone/>
+            </a:pPr>
+            <a:r>
+              <a:rPr lang="en-US" sz="1450" dirty="0">
                 <a:solidFill>
                   <a:srgbClr val="FFFFFF"/>
                 </a:solidFill>
@@ -20425,7 +20425,7 @@
               </a:rPr>
               <a:t>    print(f"{rule_based_sentiment(r):&gt;9} | {r}")</a:t>
             </a:r>
-            <a:endParaRPr lang="en-US" sz="1250" dirty="0"/>
+            <a:endParaRPr lang="en-US" sz="1450" dirty="0"/>
           </a:p>
         </p:txBody>
       </p:sp>
@@ -20504,7 +20504,7 @@
               <a:buNone/>
             </a:pPr>
             <a:r>
-              <a:rPr lang="en-US" sz="1300" b="1" spc="500" kern="0" dirty="0">
+              <a:rPr lang="en-US" sz="1500" b="1" spc="500" kern="0" dirty="0">
                 <a:solidFill>
                   <a:srgbClr val="C8102E"/>
                 </a:solidFill>
@@ -20518,7 +20518,7 @@
               <a:buNone/>
             </a:pPr>
             <a:r>
-              <a:rPr lang="en-US" sz="1300" dirty="0">
+              <a:rPr lang="en-US" sz="1500" dirty="0">
                 <a:solidFill>
                   <a:srgbClr val="5F6B7A"/>
                 </a:solidFill>
@@ -20532,7 +20532,7 @@
               <a:buNone/>
             </a:pPr>
             <a:r>
-              <a:rPr lang="en-US" sz="1300" b="1" i="1" dirty="0">
+              <a:rPr lang="en-US" sz="1500" b="1" i="1" dirty="0">
                 <a:solidFill>
                   <a:srgbClr val="1B2A4A"/>
                 </a:solidFill>
@@ -20546,7 +20546,7 @@
               <a:buNone/>
             </a:pPr>
             <a:r>
-              <a:rPr lang="en-US" sz="1300" dirty="0">
+              <a:rPr lang="en-US" sz="1500" dirty="0">
                 <a:solidFill>
                   <a:srgbClr val="5F6B7A"/>
                 </a:solidFill>
@@ -20556,7 +20556,7 @@
               </a:rPr>
               <a:t>  ?</a:t>
             </a:r>
-            <a:endParaRPr lang="en-US" sz="1300" dirty="0"/>
+            <a:endParaRPr lang="en-US" sz="1500" dirty="0"/>
           </a:p>
         </p:txBody>
       </p:sp>
@@ -20642,7 +20642,7 @@
               <a:buNone/>
             </a:pPr>
             <a:r>
-              <a:rPr lang="en-US" sz="1400" b="1" dirty="0">
+              <a:rPr lang="en-US" sz="1600" b="1" dirty="0">
                 <a:solidFill>
                   <a:srgbClr val="FFFFFF"/>
                 </a:solidFill>
@@ -20652,7 +20652,7 @@
               </a:rPr>
               <a:t>Why Rule-Based Fails</a:t>
             </a:r>
-            <a:endParaRPr lang="en-US" sz="1400" dirty="0"/>
+            <a:endParaRPr lang="en-US" sz="1600" dirty="0"/>
           </a:p>
         </p:txBody>
       </p:sp>
@@ -20681,7 +20681,7 @@
               <a:buNone/>
             </a:pPr>
             <a:r>
-              <a:rPr lang="en-US" sz="1000" spc="200" kern="0" dirty="0">
+              <a:rPr lang="en-US" sz="1200" spc="200" kern="0" dirty="0">
                 <a:solidFill>
                   <a:srgbClr val="FFFFFF">
                     <a:alpha val="70000"/>
@@ -20693,7 +20693,7 @@
               </a:rPr>
               <a:t>L01 · Slide 8/22</a:t>
             </a:r>
-            <a:endParaRPr lang="en-US" sz="1000" dirty="0"/>
+            <a:endParaRPr lang="en-US" sz="1200" dirty="0"/>
           </a:p>
         </p:txBody>
       </p:sp>
@@ -20875,7 +20875,7 @@
               <a:buNone/>
             </a:pPr>
             <a:r>
-              <a:rPr lang="en-US" sz="2800" dirty="0">
+              <a:rPr lang="en-US" sz="3200" dirty="0">
                 <a:solidFill>
                   <a:srgbClr val="C8102E"/>
                 </a:solidFill>
@@ -20885,7 +20885,7 @@
               </a:rPr>
               <a:t>#1</a:t>
             </a:r>
-            <a:endParaRPr lang="en-US" sz="2800" dirty="0"/>
+            <a:endParaRPr lang="en-US" sz="3200" dirty="0"/>
           </a:p>
         </p:txBody>
       </p:sp>
@@ -20914,7 +20914,7 @@
               <a:buNone/>
             </a:pPr>
             <a:r>
-              <a:rPr lang="en-US" sz="1800" b="1" dirty="0">
+              <a:rPr lang="en-US" sz="2200" b="1" dirty="0">
                 <a:solidFill>
                   <a:srgbClr val="1B2A4A"/>
                 </a:solidFill>
@@ -20924,7 +20924,7 @@
               </a:rPr>
               <a:t>Context blindness</a:t>
             </a:r>
-            <a:endParaRPr lang="en-US" sz="1800" dirty="0"/>
+            <a:endParaRPr lang="en-US" sz="2200" dirty="0"/>
           </a:p>
         </p:txBody>
       </p:sp>
@@ -20953,7 +20953,7 @@
               <a:buNone/>
             </a:pPr>
             <a:r>
-              <a:rPr lang="en-US" sz="1200" i="1" dirty="0">
+              <a:rPr lang="en-US" sz="1400" i="1" dirty="0">
                 <a:solidFill>
                   <a:srgbClr val="1B2A4A"/>
                 </a:solidFill>
@@ -20963,7 +20963,7 @@
               </a:rPr>
               <a:t>“Terrible shipping — product itself is fine.”</a:t>
             </a:r>
-            <a:endParaRPr lang="en-US" sz="1200" dirty="0"/>
+            <a:endParaRPr lang="en-US" sz="1400" dirty="0"/>
           </a:p>
         </p:txBody>
       </p:sp>
@@ -20992,7 +20992,7 @@
               <a:buNone/>
             </a:pPr>
             <a:r>
-              <a:rPr lang="en-US" sz="1100" dirty="0">
+              <a:rPr lang="en-US" sz="1300" dirty="0">
                 <a:solidFill>
                   <a:srgbClr val="333D4D"/>
                 </a:solidFill>
@@ -21002,7 +21002,7 @@
               </a:rPr>
               <a:t>Rules see ‘terrible’ and ‘fine’ but don't know what each word refers to.</a:t>
             </a:r>
-            <a:endParaRPr lang="en-US" sz="1100" dirty="0"/>
+            <a:endParaRPr lang="en-US" sz="1300" dirty="0"/>
           </a:p>
         </p:txBody>
       </p:sp>
@@ -21056,7 +21056,7 @@
               <a:buNone/>
             </a:pPr>
             <a:r>
-              <a:rPr lang="en-US" sz="1000" b="1" spc="300" kern="0" dirty="0">
+              <a:rPr lang="en-US" sz="1200" b="1" spc="300" kern="0" dirty="0">
                 <a:solidFill>
                   <a:srgbClr val="C8102E"/>
                 </a:solidFill>
@@ -21066,7 +21066,7 @@
               </a:rPr>
               <a:t>Result: Incorrectly tagged NEGATIVE.</a:t>
             </a:r>
-            <a:endParaRPr lang="en-US" sz="1000" dirty="0"/>
+            <a:endParaRPr lang="en-US" sz="1200" dirty="0"/>
           </a:p>
         </p:txBody>
       </p:sp>
@@ -21145,7 +21145,7 @@
               <a:buNone/>
             </a:pPr>
             <a:r>
-              <a:rPr lang="en-US" sz="2800" dirty="0">
+              <a:rPr lang="en-US" sz="3200" dirty="0">
                 <a:solidFill>
                   <a:srgbClr val="C8102E"/>
                 </a:solidFill>
@@ -21155,7 +21155,7 @@
               </a:rPr>
               <a:t>#2</a:t>
             </a:r>
-            <a:endParaRPr lang="en-US" sz="2800" dirty="0"/>
+            <a:endParaRPr lang="en-US" sz="3200" dirty="0"/>
           </a:p>
         </p:txBody>
       </p:sp>
@@ -21184,7 +21184,7 @@
               <a:buNone/>
             </a:pPr>
             <a:r>
-              <a:rPr lang="en-US" sz="1800" b="1" dirty="0">
+              <a:rPr lang="en-US" sz="2200" b="1" dirty="0">
                 <a:solidFill>
                   <a:srgbClr val="1B2A4A"/>
                 </a:solidFill>
@@ -21194,7 +21194,7 @@
               </a:rPr>
               <a:t>Negation flips meaning</a:t>
             </a:r>
-            <a:endParaRPr lang="en-US" sz="1800" dirty="0"/>
+            <a:endParaRPr lang="en-US" sz="2200" dirty="0"/>
           </a:p>
         </p:txBody>
       </p:sp>
@@ -21223,7 +21223,7 @@
               <a:buNone/>
             </a:pPr>
             <a:r>
-              <a:rPr lang="en-US" sz="1200" i="1" dirty="0">
+              <a:rPr lang="en-US" sz="1400" i="1" dirty="0">
                 <a:solidFill>
                   <a:srgbClr val="1B2A4A"/>
                 </a:solidFill>
@@ -21233,7 +21233,7 @@
               </a:rPr>
               <a:t>“Not what I expected — actually really nice in person!”</a:t>
             </a:r>
-            <a:endParaRPr lang="en-US" sz="1200" dirty="0"/>
+            <a:endParaRPr lang="en-US" sz="1400" dirty="0"/>
           </a:p>
         </p:txBody>
       </p:sp>
@@ -21262,7 +21262,7 @@
               <a:buNone/>
             </a:pPr>
             <a:r>
-              <a:rPr lang="en-US" sz="1100" dirty="0">
+              <a:rPr lang="en-US" sz="1300" dirty="0">
                 <a:solidFill>
                   <a:srgbClr val="333D4D"/>
                 </a:solidFill>
@@ -21272,7 +21272,7 @@
               </a:rPr>
               <a:t>‘not’ inverts the sentiment of the next phrase. Word-counting misses this.</a:t>
             </a:r>
-            <a:endParaRPr lang="en-US" sz="1100" dirty="0"/>
+            <a:endParaRPr lang="en-US" sz="1300" dirty="0"/>
           </a:p>
         </p:txBody>
       </p:sp>
@@ -21326,7 +21326,7 @@
               <a:buNone/>
             </a:pPr>
             <a:r>
-              <a:rPr lang="en-US" sz="1000" b="1" spc="300" kern="0" dirty="0">
+              <a:rPr lang="en-US" sz="1200" b="1" spc="300" kern="0" dirty="0">
                 <a:solidFill>
                   <a:srgbClr val="C8102E"/>
                 </a:solidFill>
@@ -21336,7 +21336,7 @@
               </a:rPr>
               <a:t>Result: Rules tag NEUTRAL or NEGATIVE.</a:t>
             </a:r>
-            <a:endParaRPr lang="en-US" sz="1000" dirty="0"/>
+            <a:endParaRPr lang="en-US" sz="1200" dirty="0"/>
           </a:p>
         </p:txBody>
       </p:sp>
@@ -21415,7 +21415,7 @@
               <a:buNone/>
             </a:pPr>
             <a:r>
-              <a:rPr lang="en-US" sz="2800" dirty="0">
+              <a:rPr lang="en-US" sz="3200" dirty="0">
                 <a:solidFill>
                   <a:srgbClr val="C8102E"/>
                 </a:solidFill>
@@ -21425,7 +21425,7 @@
               </a:rPr>
               <a:t>#3</a:t>
             </a:r>
-            <a:endParaRPr lang="en-US" sz="2800" dirty="0"/>
+            <a:endParaRPr lang="en-US" sz="3200" dirty="0"/>
           </a:p>
         </p:txBody>
       </p:sp>
@@ -21454,7 +21454,7 @@
               <a:buNone/>
             </a:pPr>
             <a:r>
-              <a:rPr lang="en-US" sz="1800" b="1" dirty="0">
+              <a:rPr lang="en-US" sz="2200" b="1" dirty="0">
                 <a:solidFill>
                   <a:srgbClr val="1B2A4A"/>
                 </a:solidFill>
@@ -21464,7 +21464,7 @@
               </a:rPr>
               <a:t>Endless whack-a-mole</a:t>
             </a:r>
-            <a:endParaRPr lang="en-US" sz="1800" dirty="0"/>
+            <a:endParaRPr lang="en-US" sz="2200" dirty="0"/>
           </a:p>
         </p:txBody>
       </p:sp>
@@ -21493,7 +21493,7 @@
               <a:buNone/>
             </a:pPr>
             <a:r>
-              <a:rPr lang="en-US" sz="1200" i="1" dirty="0">
+              <a:rPr lang="en-US" sz="1400" i="1" dirty="0">
                 <a:solidFill>
                   <a:srgbClr val="1B2A4A"/>
                 </a:solidFill>
@@ -21503,7 +21503,7 @@
               </a:rPr>
               <a:t>Every new review surfaces a new edge case.</a:t>
             </a:r>
-            <a:endParaRPr lang="en-US" sz="1200" dirty="0"/>
+            <a:endParaRPr lang="en-US" sz="1400" dirty="0"/>
           </a:p>
         </p:txBody>
       </p:sp>
@@ -21532,7 +21532,7 @@
               <a:buNone/>
             </a:pPr>
             <a:r>
-              <a:rPr lang="en-US" sz="1100" dirty="0">
+              <a:rPr lang="en-US" sz="1300" dirty="0">
                 <a:solidFill>
                   <a:srgbClr val="333D4D"/>
                 </a:solidFill>
@@ -21542,7 +21542,7 @@
               </a:rPr>
               <a:t>Your rule list grows 10 → 100 → 1,000 — and conflicts start.</a:t>
             </a:r>
-            <a:endParaRPr lang="en-US" sz="1100" dirty="0"/>
+            <a:endParaRPr lang="en-US" sz="1300" dirty="0"/>
           </a:p>
         </p:txBody>
       </p:sp>
@@ -21596,7 +21596,7 @@
               <a:buNone/>
             </a:pPr>
             <a:r>
-              <a:rPr lang="en-US" sz="1000" b="1" spc="300" kern="0" dirty="0">
+              <a:rPr lang="en-US" sz="1200" b="1" spc="300" kern="0" dirty="0">
                 <a:solidFill>
                   <a:srgbClr val="C8102E"/>
                 </a:solidFill>
@@ -21606,7 +21606,7 @@
               </a:rPr>
               <a:t>Result: Maintenance cost balloons.</a:t>
             </a:r>
-            <a:endParaRPr lang="en-US" sz="1000" dirty="0"/>
+            <a:endParaRPr lang="en-US" sz="1200" dirty="0"/>
           </a:p>
         </p:txBody>
       </p:sp>
@@ -21692,7 +21692,7 @@
               <a:buNone/>
             </a:pPr>
             <a:r>
-              <a:rPr lang="en-US" sz="1400" b="1" dirty="0">
+              <a:rPr lang="en-US" sz="1600" b="1" dirty="0">
                 <a:solidFill>
                   <a:srgbClr val="FFFFFF"/>
                 </a:solidFill>
@@ -21702,7 +21702,7 @@
               </a:rPr>
               <a:t>Approach 2: Machine Learning</a:t>
             </a:r>
-            <a:endParaRPr lang="en-US" sz="1400" dirty="0"/>
+            <a:endParaRPr lang="en-US" sz="1600" dirty="0"/>
           </a:p>
         </p:txBody>
       </p:sp>
@@ -21731,7 +21731,7 @@
               <a:buNone/>
             </a:pPr>
             <a:r>
-              <a:rPr lang="en-US" sz="1000" spc="200" kern="0" dirty="0">
+              <a:rPr lang="en-US" sz="1200" spc="200" kern="0" dirty="0">
                 <a:solidFill>
                   <a:srgbClr val="FFFFFF">
                     <a:alpha val="70000"/>
@@ -21743,7 +21743,7 @@
               </a:rPr>
               <a:t>L01 · Slide 9/22</a:t>
             </a:r>
-            <a:endParaRPr lang="en-US" sz="1000" dirty="0"/>
+            <a:endParaRPr lang="en-US" sz="1200" dirty="0"/>
           </a:p>
         </p:txBody>
       </p:sp>
@@ -21925,7 +21925,7 @@
               <a:buNone/>
             </a:pPr>
             <a:r>
-              <a:rPr lang="en-US" sz="1000" b="1" spc="500" kern="0" dirty="0">
+              <a:rPr lang="en-US" sz="1200" b="1" spc="500" kern="0" dirty="0">
                 <a:solidFill>
                   <a:srgbClr val="1B2A4A"/>
                 </a:solidFill>
@@ -21935,7 +21935,7 @@
               </a:rPr>
               <a:t>TRADITIONAL PROGRAMMING</a:t>
             </a:r>
-            <a:endParaRPr lang="en-US" sz="1000" dirty="0"/>
+            <a:endParaRPr lang="en-US" sz="1200" dirty="0"/>
           </a:p>
         </p:txBody>
       </p:sp>
@@ -21964,7 +21964,7 @@
               <a:buNone/>
             </a:pPr>
             <a:r>
-              <a:rPr lang="en-US" sz="1900" b="1" dirty="0">
+              <a:rPr lang="en-US" sz="2200" b="1" dirty="0">
                 <a:solidFill>
                   <a:srgbClr val="1B2A4A"/>
                 </a:solidFill>
@@ -21974,14 +21974,14 @@
               </a:rPr>
               <a:t>You write the rules.</a:t>
             </a:r>
-            <a:endParaRPr lang="en-US" sz="1900" dirty="0"/>
-          </a:p>
-          <a:p>
-            <a:pPr indent="0" marL="0">
-              <a:buNone/>
-            </a:pPr>
-            <a:r>
-              <a:rPr lang="en-US" sz="1900" b="1" dirty="0">
+            <a:endParaRPr lang="en-US" sz="2200" dirty="0"/>
+          </a:p>
+          <a:p>
+            <a:pPr indent="0" marL="0">
+              <a:buNone/>
+            </a:pPr>
+            <a:r>
+              <a:rPr lang="en-US" sz="2200" b="1" dirty="0">
                 <a:solidFill>
                   <a:srgbClr val="1B2A4A"/>
                 </a:solidFill>
@@ -21991,7 +21991,7 @@
               </a:rPr>
               <a:t>Computer follows them.</a:t>
             </a:r>
-            <a:endParaRPr lang="en-US" sz="1900" dirty="0"/>
+            <a:endParaRPr lang="en-US" sz="2200" dirty="0"/>
           </a:p>
         </p:txBody>
       </p:sp>
@@ -22023,7 +22023,7 @@
               <a:buNone/>
             </a:pPr>
             <a:r>
-              <a:rPr lang="en-US" sz="1300" b="1" spc="500" kern="0" dirty="0">
+              <a:rPr lang="en-US" sz="1500" b="1" spc="500" kern="0" dirty="0">
                 <a:solidFill>
                   <a:srgbClr val="2C5697"/>
                 </a:solidFill>
@@ -22040,7 +22040,7 @@
               <a:buNone/>
             </a:pPr>
             <a:r>
-              <a:rPr lang="en-US" sz="1300" dirty="0">
+              <a:rPr lang="en-US" sz="1500" dirty="0">
                 <a:solidFill>
                   <a:srgbClr val="333D4D"/>
                 </a:solidFill>
@@ -22058,7 +22058,7 @@
               <a:buNone/>
             </a:pPr>
             <a:r>
-              <a:rPr lang="en-US" sz="1300" b="1" spc="500" kern="0" dirty="0">
+              <a:rPr lang="en-US" sz="1500" b="1" spc="500" kern="0" dirty="0">
                 <a:solidFill>
                   <a:srgbClr val="2C5697"/>
                 </a:solidFill>
@@ -22075,7 +22075,7 @@
               <a:buNone/>
             </a:pPr>
             <a:r>
-              <a:rPr lang="en-US" sz="1300" dirty="0">
+              <a:rPr lang="en-US" sz="1500" dirty="0">
                 <a:solidFill>
                   <a:srgbClr val="333D4D"/>
                 </a:solidFill>
@@ -22085,7 +22085,7 @@
               </a:rPr>
               <a:t>deterministic answer</a:t>
             </a:r>
-            <a:endParaRPr lang="en-US" sz="1300" dirty="0"/>
+            <a:endParaRPr lang="en-US" sz="1500" dirty="0"/>
           </a:p>
         </p:txBody>
       </p:sp>
@@ -22164,7 +22164,7 @@
               <a:buNone/>
             </a:pPr>
             <a:r>
-              <a:rPr lang="en-US" sz="1000" b="1" spc="500" kern="0" dirty="0">
+              <a:rPr lang="en-US" sz="1200" b="1" spc="500" kern="0" dirty="0">
                 <a:solidFill>
                   <a:srgbClr val="C8102E"/>
                 </a:solidFill>
@@ -22174,7 +22174,7 @@
               </a:rPr>
               <a:t>MACHINE LEARNING</a:t>
             </a:r>
-            <a:endParaRPr lang="en-US" sz="1000" dirty="0"/>
+            <a:endParaRPr lang="en-US" sz="1200" dirty="0"/>
           </a:p>
         </p:txBody>
       </p:sp>
@@ -22203,7 +22203,7 @@
               <a:buNone/>
             </a:pPr>
             <a:r>
-              <a:rPr lang="en-US" sz="1900" b="1" dirty="0">
+              <a:rPr lang="en-US" sz="2200" b="1" dirty="0">
                 <a:solidFill>
                   <a:srgbClr val="1B2A4A"/>
                 </a:solidFill>
@@ -22213,14 +22213,14 @@
               </a:rPr>
               <a:t>You provide the examples.</a:t>
             </a:r>
-            <a:endParaRPr lang="en-US" sz="1900" dirty="0"/>
-          </a:p>
-          <a:p>
-            <a:pPr indent="0" marL="0">
-              <a:buNone/>
-            </a:pPr>
-            <a:r>
-              <a:rPr lang="en-US" sz="1900" b="1" dirty="0">
+            <a:endParaRPr lang="en-US" sz="2200" dirty="0"/>
+          </a:p>
+          <a:p>
+            <a:pPr indent="0" marL="0">
+              <a:buNone/>
+            </a:pPr>
+            <a:r>
+              <a:rPr lang="en-US" sz="2200" b="1" dirty="0">
                 <a:solidFill>
                   <a:srgbClr val="1B2A4A"/>
                 </a:solidFill>
@@ -22230,7 +22230,7 @@
               </a:rPr>
               <a:t>Computer discovers the rules.</a:t>
             </a:r>
-            <a:endParaRPr lang="en-US" sz="1900" dirty="0"/>
+            <a:endParaRPr lang="en-US" sz="2200" dirty="0"/>
           </a:p>
         </p:txBody>
       </p:sp>
@@ -22262,7 +22262,7 @@
               <a:buNone/>
             </a:pPr>
             <a:r>
-              <a:rPr lang="en-US" sz="1300" b="1" spc="500" kern="0" dirty="0">
+              <a:rPr lang="en-US" sz="1500" b="1" spc="500" kern="0" dirty="0">
                 <a:solidFill>
                   <a:srgbClr val="C8102E"/>
                 </a:solidFill>
@@ -22279,7 +22279,7 @@
               <a:buNone/>
             </a:pPr>
             <a:r>
-              <a:rPr lang="en-US" sz="1300" dirty="0">
+              <a:rPr lang="en-US" sz="1500" dirty="0">
                 <a:solidFill>
                   <a:srgbClr val="333D4D"/>
                 </a:solidFill>
@@ -22297,7 +22297,7 @@
               <a:buNone/>
             </a:pPr>
             <a:r>
-              <a:rPr lang="en-US" sz="1300" b="1" spc="500" kern="0" dirty="0">
+              <a:rPr lang="en-US" sz="1500" b="1" spc="500" kern="0" dirty="0">
                 <a:solidFill>
                   <a:srgbClr val="C8102E"/>
                 </a:solidFill>
@@ -22314,7 +22314,7 @@
               <a:buNone/>
             </a:pPr>
             <a:r>
-              <a:rPr lang="en-US" sz="1300" dirty="0">
+              <a:rPr lang="en-US" sz="1500" dirty="0">
                 <a:solidFill>
                   <a:srgbClr val="333D4D"/>
                 </a:solidFill>
@@ -22324,7 +22324,7 @@
               </a:rPr>
               <a:t>prediction + confidence</a:t>
             </a:r>
-            <a:endParaRPr lang="en-US" sz="1300" dirty="0"/>
+            <a:endParaRPr lang="en-US" sz="1500" dirty="0"/>
           </a:p>
         </p:txBody>
       </p:sp>
@@ -22403,7 +22403,7 @@
               <a:buNone/>
             </a:pPr>
             <a:r>
-              <a:rPr lang="en-US" sz="1600" i="1" dirty="0">
+              <a:rPr lang="en-US" sz="1800" i="1" dirty="0">
                 <a:solidFill>
                   <a:srgbClr val="1B2A4A"/>
                 </a:solidFill>
@@ -22417,7 +22417,7 @@
               <a:buNone/>
             </a:pPr>
             <a:r>
-              <a:rPr lang="en-US" sz="1600" b="1" i="1" dirty="0">
+              <a:rPr lang="en-US" sz="1800" b="1" i="1" dirty="0">
                 <a:solidFill>
                   <a:srgbClr val="1B2A4A"/>
                 </a:solidFill>
@@ -22431,7 +22431,7 @@
               <a:buNone/>
             </a:pPr>
             <a:r>
-              <a:rPr lang="en-US" sz="1600" i="1" dirty="0">
+              <a:rPr lang="en-US" sz="1800" i="1" dirty="0">
                 <a:solidFill>
                   <a:srgbClr val="1B2A4A"/>
                 </a:solidFill>
@@ -22445,7 +22445,7 @@
               <a:buNone/>
             </a:pPr>
             <a:r>
-              <a:rPr lang="en-US" sz="1600" b="1" i="1" dirty="0">
+              <a:rPr lang="en-US" sz="1800" b="1" i="1" dirty="0">
                 <a:solidFill>
                   <a:srgbClr val="C8102E"/>
                 </a:solidFill>
@@ -22459,7 +22459,7 @@
               <a:buNone/>
             </a:pPr>
             <a:r>
-              <a:rPr lang="en-US" sz="1600" i="1" dirty="0">
+              <a:rPr lang="en-US" sz="1800" i="1" dirty="0">
                 <a:solidFill>
                   <a:srgbClr val="1B2A4A"/>
                 </a:solidFill>
@@ -22469,7 +22469,7 @@
               </a:rPr>
               <a:t> — and the computer discovers the rules.”</a:t>
             </a:r>
-            <a:endParaRPr lang="en-US" sz="1600" dirty="0"/>
+            <a:endParaRPr lang="en-US" sz="1800" dirty="0"/>
           </a:p>
         </p:txBody>
       </p:sp>

--- a/L01-intro-ml/slides/L01_slides_ntu_web.pptx
+++ b/L01-intro-ml/slides/L01_slides_ntu_web.pptx
@@ -2835,7 +2835,7 @@
               <a:buNone/>
             </a:pPr>
             <a:r>
-              <a:rPr lang="en-US" sz="1400" b="1" spc="400" kern="0" dirty="0">
+              <a:rPr lang="en-US" sz="1700" b="1" spc="400" kern="0" dirty="0">
                 <a:solidFill>
                   <a:srgbClr val="C8102E"/>
                 </a:solidFill>
@@ -2845,7 +2845,7 @@
               </a:rPr>
               <a:t>Module 3  ·  Machine Learning &amp; GenAI</a:t>
             </a:r>
-            <a:endParaRPr lang="en-US" sz="1400" dirty="0"/>
+            <a:endParaRPr lang="en-US" sz="1700" dirty="0"/>
           </a:p>
         </p:txBody>
       </p:sp>
@@ -3106,7 +3106,7 @@
               <a:buNone/>
             </a:pPr>
             <a:r>
-              <a:rPr lang="en-US" sz="1600" b="1" dirty="0">
+              <a:rPr lang="en-US" sz="1700" b="1" dirty="0">
                 <a:solidFill>
                   <a:srgbClr val="FFFFFF"/>
                 </a:solidFill>
@@ -3116,7 +3116,7 @@
               </a:rPr>
               <a:t>Pre-trained Models</a:t>
             </a:r>
-            <a:endParaRPr lang="en-US" sz="1600" dirty="0"/>
+            <a:endParaRPr lang="en-US" sz="1700" dirty="0"/>
           </a:p>
         </p:txBody>
       </p:sp>
@@ -3378,7 +3378,7 @@
               <a:buNone/>
             </a:pPr>
             <a:r>
-              <a:rPr lang="en-US" sz="1600" i="1" dirty="0">
+              <a:rPr lang="en-US" sz="1700" i="1" dirty="0">
                 <a:solidFill>
                   <a:srgbClr val="1B2A4A"/>
                 </a:solidFill>
@@ -3392,7 +3392,7 @@
               <a:buNone/>
             </a:pPr>
             <a:r>
-              <a:rPr lang="en-US" sz="1600" b="1" i="1" dirty="0">
+              <a:rPr lang="en-US" sz="1700" b="1" i="1" dirty="0">
                 <a:solidFill>
                   <a:srgbClr val="C8102E"/>
                 </a:solidFill>
@@ -3406,7 +3406,7 @@
               <a:buNone/>
             </a:pPr>
             <a:r>
-              <a:rPr lang="en-US" sz="1600" i="1" dirty="0">
+              <a:rPr lang="en-US" sz="1700" i="1" dirty="0">
                 <a:solidFill>
                   <a:srgbClr val="1B2A4A"/>
                 </a:solidFill>
@@ -3416,7 +3416,7 @@
               </a:rPr>
               <a:t>  Load it. Use it. Don't train from scratch unless your task is genuinely unique.</a:t>
             </a:r>
-            <a:endParaRPr lang="en-US" sz="1600" dirty="0"/>
+            <a:endParaRPr lang="en-US" sz="1700" dirty="0"/>
           </a:p>
         </p:txBody>
       </p:sp>
@@ -3537,7 +3537,7 @@
               <a:buNone/>
             </a:pPr>
             <a:r>
-              <a:rPr lang="en-US" sz="1500" dirty="0">
+              <a:rPr lang="en-US" sz="1700" dirty="0">
                 <a:solidFill>
                   <a:srgbClr val="333D4D"/>
                 </a:solidFill>
@@ -3547,7 +3547,7 @@
               </a:rPr>
               <a:t>•  Hugging Face — open repository (hundreds of models)</a:t>
             </a:r>
-            <a:endParaRPr lang="en-US" sz="1500" dirty="0"/>
+            <a:endParaRPr lang="en-US" sz="1700" dirty="0"/>
           </a:p>
           <a:p>
             <a:pPr indent="0" marL="0">
@@ -3557,7 +3557,7 @@
               <a:buNone/>
             </a:pPr>
             <a:r>
-              <a:rPr lang="en-US" sz="1500" dirty="0">
+              <a:rPr lang="en-US" sz="1700" dirty="0">
                 <a:solidFill>
                   <a:srgbClr val="333D4D"/>
                 </a:solidFill>
@@ -3567,7 +3567,7 @@
               </a:rPr>
               <a:t>•  OpenAI, Anthropic, Google — large hosted models</a:t>
             </a:r>
-            <a:endParaRPr lang="en-US" sz="1500" dirty="0"/>
+            <a:endParaRPr lang="en-US" sz="1700" dirty="0"/>
           </a:p>
           <a:p>
             <a:pPr indent="0" marL="0">
@@ -3577,7 +3577,7 @@
               <a:buNone/>
             </a:pPr>
             <a:r>
-              <a:rPr lang="en-US" sz="1500" dirty="0">
+              <a:rPr lang="en-US" sz="1700" dirty="0">
                 <a:solidFill>
                   <a:srgbClr val="333D4D"/>
                 </a:solidFill>
@@ -3587,7 +3587,7 @@
               </a:rPr>
               <a:t>•  Industry-specific repos (medical, legal, finance)</a:t>
             </a:r>
-            <a:endParaRPr lang="en-US" sz="1500" dirty="0"/>
+            <a:endParaRPr lang="en-US" sz="1700" dirty="0"/>
           </a:p>
           <a:p>
             <a:pPr indent="0" marL="0">
@@ -3597,7 +3597,7 @@
               <a:buNone/>
             </a:pPr>
             <a:r>
-              <a:rPr lang="en-US" sz="1500" dirty="0">
+              <a:rPr lang="en-US" sz="1700" dirty="0">
                 <a:solidFill>
                   <a:srgbClr val="333D4D"/>
                 </a:solidFill>
@@ -3607,7 +3607,7 @@
               </a:rPr>
               <a:t>•  Research labs — published with each new paper</a:t>
             </a:r>
-            <a:endParaRPr lang="en-US" sz="1500" dirty="0"/>
+            <a:endParaRPr lang="en-US" sz="1700" dirty="0"/>
           </a:p>
         </p:txBody>
       </p:sp>
@@ -3728,7 +3728,7 @@
               <a:buNone/>
             </a:pPr>
             <a:r>
-              <a:rPr lang="en-US" sz="1500" dirty="0">
+              <a:rPr lang="en-US" sz="1700" dirty="0">
                 <a:solidFill>
                   <a:srgbClr val="333D4D"/>
                 </a:solidFill>
@@ -3738,7 +3738,7 @@
               </a:rPr>
               <a:t>✓  A POSITIVE / NEGATIVE label for every review</a:t>
             </a:r>
-            <a:endParaRPr lang="en-US" sz="1500" dirty="0"/>
+            <a:endParaRPr lang="en-US" sz="1700" dirty="0"/>
           </a:p>
           <a:p>
             <a:pPr indent="0" marL="0">
@@ -3748,7 +3748,7 @@
               <a:buNone/>
             </a:pPr>
             <a:r>
-              <a:rPr lang="en-US" sz="1500" dirty="0">
+              <a:rPr lang="en-US" sz="1700" dirty="0">
                 <a:solidFill>
                   <a:srgbClr val="333D4D"/>
                 </a:solidFill>
@@ -3758,7 +3758,7 @@
               </a:rPr>
               <a:t>✓  A confidence score (e.g. 97% POSITIVE)</a:t>
             </a:r>
-            <a:endParaRPr lang="en-US" sz="1500" dirty="0"/>
+            <a:endParaRPr lang="en-US" sz="1700" dirty="0"/>
           </a:p>
           <a:p>
             <a:pPr indent="0" marL="0">
@@ -3768,7 +3768,7 @@
               <a:buNone/>
             </a:pPr>
             <a:r>
-              <a:rPr lang="en-US" sz="1500" dirty="0">
+              <a:rPr lang="en-US" sz="1700" dirty="0">
                 <a:solidFill>
                   <a:srgbClr val="333D4D"/>
                 </a:solidFill>
@@ -3778,7 +3778,7 @@
               </a:rPr>
               <a:t>✓  Can filter to ‘NEGATIVE with &gt;90% confidence’</a:t>
             </a:r>
-            <a:endParaRPr lang="en-US" sz="1500" dirty="0"/>
+            <a:endParaRPr lang="en-US" sz="1700" dirty="0"/>
           </a:p>
           <a:p>
             <a:pPr indent="0" marL="0">
@@ -3788,7 +3788,7 @@
               <a:buNone/>
             </a:pPr>
             <a:r>
-              <a:rPr lang="en-US" sz="1500" dirty="0">
+              <a:rPr lang="en-US" sz="1700" dirty="0">
                 <a:solidFill>
                   <a:srgbClr val="333D4D"/>
                 </a:solidFill>
@@ -3798,7 +3798,7 @@
               </a:rPr>
               <a:t>✓  Runs in minutes — not a workweek</a:t>
             </a:r>
-            <a:endParaRPr lang="en-US" sz="1500" dirty="0"/>
+            <a:endParaRPr lang="en-US" sz="1700" dirty="0"/>
           </a:p>
         </p:txBody>
       </p:sp>
@@ -4135,7 +4135,7 @@
               <a:buNone/>
             </a:pPr>
             <a:r>
-              <a:rPr lang="en-US" sz="1400" b="1" dirty="0">
+              <a:rPr lang="en-US" sz="1700" b="1" dirty="0">
                 <a:solidFill>
                   <a:srgbClr val="FFFFFF"/>
                 </a:solidFill>
@@ -4145,7 +4145,7 @@
               </a:rPr>
               <a:t>1</a:t>
             </a:r>
-            <a:endParaRPr lang="en-US" sz="1400" dirty="0"/>
+            <a:endParaRPr lang="en-US" sz="1700" dirty="0"/>
           </a:p>
         </p:txBody>
       </p:sp>
@@ -4240,7 +4240,7 @@
               <a:buNone/>
             </a:pPr>
             <a:r>
-              <a:rPr lang="en-US" sz="1400" b="1" dirty="0">
+              <a:rPr lang="en-US" sz="1700" b="1" dirty="0">
                 <a:solidFill>
                   <a:srgbClr val="FFFFFF"/>
                 </a:solidFill>
@@ -4250,7 +4250,7 @@
               </a:rPr>
               <a:t>2</a:t>
             </a:r>
-            <a:endParaRPr lang="en-US" sz="1400" dirty="0"/>
+            <a:endParaRPr lang="en-US" sz="1700" dirty="0"/>
           </a:p>
         </p:txBody>
       </p:sp>
@@ -4345,7 +4345,7 @@
               <a:buNone/>
             </a:pPr>
             <a:r>
-              <a:rPr lang="en-US" sz="1400" b="1" dirty="0">
+              <a:rPr lang="en-US" sz="1700" b="1" dirty="0">
                 <a:solidFill>
                   <a:srgbClr val="FFFFFF"/>
                 </a:solidFill>
@@ -4355,7 +4355,7 @@
               </a:rPr>
               <a:t>3</a:t>
             </a:r>
-            <a:endParaRPr lang="en-US" sz="1400" dirty="0"/>
+            <a:endParaRPr lang="en-US" sz="1700" dirty="0"/>
           </a:p>
         </p:txBody>
       </p:sp>
@@ -4503,7 +4503,7 @@
               <a:buNone/>
             </a:pPr>
             <a:r>
-              <a:rPr lang="en-US" sz="1400" dirty="0">
+              <a:rPr lang="en-US" sz="1700" dirty="0">
                 <a:solidFill>
                   <a:srgbClr val="FFFFFF">
                     <a:alpha val="70000"/>
@@ -4601,7 +4601,7 @@
               <a:buNone/>
             </a:pPr>
             <a:r>
-              <a:rPr lang="en-US" sz="1600" b="1" dirty="0">
+              <a:rPr lang="en-US" sz="1700" b="1" dirty="0">
                 <a:solidFill>
                   <a:srgbClr val="FFFFFF"/>
                 </a:solidFill>
@@ -4611,7 +4611,7 @@
               </a:rPr>
               <a:t>Category 1: Supervised Learning</a:t>
             </a:r>
-            <a:endParaRPr lang="en-US" sz="1600" dirty="0"/>
+            <a:endParaRPr lang="en-US" sz="1700" dirty="0"/>
           </a:p>
         </p:txBody>
       </p:sp>
@@ -4770,7 +4770,7 @@
               <a:buNone/>
             </a:pPr>
             <a:r>
-              <a:rPr lang="en-US" sz="1400" b="1" spc="400" kern="0" dirty="0">
+              <a:rPr lang="en-US" sz="1700" b="1" spc="400" kern="0" dirty="0">
                 <a:solidFill>
                   <a:srgbClr val="FFFFFF"/>
                 </a:solidFill>
@@ -4780,7 +4780,7 @@
               </a:rPr>
               <a:t>#1</a:t>
             </a:r>
-            <a:endParaRPr lang="en-US" sz="1400" dirty="0"/>
+            <a:endParaRPr lang="en-US" sz="1700" dirty="0"/>
           </a:p>
         </p:txBody>
       </p:sp>
@@ -5065,7 +5065,7 @@
               <a:buNone/>
             </a:pPr>
             <a:r>
-              <a:rPr lang="en-US" sz="1500" dirty="0">
+              <a:rPr lang="en-US" sz="1700" dirty="0">
                 <a:solidFill>
                   <a:srgbClr val="333D4D"/>
                 </a:solidFill>
@@ -5075,7 +5075,7 @@
               </a:rPr>
               <a:t>A student studying past exam papers with answer keys. Many questions, many correct answers. Over time the student learns the patterns and can answer new questions on their own.</a:t>
             </a:r>
-            <a:endParaRPr lang="en-US" sz="1500" dirty="0"/>
+            <a:endParaRPr lang="en-US" sz="1700" dirty="0"/>
           </a:p>
         </p:txBody>
       </p:sp>
@@ -5196,7 +5196,7 @@
               <a:buNone/>
             </a:pPr>
             <a:r>
-              <a:rPr lang="en-US" sz="1500" dirty="0">
+              <a:rPr lang="en-US" sz="1700" dirty="0">
                 <a:solidFill>
                   <a:srgbClr val="333D4D"/>
                 </a:solidFill>
@@ -5206,7 +5206,7 @@
               </a:rPr>
               <a:t>•  Churn prediction</a:t>
             </a:r>
-            <a:endParaRPr lang="en-US" sz="1500" dirty="0"/>
+            <a:endParaRPr lang="en-US" sz="1700" dirty="0"/>
           </a:p>
           <a:p>
             <a:pPr indent="0" marL="0">
@@ -5216,7 +5216,7 @@
               <a:buNone/>
             </a:pPr>
             <a:r>
-              <a:rPr lang="en-US" sz="1500" dirty="0">
+              <a:rPr lang="en-US" sz="1700" dirty="0">
                 <a:solidFill>
                   <a:srgbClr val="333D4D"/>
                 </a:solidFill>
@@ -5226,7 +5226,7 @@
               </a:rPr>
               <a:t>•  Fraud detection</a:t>
             </a:r>
-            <a:endParaRPr lang="en-US" sz="1500" dirty="0"/>
+            <a:endParaRPr lang="en-US" sz="1700" dirty="0"/>
           </a:p>
           <a:p>
             <a:pPr indent="0" marL="0">
@@ -5236,7 +5236,7 @@
               <a:buNone/>
             </a:pPr>
             <a:r>
-              <a:rPr lang="en-US" sz="1500" dirty="0">
+              <a:rPr lang="en-US" sz="1700" dirty="0">
                 <a:solidFill>
                   <a:srgbClr val="333D4D"/>
                 </a:solidFill>
@@ -5246,7 +5246,7 @@
               </a:rPr>
               <a:t>•  Demand forecasting</a:t>
             </a:r>
-            <a:endParaRPr lang="en-US" sz="1500" dirty="0"/>
+            <a:endParaRPr lang="en-US" sz="1700" dirty="0"/>
           </a:p>
           <a:p>
             <a:pPr indent="0" marL="0">
@@ -5256,7 +5256,7 @@
               <a:buNone/>
             </a:pPr>
             <a:r>
-              <a:rPr lang="en-US" sz="1500" dirty="0">
+              <a:rPr lang="en-US" sz="1700" dirty="0">
                 <a:solidFill>
                   <a:srgbClr val="333D4D"/>
                 </a:solidFill>
@@ -5266,7 +5266,7 @@
               </a:rPr>
               <a:t>•  Sentiment / text classification</a:t>
             </a:r>
-            <a:endParaRPr lang="en-US" sz="1500" dirty="0"/>
+            <a:endParaRPr lang="en-US" sz="1700" dirty="0"/>
           </a:p>
           <a:p>
             <a:pPr indent="0" marL="0">
@@ -5276,7 +5276,7 @@
               <a:buNone/>
             </a:pPr>
             <a:r>
-              <a:rPr lang="en-US" sz="1500" dirty="0">
+              <a:rPr lang="en-US" sz="1700" dirty="0">
                 <a:solidFill>
                   <a:srgbClr val="333D4D"/>
                 </a:solidFill>
@@ -5286,7 +5286,7 @@
               </a:rPr>
               <a:t>•  Medical risk scoring</a:t>
             </a:r>
-            <a:endParaRPr lang="en-US" sz="1500" dirty="0"/>
+            <a:endParaRPr lang="en-US" sz="1700" dirty="0"/>
           </a:p>
           <a:p>
             <a:pPr indent="0" marL="0">
@@ -5296,7 +5296,7 @@
               <a:buNone/>
             </a:pPr>
             <a:r>
-              <a:rPr lang="en-US" sz="1500" dirty="0">
+              <a:rPr lang="en-US" sz="1700" dirty="0">
                 <a:solidFill>
                   <a:srgbClr val="333D4D"/>
                 </a:solidFill>
@@ -5306,7 +5306,7 @@
               </a:rPr>
               <a:t>•  Image labelling (cat vs dog)</a:t>
             </a:r>
-            <a:endParaRPr lang="en-US" sz="1500" dirty="0"/>
+            <a:endParaRPr lang="en-US" sz="1700" dirty="0"/>
           </a:p>
         </p:txBody>
       </p:sp>
@@ -5392,7 +5392,7 @@
               <a:buNone/>
             </a:pPr>
             <a:r>
-              <a:rPr lang="en-US" sz="1600" b="1" dirty="0">
+              <a:rPr lang="en-US" sz="1700" b="1" dirty="0">
                 <a:solidFill>
                   <a:srgbClr val="FFFFFF"/>
                 </a:solidFill>
@@ -5402,7 +5402,7 @@
               </a:rPr>
               <a:t>Category 2: Unsupervised Learning</a:t>
             </a:r>
-            <a:endParaRPr lang="en-US" sz="1600" dirty="0"/>
+            <a:endParaRPr lang="en-US" sz="1700" dirty="0"/>
           </a:p>
         </p:txBody>
       </p:sp>
@@ -5561,7 +5561,7 @@
               <a:buNone/>
             </a:pPr>
             <a:r>
-              <a:rPr lang="en-US" sz="1400" b="1" spc="400" kern="0" dirty="0">
+              <a:rPr lang="en-US" sz="1700" b="1" spc="400" kern="0" dirty="0">
                 <a:solidFill>
                   <a:srgbClr val="FFFFFF"/>
                 </a:solidFill>
@@ -5571,7 +5571,7 @@
               </a:rPr>
               <a:t>#2</a:t>
             </a:r>
-            <a:endParaRPr lang="en-US" sz="1400" dirty="0"/>
+            <a:endParaRPr lang="en-US" sz="1700" dirty="0"/>
           </a:p>
         </p:txBody>
       </p:sp>
@@ -5856,7 +5856,7 @@
               <a:buNone/>
             </a:pPr>
             <a:r>
-              <a:rPr lang="en-US" sz="1500" dirty="0">
+              <a:rPr lang="en-US" sz="1700" dirty="0">
                 <a:solidFill>
                   <a:srgbClr val="333D4D"/>
                 </a:solidFill>
@@ -5866,7 +5866,7 @@
               </a:rPr>
               <a:t>A librarian with a crate of unlabelled books. She groups them by 'these feel similar' — romance here, mystery there — without anyone telling her what the genres are.</a:t>
             </a:r>
-            <a:endParaRPr lang="en-US" sz="1500" dirty="0"/>
+            <a:endParaRPr lang="en-US" sz="1700" dirty="0"/>
           </a:p>
         </p:txBody>
       </p:sp>
@@ -5987,7 +5987,7 @@
               <a:buNone/>
             </a:pPr>
             <a:r>
-              <a:rPr lang="en-US" sz="1500" dirty="0">
+              <a:rPr lang="en-US" sz="1700" dirty="0">
                 <a:solidFill>
                   <a:srgbClr val="333D4D"/>
                 </a:solidFill>
@@ -5997,7 +5997,7 @@
               </a:rPr>
               <a:t>•  Customer segmentation</a:t>
             </a:r>
-            <a:endParaRPr lang="en-US" sz="1500" dirty="0"/>
+            <a:endParaRPr lang="en-US" sz="1700" dirty="0"/>
           </a:p>
           <a:p>
             <a:pPr indent="0" marL="0">
@@ -6007,7 +6007,7 @@
               <a:buNone/>
             </a:pPr>
             <a:r>
-              <a:rPr lang="en-US" sz="1500" dirty="0">
+              <a:rPr lang="en-US" sz="1700" dirty="0">
                 <a:solidFill>
                   <a:srgbClr val="333D4D"/>
                 </a:solidFill>
@@ -6017,7 +6017,7 @@
               </a:rPr>
               <a:t>•  Anomaly detection in logs</a:t>
             </a:r>
-            <a:endParaRPr lang="en-US" sz="1500" dirty="0"/>
+            <a:endParaRPr lang="en-US" sz="1700" dirty="0"/>
           </a:p>
           <a:p>
             <a:pPr indent="0" marL="0">
@@ -6027,7 +6027,7 @@
               <a:buNone/>
             </a:pPr>
             <a:r>
-              <a:rPr lang="en-US" sz="1500" dirty="0">
+              <a:rPr lang="en-US" sz="1700" dirty="0">
                 <a:solidFill>
                   <a:srgbClr val="333D4D"/>
                 </a:solidFill>
@@ -6037,7 +6037,7 @@
               </a:rPr>
               <a:t>•  Topic discovery in reviews/tickets</a:t>
             </a:r>
-            <a:endParaRPr lang="en-US" sz="1500" dirty="0"/>
+            <a:endParaRPr lang="en-US" sz="1700" dirty="0"/>
           </a:p>
           <a:p>
             <a:pPr indent="0" marL="0">
@@ -6047,7 +6047,7 @@
               <a:buNone/>
             </a:pPr>
             <a:r>
-              <a:rPr lang="en-US" sz="1500" dirty="0">
+              <a:rPr lang="en-US" sz="1700" dirty="0">
                 <a:solidFill>
                   <a:srgbClr val="333D4D"/>
                 </a:solidFill>
@@ -6057,7 +6057,7 @@
               </a:rPr>
               <a:t>•  Recommendation cohorts</a:t>
             </a:r>
-            <a:endParaRPr lang="en-US" sz="1500" dirty="0"/>
+            <a:endParaRPr lang="en-US" sz="1700" dirty="0"/>
           </a:p>
           <a:p>
             <a:pPr indent="0" marL="0">
@@ -6067,7 +6067,7 @@
               <a:buNone/>
             </a:pPr>
             <a:r>
-              <a:rPr lang="en-US" sz="1500" dirty="0">
+              <a:rPr lang="en-US" sz="1700" dirty="0">
                 <a:solidFill>
                   <a:srgbClr val="333D4D"/>
                 </a:solidFill>
@@ -6077,7 +6077,7 @@
               </a:rPr>
               <a:t>•  Pre-processing for downstream supervised models</a:t>
             </a:r>
-            <a:endParaRPr lang="en-US" sz="1500" dirty="0"/>
+            <a:endParaRPr lang="en-US" sz="1700" dirty="0"/>
           </a:p>
         </p:txBody>
       </p:sp>
@@ -6163,7 +6163,7 @@
               <a:buNone/>
             </a:pPr>
             <a:r>
-              <a:rPr lang="en-US" sz="1600" b="1" dirty="0">
+              <a:rPr lang="en-US" sz="1700" b="1" dirty="0">
                 <a:solidFill>
                   <a:srgbClr val="FFFFFF"/>
                 </a:solidFill>
@@ -6173,7 +6173,7 @@
               </a:rPr>
               <a:t>Category 3: Reinforcement Learning</a:t>
             </a:r>
-            <a:endParaRPr lang="en-US" sz="1600" dirty="0"/>
+            <a:endParaRPr lang="en-US" sz="1700" dirty="0"/>
           </a:p>
         </p:txBody>
       </p:sp>
@@ -6332,7 +6332,7 @@
               <a:buNone/>
             </a:pPr>
             <a:r>
-              <a:rPr lang="en-US" sz="1400" b="1" spc="400" kern="0" dirty="0">
+              <a:rPr lang="en-US" sz="1700" b="1" spc="400" kern="0" dirty="0">
                 <a:solidFill>
                   <a:srgbClr val="FFFFFF"/>
                 </a:solidFill>
@@ -6342,7 +6342,7 @@
               </a:rPr>
               <a:t>#3</a:t>
             </a:r>
-            <a:endParaRPr lang="en-US" sz="1400" dirty="0"/>
+            <a:endParaRPr lang="en-US" sz="1700" dirty="0"/>
           </a:p>
         </p:txBody>
       </p:sp>
@@ -6627,7 +6627,7 @@
               <a:buNone/>
             </a:pPr>
             <a:r>
-              <a:rPr lang="en-US" sz="1500" dirty="0">
+              <a:rPr lang="en-US" sz="1700" dirty="0">
                 <a:solidFill>
                   <a:srgbClr val="333D4D"/>
                 </a:solidFill>
@@ -6637,7 +6637,7 @@
               </a:rPr>
               <a:t>Training a dog with treats. Sit → treat. Bark at the mailman → no treat. Over time the dog learns which actions pay off.</a:t>
             </a:r>
-            <a:endParaRPr lang="en-US" sz="1500" dirty="0"/>
+            <a:endParaRPr lang="en-US" sz="1700" dirty="0"/>
           </a:p>
         </p:txBody>
       </p:sp>
@@ -6758,7 +6758,7 @@
               <a:buNone/>
             </a:pPr>
             <a:r>
-              <a:rPr lang="en-US" sz="1500" dirty="0">
+              <a:rPr lang="en-US" sz="1700" dirty="0">
                 <a:solidFill>
                   <a:srgbClr val="333D4D"/>
                 </a:solidFill>
@@ -6768,7 +6768,7 @@
               </a:rPr>
               <a:t>•  AlphaGo, chess-playing AIs</a:t>
             </a:r>
-            <a:endParaRPr lang="en-US" sz="1500" dirty="0"/>
+            <a:endParaRPr lang="en-US" sz="1700" dirty="0"/>
           </a:p>
           <a:p>
             <a:pPr indent="0" marL="0">
@@ -6778,7 +6778,7 @@
               <a:buNone/>
             </a:pPr>
             <a:r>
-              <a:rPr lang="en-US" sz="1500" dirty="0">
+              <a:rPr lang="en-US" sz="1700" dirty="0">
                 <a:solidFill>
                   <a:srgbClr val="333D4D"/>
                 </a:solidFill>
@@ -6788,7 +6788,7 @@
               </a:rPr>
               <a:t>•  Robot control (warehouse pick-and-pack)</a:t>
             </a:r>
-            <a:endParaRPr lang="en-US" sz="1500" dirty="0"/>
+            <a:endParaRPr lang="en-US" sz="1700" dirty="0"/>
           </a:p>
           <a:p>
             <a:pPr indent="0" marL="0">
@@ -6798,7 +6798,7 @@
               <a:buNone/>
             </a:pPr>
             <a:r>
-              <a:rPr lang="en-US" sz="1500" dirty="0">
+              <a:rPr lang="en-US" sz="1700" dirty="0">
                 <a:solidFill>
                   <a:srgbClr val="333D4D"/>
                 </a:solidFill>
@@ -6808,7 +6808,7 @@
               </a:rPr>
               <a:t>•  Large-scale recommendation engines</a:t>
             </a:r>
-            <a:endParaRPr lang="en-US" sz="1500" dirty="0"/>
+            <a:endParaRPr lang="en-US" sz="1700" dirty="0"/>
           </a:p>
           <a:p>
             <a:pPr indent="0" marL="0">
@@ -6818,7 +6818,7 @@
               <a:buNone/>
             </a:pPr>
             <a:r>
-              <a:rPr lang="en-US" sz="1500" dirty="0">
+              <a:rPr lang="en-US" sz="1700" dirty="0">
                 <a:solidFill>
                   <a:srgbClr val="333D4D"/>
                 </a:solidFill>
@@ -6828,7 +6828,7 @@
               </a:rPr>
               <a:t>•  RLHF in modern LLMs</a:t>
             </a:r>
-            <a:endParaRPr lang="en-US" sz="1500" dirty="0"/>
+            <a:endParaRPr lang="en-US" sz="1700" dirty="0"/>
           </a:p>
           <a:p>
             <a:pPr indent="0" marL="0">
@@ -6838,7 +6838,7 @@
               <a:buNone/>
             </a:pPr>
             <a:r>
-              <a:rPr lang="en-US" sz="1500" dirty="0">
+              <a:rPr lang="en-US" sz="1700" dirty="0">
                 <a:solidFill>
                   <a:srgbClr val="333D4D"/>
                 </a:solidFill>
@@ -6848,7 +6848,7 @@
               </a:rPr>
               <a:t>•  Game-playing agents</a:t>
             </a:r>
-            <a:endParaRPr lang="en-US" sz="1500" dirty="0"/>
+            <a:endParaRPr lang="en-US" sz="1700" dirty="0"/>
           </a:p>
           <a:p>
             <a:pPr indent="0" marL="0">
@@ -6858,7 +6858,7 @@
               <a:buNone/>
             </a:pPr>
             <a:r>
-              <a:rPr lang="en-US" sz="1500" dirty="0">
+              <a:rPr lang="en-US" sz="1700" dirty="0">
                 <a:solidFill>
                   <a:srgbClr val="333D4D"/>
                 </a:solidFill>
@@ -6868,7 +6868,7 @@
               </a:rPr>
               <a:t>•  → Not built in this course (recognise, don't implement).</a:t>
             </a:r>
-            <a:endParaRPr lang="en-US" sz="1500" dirty="0"/>
+            <a:endParaRPr lang="en-US" sz="1700" dirty="0"/>
           </a:p>
         </p:txBody>
       </p:sp>
@@ -7205,7 +7205,7 @@
               <a:buNone/>
             </a:pPr>
             <a:r>
-              <a:rPr lang="en-US" sz="1600" b="1" dirty="0">
+              <a:rPr lang="en-US" sz="1700" b="1" dirty="0">
                 <a:solidFill>
                   <a:srgbClr val="FFFFFF"/>
                 </a:solidFill>
@@ -7215,7 +7215,7 @@
               </a:rPr>
               <a:t>→</a:t>
             </a:r>
-            <a:endParaRPr lang="en-US" sz="1600" dirty="0"/>
+            <a:endParaRPr lang="en-US" sz="1700" dirty="0"/>
           </a:p>
         </p:txBody>
       </p:sp>
@@ -7310,7 +7310,7 @@
               <a:buNone/>
             </a:pPr>
             <a:r>
-              <a:rPr lang="en-US" sz="1600" b="1" dirty="0">
+              <a:rPr lang="en-US" sz="1700" b="1" dirty="0">
                 <a:solidFill>
                   <a:srgbClr val="FFFFFF"/>
                 </a:solidFill>
@@ -7320,7 +7320,7 @@
               </a:rPr>
               <a:t>→</a:t>
             </a:r>
-            <a:endParaRPr lang="en-US" sz="1600" dirty="0"/>
+            <a:endParaRPr lang="en-US" sz="1700" dirty="0"/>
           </a:p>
         </p:txBody>
       </p:sp>
@@ -7415,7 +7415,7 @@
               <a:buNone/>
             </a:pPr>
             <a:r>
-              <a:rPr lang="en-US" sz="1600" b="1" dirty="0">
+              <a:rPr lang="en-US" sz="1700" b="1" dirty="0">
                 <a:solidFill>
                   <a:srgbClr val="FFFFFF"/>
                 </a:solidFill>
@@ -7425,7 +7425,7 @@
               </a:rPr>
               <a:t>→</a:t>
             </a:r>
-            <a:endParaRPr lang="en-US" sz="1600" dirty="0"/>
+            <a:endParaRPr lang="en-US" sz="1700" dirty="0"/>
           </a:p>
         </p:txBody>
       </p:sp>
@@ -7573,7 +7573,7 @@
               <a:buNone/>
             </a:pPr>
             <a:r>
-              <a:rPr lang="en-US" sz="1400" dirty="0">
+              <a:rPr lang="en-US" sz="1700" dirty="0">
                 <a:solidFill>
                   <a:srgbClr val="FFFFFF">
                     <a:alpha val="70000"/>
@@ -7671,7 +7671,7 @@
               <a:buNone/>
             </a:pPr>
             <a:r>
-              <a:rPr lang="en-US" sz="1600" b="1" dirty="0">
+              <a:rPr lang="en-US" sz="1700" b="1" dirty="0">
                 <a:solidFill>
                   <a:srgbClr val="FFFFFF"/>
                 </a:solidFill>
@@ -7681,7 +7681,7 @@
               </a:rPr>
               <a:t>The 7-Step ML Workflow</a:t>
             </a:r>
-            <a:endParaRPr lang="en-US" sz="1600" dirty="0"/>
+            <a:endParaRPr lang="en-US" sz="1700" dirty="0"/>
           </a:p>
         </p:txBody>
       </p:sp>
@@ -9189,7 +9189,7 @@
               <a:buNone/>
             </a:pPr>
             <a:r>
-              <a:rPr lang="en-US" sz="1600" b="1" dirty="0">
+              <a:rPr lang="en-US" sz="1700" b="1" dirty="0">
                 <a:solidFill>
                   <a:srgbClr val="FFFFFF"/>
                 </a:solidFill>
@@ -9199,7 +9199,7 @@
               </a:rPr>
               <a:t>Where the Time Actually Goes</a:t>
             </a:r>
-            <a:endParaRPr lang="en-US" sz="1600" dirty="0"/>
+            <a:endParaRPr lang="en-US" sz="1700" dirty="0"/>
           </a:p>
         </p:txBody>
       </p:sp>
@@ -9372,7 +9372,7 @@
               <a:buNone/>
             </a:pPr>
             <a:r>
-              <a:rPr lang="en-US" sz="1500" b="1" spc="300" kern="0" dirty="0">
+              <a:rPr lang="en-US" sz="1700" b="1" spc="300" kern="0" dirty="0">
                 <a:solidFill>
                   <a:srgbClr val="5F6B7A"/>
                 </a:solidFill>
@@ -9382,7 +9382,7 @@
               </a:rPr>
               <a:t>Steps 1-3</a:t>
             </a:r>
-            <a:endParaRPr lang="en-US" sz="1500" dirty="0"/>
+            <a:endParaRPr lang="en-US" sz="1700" dirty="0"/>
           </a:p>
         </p:txBody>
       </p:sp>
@@ -9539,7 +9539,7 @@
               <a:buNone/>
             </a:pPr>
             <a:r>
-              <a:rPr lang="en-US" sz="1500" b="1" spc="300" kern="0" dirty="0">
+              <a:rPr lang="en-US" sz="1700" b="1" spc="300" kern="0" dirty="0">
                 <a:solidFill>
                   <a:srgbClr val="5F6B7A"/>
                 </a:solidFill>
@@ -9549,7 +9549,7 @@
               </a:rPr>
               <a:t>Steps 4-5</a:t>
             </a:r>
-            <a:endParaRPr lang="en-US" sz="1500" dirty="0"/>
+            <a:endParaRPr lang="en-US" sz="1700" dirty="0"/>
           </a:p>
         </p:txBody>
       </p:sp>
@@ -9706,7 +9706,7 @@
               <a:buNone/>
             </a:pPr>
             <a:r>
-              <a:rPr lang="en-US" sz="1500" b="1" spc="300" kern="0" dirty="0">
+              <a:rPr lang="en-US" sz="1700" b="1" spc="300" kern="0" dirty="0">
                 <a:solidFill>
                   <a:srgbClr val="5F6B7A"/>
                 </a:solidFill>
@@ -9716,7 +9716,7 @@
               </a:rPr>
               <a:t>Steps 6-7</a:t>
             </a:r>
-            <a:endParaRPr lang="en-US" sz="1500" dirty="0"/>
+            <a:endParaRPr lang="en-US" sz="1700" dirty="0"/>
           </a:p>
         </p:txBody>
       </p:sp>
@@ -10047,7 +10047,7 @@
               <a:buNone/>
             </a:pPr>
             <a:r>
-              <a:rPr lang="en-US" sz="1600" b="1" dirty="0">
+              <a:rPr lang="en-US" sz="1700" b="1" dirty="0">
                 <a:solidFill>
                   <a:srgbClr val="FFFFFF"/>
                 </a:solidFill>
@@ -10057,7 +10057,7 @@
               </a:rPr>
               <a:t>The 7 Steps — Cheatsheet</a:t>
             </a:r>
-            <a:endParaRPr lang="en-US" sz="1600" dirty="0"/>
+            <a:endParaRPr lang="en-US" sz="1700" dirty="0"/>
           </a:p>
         </p:txBody>
       </p:sp>
@@ -10242,7 +10242,7 @@
                         <a:buNone/>
                       </a:pPr>
                       <a:r>
-                        <a:rPr lang="en-US" sz="1400" b="1" spc="400" kern="0" dirty="0">
+                        <a:rPr lang="en-US" sz="1700" b="1" spc="400" kern="0" dirty="0">
                           <a:solidFill>
                             <a:srgbClr val="FFFFFF"/>
                           </a:solidFill>
@@ -10252,7 +10252,7 @@
                         </a:rPr>
                         <a:t>STEP</a:t>
                       </a:r>
-                      <a:endParaRPr lang="en-US" sz="1400" dirty="0">
+                      <a:endParaRPr lang="en-US" sz="1700" dirty="0">
                         <a:latin typeface="Open Sans" charset="0"/>
                         <a:ea typeface="Open Sans" charset="0"/>
                         <a:cs typeface="Open Sans" charset="0"/>
@@ -10310,7 +10310,7 @@
                         <a:buNone/>
                       </a:pPr>
                       <a:r>
-                        <a:rPr lang="en-US" sz="1400" b="1" spc="400" kern="0" dirty="0">
+                        <a:rPr lang="en-US" sz="1700" b="1" spc="400" kern="0" dirty="0">
                           <a:solidFill>
                             <a:srgbClr val="FFFFFF"/>
                           </a:solidFill>
@@ -10320,7 +10320,7 @@
                         </a:rPr>
                         <a:t>WHAT HAPPENS</a:t>
                       </a:r>
-                      <a:endParaRPr lang="en-US" sz="1400" dirty="0">
+                      <a:endParaRPr lang="en-US" sz="1700" dirty="0">
                         <a:latin typeface="Open Sans" charset="0"/>
                         <a:ea typeface="Open Sans" charset="0"/>
                         <a:cs typeface="Open Sans" charset="0"/>
@@ -10378,7 +10378,7 @@
                         <a:buNone/>
                       </a:pPr>
                       <a:r>
-                        <a:rPr lang="en-US" sz="1400" b="1" spc="400" kern="0" dirty="0">
+                        <a:rPr lang="en-US" sz="1700" b="1" spc="400" kern="0" dirty="0">
                           <a:solidFill>
                             <a:srgbClr val="FFFFFF"/>
                           </a:solidFill>
@@ -10388,7 +10388,7 @@
                         </a:rPr>
                         <a:t>WHERE BEGINNERS GET STUCK</a:t>
                       </a:r>
-                      <a:endParaRPr lang="en-US" sz="1400" dirty="0">
+                      <a:endParaRPr lang="en-US" sz="1700" dirty="0">
                         <a:latin typeface="Open Sans" charset="0"/>
                         <a:ea typeface="Open Sans" charset="0"/>
                         <a:cs typeface="Open Sans" charset="0"/>
@@ -10448,7 +10448,7 @@
                         <a:buNone/>
                       </a:pPr>
                       <a:r>
-                        <a:rPr lang="en-US" sz="1400" b="1" dirty="0">
+                        <a:rPr lang="en-US" sz="1700" b="1" dirty="0">
                           <a:solidFill>
                             <a:srgbClr val="C8102E"/>
                           </a:solidFill>
@@ -10458,7 +10458,7 @@
                         </a:rPr>
                         <a:t>1. Frame</a:t>
                       </a:r>
-                      <a:endParaRPr lang="en-US" sz="1400" dirty="0">
+                      <a:endParaRPr lang="en-US" sz="1700" dirty="0">
                         <a:latin typeface="Open Sans" charset="0"/>
                         <a:ea typeface="Open Sans" charset="0"/>
                         <a:cs typeface="Open Sans" charset="0"/>
@@ -10513,7 +10513,7 @@
                         <a:buNone/>
                       </a:pPr>
                       <a:r>
-                        <a:rPr lang="en-US" sz="1400" dirty="0">
+                        <a:rPr lang="en-US" sz="1700" dirty="0">
                           <a:solidFill>
                             <a:srgbClr val="333D4D"/>
                           </a:solidFill>
@@ -10523,7 +10523,7 @@
                         </a:rPr>
                         <a:t>Business question, success metric, cost of wrongness</a:t>
                       </a:r>
-                      <a:endParaRPr lang="en-US" sz="1400" dirty="0">
+                      <a:endParaRPr lang="en-US" sz="1700" dirty="0">
                         <a:latin typeface="Open Sans" charset="0"/>
                         <a:ea typeface="Open Sans" charset="0"/>
                         <a:cs typeface="Open Sans" charset="0"/>
@@ -10578,7 +10578,7 @@
                         <a:buNone/>
                       </a:pPr>
                       <a:r>
-                        <a:rPr lang="en-US" sz="1400" i="1" dirty="0">
+                        <a:rPr lang="en-US" sz="1700" i="1" dirty="0">
                           <a:solidFill>
                             <a:srgbClr val="C8102E"/>
                           </a:solidFill>
@@ -10588,7 +10588,7 @@
                         </a:rPr>
                         <a:t>Skipping it entirely</a:t>
                       </a:r>
-                      <a:endParaRPr lang="en-US" sz="1400" dirty="0">
+                      <a:endParaRPr lang="en-US" sz="1700" dirty="0">
                         <a:latin typeface="Open Sans" charset="0"/>
                         <a:ea typeface="Open Sans" charset="0"/>
                         <a:cs typeface="Open Sans" charset="0"/>
@@ -10645,7 +10645,7 @@
                         <a:buNone/>
                       </a:pPr>
                       <a:r>
-                        <a:rPr lang="en-US" sz="1400" b="1" dirty="0">
+                        <a:rPr lang="en-US" sz="1700" b="1" dirty="0">
                           <a:solidFill>
                             <a:srgbClr val="C8102E"/>
                           </a:solidFill>
@@ -10655,7 +10655,7 @@
                         </a:rPr>
                         <a:t>2. Collect</a:t>
                       </a:r>
-                      <a:endParaRPr lang="en-US" sz="1400" dirty="0">
+                      <a:endParaRPr lang="en-US" sz="1700" dirty="0">
                         <a:latin typeface="Open Sans" charset="0"/>
                         <a:ea typeface="Open Sans" charset="0"/>
                         <a:cs typeface="Open Sans" charset="0"/>
@@ -10710,7 +10710,7 @@
                         <a:buNone/>
                       </a:pPr>
                       <a:r>
-                        <a:rPr lang="en-US" sz="1400" dirty="0">
+                        <a:rPr lang="en-US" sz="1700" dirty="0">
                           <a:solidFill>
                             <a:srgbClr val="333D4D"/>
                           </a:solidFill>
@@ -10720,7 +10720,7 @@
                         </a:rPr>
                         <a:t>Gather features (and labels, if training)</a:t>
                       </a:r>
-                      <a:endParaRPr lang="en-US" sz="1400" dirty="0">
+                      <a:endParaRPr lang="en-US" sz="1700" dirty="0">
                         <a:latin typeface="Open Sans" charset="0"/>
                         <a:ea typeface="Open Sans" charset="0"/>
                         <a:cs typeface="Open Sans" charset="0"/>
@@ -10775,7 +10775,7 @@
                         <a:buNone/>
                       </a:pPr>
                       <a:r>
-                        <a:rPr lang="en-US" sz="1400" i="1" dirty="0">
+                        <a:rPr lang="en-US" sz="1700" i="1" dirty="0">
                           <a:solidFill>
                             <a:srgbClr val="C8102E"/>
                           </a:solidFill>
@@ -10785,7 +10785,7 @@
                         </a:rPr>
                         <a:t>Assuming data exists when it doesn't</a:t>
                       </a:r>
-                      <a:endParaRPr lang="en-US" sz="1400" dirty="0">
+                      <a:endParaRPr lang="en-US" sz="1700" dirty="0">
                         <a:latin typeface="Open Sans" charset="0"/>
                         <a:ea typeface="Open Sans" charset="0"/>
                         <a:cs typeface="Open Sans" charset="0"/>
@@ -10842,7 +10842,7 @@
                         <a:buNone/>
                       </a:pPr>
                       <a:r>
-                        <a:rPr lang="en-US" sz="1400" b="1" dirty="0">
+                        <a:rPr lang="en-US" sz="1700" b="1" dirty="0">
                           <a:solidFill>
                             <a:srgbClr val="C8102E"/>
                           </a:solidFill>
@@ -10852,7 +10852,7 @@
                         </a:rPr>
                         <a:t>3. Clean</a:t>
                       </a:r>
-                      <a:endParaRPr lang="en-US" sz="1400" dirty="0">
+                      <a:endParaRPr lang="en-US" sz="1700" dirty="0">
                         <a:latin typeface="Open Sans" charset="0"/>
                         <a:ea typeface="Open Sans" charset="0"/>
                         <a:cs typeface="Open Sans" charset="0"/>
@@ -10907,7 +10907,7 @@
                         <a:buNone/>
                       </a:pPr>
                       <a:r>
-                        <a:rPr lang="en-US" sz="1400" dirty="0">
+                        <a:rPr lang="en-US" sz="1700" dirty="0">
                           <a:solidFill>
                             <a:srgbClr val="333D4D"/>
                           </a:solidFill>
@@ -10917,7 +10917,7 @@
                         </a:rPr>
                         <a:t>Fix missing, remove duplicates, check for bias</a:t>
                       </a:r>
-                      <a:endParaRPr lang="en-US" sz="1400" dirty="0">
+                      <a:endParaRPr lang="en-US" sz="1700" dirty="0">
                         <a:latin typeface="Open Sans" charset="0"/>
                         <a:ea typeface="Open Sans" charset="0"/>
                         <a:cs typeface="Open Sans" charset="0"/>
@@ -10972,7 +10972,7 @@
                         <a:buNone/>
                       </a:pPr>
                       <a:r>
-                        <a:rPr lang="en-US" sz="1400" i="1" dirty="0">
+                        <a:rPr lang="en-US" sz="1700" i="1" dirty="0">
                           <a:solidFill>
                             <a:srgbClr val="C8102E"/>
                           </a:solidFill>
@@ -10982,7 +10982,7 @@
                         </a:rPr>
                         <a:t>Underestimating how long this takes</a:t>
                       </a:r>
-                      <a:endParaRPr lang="en-US" sz="1400" dirty="0">
+                      <a:endParaRPr lang="en-US" sz="1700" dirty="0">
                         <a:latin typeface="Open Sans" charset="0"/>
                         <a:ea typeface="Open Sans" charset="0"/>
                         <a:cs typeface="Open Sans" charset="0"/>
@@ -11039,7 +11039,7 @@
                         <a:buNone/>
                       </a:pPr>
                       <a:r>
-                        <a:rPr lang="en-US" sz="1400" b="1" dirty="0">
+                        <a:rPr lang="en-US" sz="1700" b="1" dirty="0">
                           <a:solidFill>
                             <a:srgbClr val="1B2A4A"/>
                           </a:solidFill>
@@ -11049,7 +11049,7 @@
                         </a:rPr>
                         <a:t>4. Train</a:t>
                       </a:r>
-                      <a:endParaRPr lang="en-US" sz="1400" dirty="0">
+                      <a:endParaRPr lang="en-US" sz="1700" dirty="0">
                         <a:latin typeface="Open Sans" charset="0"/>
                         <a:ea typeface="Open Sans" charset="0"/>
                         <a:cs typeface="Open Sans" charset="0"/>
@@ -11104,7 +11104,7 @@
                         <a:buNone/>
                       </a:pPr>
                       <a:r>
-                        <a:rPr lang="en-US" sz="1400" dirty="0">
+                        <a:rPr lang="en-US" sz="1700" dirty="0">
                           <a:solidFill>
                             <a:srgbClr val="333D4D"/>
                           </a:solidFill>
@@ -11114,7 +11114,7 @@
                         </a:rPr>
                         <a:t>Fit a model — or reuse a pre-trained one</a:t>
                       </a:r>
-                      <a:endParaRPr lang="en-US" sz="1400" dirty="0">
+                      <a:endParaRPr lang="en-US" sz="1700" dirty="0">
                         <a:latin typeface="Open Sans" charset="0"/>
                         <a:ea typeface="Open Sans" charset="0"/>
                         <a:cs typeface="Open Sans" charset="0"/>
@@ -11169,7 +11169,7 @@
                         <a:buNone/>
                       </a:pPr>
                       <a:r>
-                        <a:rPr lang="en-US" sz="1400" i="1" dirty="0">
+                        <a:rPr lang="en-US" sz="1700" i="1" dirty="0">
                           <a:solidFill>
                             <a:srgbClr val="C8102E"/>
                           </a:solidFill>
@@ -11179,7 +11179,7 @@
                         </a:rPr>
                         <a:t>Training from scratch when one exists</a:t>
                       </a:r>
-                      <a:endParaRPr lang="en-US" sz="1400" dirty="0">
+                      <a:endParaRPr lang="en-US" sz="1700" dirty="0">
                         <a:latin typeface="Open Sans" charset="0"/>
                         <a:ea typeface="Open Sans" charset="0"/>
                         <a:cs typeface="Open Sans" charset="0"/>
@@ -11236,7 +11236,7 @@
                         <a:buNone/>
                       </a:pPr>
                       <a:r>
-                        <a:rPr lang="en-US" sz="1400" b="1" dirty="0">
+                        <a:rPr lang="en-US" sz="1700" b="1" dirty="0">
                           <a:solidFill>
                             <a:srgbClr val="1B2A4A"/>
                           </a:solidFill>
@@ -11246,7 +11246,7 @@
                         </a:rPr>
                         <a:t>5. Evaluate</a:t>
                       </a:r>
-                      <a:endParaRPr lang="en-US" sz="1400" dirty="0">
+                      <a:endParaRPr lang="en-US" sz="1700" dirty="0">
                         <a:latin typeface="Open Sans" charset="0"/>
                         <a:ea typeface="Open Sans" charset="0"/>
                         <a:cs typeface="Open Sans" charset="0"/>
@@ -11301,7 +11301,7 @@
                         <a:buNone/>
                       </a:pPr>
                       <a:r>
-                        <a:rPr lang="en-US" sz="1400" dirty="0">
+                        <a:rPr lang="en-US" sz="1700" dirty="0">
                           <a:solidFill>
                             <a:srgbClr val="333D4D"/>
                           </a:solidFill>
@@ -11311,7 +11311,7 @@
                         </a:rPr>
                         <a:t>Hold-out test · check WHERE it's wrong</a:t>
                       </a:r>
-                      <a:endParaRPr lang="en-US" sz="1400" dirty="0">
+                      <a:endParaRPr lang="en-US" sz="1700" dirty="0">
                         <a:latin typeface="Open Sans" charset="0"/>
                         <a:ea typeface="Open Sans" charset="0"/>
                         <a:cs typeface="Open Sans" charset="0"/>
@@ -11366,7 +11366,7 @@
                         <a:buNone/>
                       </a:pPr>
                       <a:r>
-                        <a:rPr lang="en-US" sz="1400" i="1" dirty="0">
+                        <a:rPr lang="en-US" sz="1700" i="1" dirty="0">
                           <a:solidFill>
                             <a:srgbClr val="C8102E"/>
                           </a:solidFill>
@@ -11376,7 +11376,7 @@
                         </a:rPr>
                         <a:t>Reporting one accuracy number</a:t>
                       </a:r>
-                      <a:endParaRPr lang="en-US" sz="1400" dirty="0">
+                      <a:endParaRPr lang="en-US" sz="1700" dirty="0">
                         <a:latin typeface="Open Sans" charset="0"/>
                         <a:ea typeface="Open Sans" charset="0"/>
                         <a:cs typeface="Open Sans" charset="0"/>
@@ -11433,7 +11433,7 @@
                         <a:buNone/>
                       </a:pPr>
                       <a:r>
-                        <a:rPr lang="en-US" sz="1400" b="1" dirty="0">
+                        <a:rPr lang="en-US" sz="1700" b="1" dirty="0">
                           <a:solidFill>
                             <a:srgbClr val="2C5697"/>
                           </a:solidFill>
@@ -11443,7 +11443,7 @@
                         </a:rPr>
                         <a:t>6. Deploy</a:t>
                       </a:r>
-                      <a:endParaRPr lang="en-US" sz="1400" dirty="0">
+                      <a:endParaRPr lang="en-US" sz="1700" dirty="0">
                         <a:latin typeface="Open Sans" charset="0"/>
                         <a:ea typeface="Open Sans" charset="0"/>
                         <a:cs typeface="Open Sans" charset="0"/>
@@ -11498,7 +11498,7 @@
                         <a:buNone/>
                       </a:pPr>
                       <a:r>
-                        <a:rPr lang="en-US" sz="1400" dirty="0">
+                        <a:rPr lang="en-US" sz="1700" dirty="0">
                           <a:solidFill>
                             <a:srgbClr val="333D4D"/>
                           </a:solidFill>
@@ -11508,7 +11508,7 @@
                         </a:rPr>
                         <a:t>Pipeline · dashboard · API</a:t>
                       </a:r>
-                      <a:endParaRPr lang="en-US" sz="1400" dirty="0">
+                      <a:endParaRPr lang="en-US" sz="1700" dirty="0">
                         <a:latin typeface="Open Sans" charset="0"/>
                         <a:ea typeface="Open Sans" charset="0"/>
                         <a:cs typeface="Open Sans" charset="0"/>
@@ -11563,7 +11563,7 @@
                         <a:buNone/>
                       </a:pPr>
                       <a:r>
-                        <a:rPr lang="en-US" sz="1400" i="1" dirty="0">
+                        <a:rPr lang="en-US" sz="1700" i="1" dirty="0">
                           <a:solidFill>
                             <a:srgbClr val="C8102E"/>
                           </a:solidFill>
@@ -11573,7 +11573,7 @@
                         </a:rPr>
                         <a:t>Leaving the model stuck in a notebook</a:t>
                       </a:r>
-                      <a:endParaRPr lang="en-US" sz="1400" dirty="0">
+                      <a:endParaRPr lang="en-US" sz="1700" dirty="0">
                         <a:latin typeface="Open Sans" charset="0"/>
                         <a:ea typeface="Open Sans" charset="0"/>
                         <a:cs typeface="Open Sans" charset="0"/>
@@ -11630,7 +11630,7 @@
                         <a:buNone/>
                       </a:pPr>
                       <a:r>
-                        <a:rPr lang="en-US" sz="1400" b="1" dirty="0">
+                        <a:rPr lang="en-US" sz="1700" b="1" dirty="0">
                           <a:solidFill>
                             <a:srgbClr val="2C5697"/>
                           </a:solidFill>
@@ -11640,7 +11640,7 @@
                         </a:rPr>
                         <a:t>7. Monitor</a:t>
                       </a:r>
-                      <a:endParaRPr lang="en-US" sz="1400" dirty="0">
+                      <a:endParaRPr lang="en-US" sz="1700" dirty="0">
                         <a:latin typeface="Open Sans" charset="0"/>
                         <a:ea typeface="Open Sans" charset="0"/>
                         <a:cs typeface="Open Sans" charset="0"/>
@@ -11695,7 +11695,7 @@
                         <a:buNone/>
                       </a:pPr>
                       <a:r>
-                        <a:rPr lang="en-US" sz="1400" dirty="0">
+                        <a:rPr lang="en-US" sz="1700" dirty="0">
                           <a:solidFill>
                             <a:srgbClr val="333D4D"/>
                           </a:solidFill>
@@ -11705,7 +11705,7 @@
                         </a:rPr>
                         <a:t>Track performance over time</a:t>
                       </a:r>
-                      <a:endParaRPr lang="en-US" sz="1400" dirty="0">
+                      <a:endParaRPr lang="en-US" sz="1700" dirty="0">
                         <a:latin typeface="Open Sans" charset="0"/>
                         <a:ea typeface="Open Sans" charset="0"/>
                         <a:cs typeface="Open Sans" charset="0"/>
@@ -11760,7 +11760,7 @@
                         <a:buNone/>
                       </a:pPr>
                       <a:r>
-                        <a:rPr lang="en-US" sz="1400" i="1" dirty="0">
+                        <a:rPr lang="en-US" sz="1700" i="1" dirty="0">
                           <a:solidFill>
                             <a:srgbClr val="C8102E"/>
                           </a:solidFill>
@@ -11770,7 +11770,7 @@
                         </a:rPr>
                         <a:t>Assuming ‘trained once = good forever’</a:t>
                       </a:r>
-                      <a:endParaRPr lang="en-US" sz="1400" dirty="0">
+                      <a:endParaRPr lang="en-US" sz="1700" dirty="0">
                         <a:latin typeface="Open Sans" charset="0"/>
                         <a:ea typeface="Open Sans" charset="0"/>
                         <a:cs typeface="Open Sans" charset="0"/>
@@ -11903,7 +11903,7 @@
               <a:buNone/>
             </a:pPr>
             <a:r>
-              <a:rPr lang="en-US" sz="1600" b="1" dirty="0">
+              <a:rPr lang="en-US" sz="1700" b="1" dirty="0">
                 <a:solidFill>
                   <a:srgbClr val="FFFFFF"/>
                 </a:solidFill>
@@ -11913,7 +11913,7 @@
               </a:rPr>
               <a:t>Step 1 Is Where Projects Live or Die</a:t>
             </a:r>
-            <a:endParaRPr lang="en-US" sz="1600" dirty="0"/>
+            <a:endParaRPr lang="en-US" sz="1700" dirty="0"/>
           </a:p>
         </p:txBody>
       </p:sp>
@@ -12115,7 +12115,7 @@
               <a:buNone/>
             </a:pPr>
             <a:r>
-              <a:rPr lang="en-US" sz="1400" b="1" spc="300" kern="0" dirty="0">
+              <a:rPr lang="en-US" sz="1700" b="1" spc="300" kern="0" dirty="0">
                 <a:solidFill>
                   <a:srgbClr val="5F6B7A"/>
                 </a:solidFill>
@@ -12125,7 +12125,7 @@
               </a:rPr>
               <a:t>The four questions every project must answer BEFORE touching data:</a:t>
             </a:r>
-            <a:endParaRPr lang="en-US" sz="1400" dirty="0"/>
+            <a:endParaRPr lang="en-US" sz="1700" dirty="0"/>
           </a:p>
         </p:txBody>
       </p:sp>
@@ -12979,7 +12979,7 @@
               <a:buNone/>
             </a:pPr>
             <a:r>
-              <a:rPr lang="en-US" sz="1600" b="1" dirty="0">
+              <a:rPr lang="en-US" sz="1700" b="1" dirty="0">
                 <a:solidFill>
                   <a:srgbClr val="FFFFFF"/>
                 </a:solidFill>
@@ -12989,7 +12989,7 @@
               </a:rPr>
               <a:t>Where Does Machine Learning Fit?</a:t>
             </a:r>
-            <a:endParaRPr lang="en-US" sz="1600" dirty="0"/>
+            <a:endParaRPr lang="en-US" sz="1700" dirty="0"/>
           </a:p>
         </p:txBody>
       </p:sp>
@@ -13290,7 +13290,7 @@
               <a:buNone/>
             </a:pPr>
             <a:r>
-              <a:rPr lang="en-US" sz="1500" dirty="0">
+              <a:rPr lang="en-US" sz="1700" dirty="0">
                 <a:solidFill>
                   <a:srgbClr val="333D4D"/>
                 </a:solidFill>
@@ -13300,7 +13300,7 @@
               </a:rPr>
               <a:t>Describe what happened.</a:t>
             </a:r>
-            <a:endParaRPr lang="en-US" sz="1500" dirty="0"/>
+            <a:endParaRPr lang="en-US" sz="1700" dirty="0"/>
           </a:p>
         </p:txBody>
       </p:sp>
@@ -13418,7 +13418,7 @@
               <a:buNone/>
             </a:pPr>
             <a:r>
-              <a:rPr lang="en-US" sz="1400" i="1" dirty="0">
+              <a:rPr lang="en-US" sz="1700" i="1" dirty="0">
                 <a:solidFill>
                   <a:srgbClr val="333D4D"/>
                 </a:solidFill>
@@ -13428,7 +13428,7 @@
               </a:rPr>
               <a:t>“Reviews dropped 12% last month.”</a:t>
             </a:r>
-            <a:endParaRPr lang="en-US" sz="1400" dirty="0"/>
+            <a:endParaRPr lang="en-US" sz="1700" dirty="0"/>
           </a:p>
         </p:txBody>
       </p:sp>
@@ -13585,7 +13585,7 @@
               <a:buNone/>
             </a:pPr>
             <a:r>
-              <a:rPr lang="en-US" sz="1500" dirty="0">
+              <a:rPr lang="en-US" sz="1700" dirty="0">
                 <a:solidFill>
                   <a:srgbClr val="333D4D"/>
                 </a:solidFill>
@@ -13595,7 +13595,7 @@
               </a:rPr>
               <a:t>Build the pipes between systems.</a:t>
             </a:r>
-            <a:endParaRPr lang="en-US" sz="1500" dirty="0"/>
+            <a:endParaRPr lang="en-US" sz="1700" dirty="0"/>
           </a:p>
         </p:txBody>
       </p:sp>
@@ -13713,7 +13713,7 @@
               <a:buNone/>
             </a:pPr>
             <a:r>
-              <a:rPr lang="en-US" sz="1400" i="1" dirty="0">
+              <a:rPr lang="en-US" sz="1700" i="1" dirty="0">
                 <a:solidFill>
                   <a:srgbClr val="333D4D"/>
                 </a:solidFill>
@@ -13723,7 +13723,7 @@
               </a:rPr>
               <a:t>“Reviews land in the warehouse every night.”</a:t>
             </a:r>
-            <a:endParaRPr lang="en-US" sz="1400" dirty="0"/>
+            <a:endParaRPr lang="en-US" sz="1700" dirty="0"/>
           </a:p>
         </p:txBody>
       </p:sp>
@@ -13944,7 +13944,7 @@
               <a:buNone/>
             </a:pPr>
             <a:r>
-              <a:rPr lang="en-US" sz="1500" dirty="0">
+              <a:rPr lang="en-US" sz="1700" dirty="0">
                 <a:solidFill>
                   <a:srgbClr val="333D4D"/>
                 </a:solidFill>
@@ -13954,7 +13954,7 @@
               </a:rPr>
               <a:t>Label or forecast things no human has seen yet.</a:t>
             </a:r>
-            <a:endParaRPr lang="en-US" sz="1500" dirty="0"/>
+            <a:endParaRPr lang="en-US" sz="1700" dirty="0"/>
           </a:p>
         </p:txBody>
       </p:sp>
@@ -14072,7 +14072,7 @@
               <a:buNone/>
             </a:pPr>
             <a:r>
-              <a:rPr lang="en-US" sz="1400" i="1" dirty="0">
+              <a:rPr lang="en-US" sz="1700" i="1" dirty="0">
                 <a:solidFill>
                   <a:srgbClr val="333D4D"/>
                 </a:solidFill>
@@ -14082,7 +14082,7 @@
               </a:rPr>
               <a:t>“Label 10,000 reviews — positive or negative.”</a:t>
             </a:r>
-            <a:endParaRPr lang="en-US" sz="1400" dirty="0"/>
+            <a:endParaRPr lang="en-US" sz="1700" dirty="0"/>
           </a:p>
         </p:txBody>
       </p:sp>
@@ -14419,7 +14419,7 @@
               <a:buNone/>
             </a:pPr>
             <a:r>
-              <a:rPr lang="en-US" sz="1400" b="1" dirty="0">
+              <a:rPr lang="en-US" sz="1700" b="1" dirty="0">
                 <a:solidFill>
                   <a:srgbClr val="FFFFFF"/>
                 </a:solidFill>
@@ -14429,7 +14429,7 @@
               </a:rPr>
               <a:t>1</a:t>
             </a:r>
-            <a:endParaRPr lang="en-US" sz="1400" dirty="0"/>
+            <a:endParaRPr lang="en-US" sz="1700" dirty="0"/>
           </a:p>
         </p:txBody>
       </p:sp>
@@ -14524,7 +14524,7 @@
               <a:buNone/>
             </a:pPr>
             <a:r>
-              <a:rPr lang="en-US" sz="1400" b="1" dirty="0">
+              <a:rPr lang="en-US" sz="1700" b="1" dirty="0">
                 <a:solidFill>
                   <a:srgbClr val="FFFFFF"/>
                 </a:solidFill>
@@ -14534,7 +14534,7 @@
               </a:rPr>
               <a:t>2</a:t>
             </a:r>
-            <a:endParaRPr lang="en-US" sz="1400" dirty="0"/>
+            <a:endParaRPr lang="en-US" sz="1700" dirty="0"/>
           </a:p>
         </p:txBody>
       </p:sp>
@@ -14629,7 +14629,7 @@
               <a:buNone/>
             </a:pPr>
             <a:r>
-              <a:rPr lang="en-US" sz="1400" b="1" dirty="0">
+              <a:rPr lang="en-US" sz="1700" b="1" dirty="0">
                 <a:solidFill>
                   <a:srgbClr val="FFFFFF"/>
                 </a:solidFill>
@@ -14639,7 +14639,7 @@
               </a:rPr>
               <a:t>3</a:t>
             </a:r>
-            <a:endParaRPr lang="en-US" sz="1400" dirty="0"/>
+            <a:endParaRPr lang="en-US" sz="1700" dirty="0"/>
           </a:p>
         </p:txBody>
       </p:sp>
@@ -14787,7 +14787,7 @@
               <a:buNone/>
             </a:pPr>
             <a:r>
-              <a:rPr lang="en-US" sz="1400" dirty="0">
+              <a:rPr lang="en-US" sz="1700" dirty="0">
                 <a:solidFill>
                   <a:srgbClr val="FFFFFF">
                     <a:alpha val="70000"/>
@@ -14965,7 +14965,7 @@
               <a:buNone/>
             </a:pPr>
             <a:r>
-              <a:rPr lang="en-US" sz="1600" i="1" dirty="0">
+              <a:rPr lang="en-US" sz="1700" i="1" dirty="0">
                 <a:solidFill>
                   <a:srgbClr val="FFFFFF">
                     <a:alpha val="75000"/>
@@ -14977,7 +14977,7 @@
               </a:rPr>
               <a:t>Priya, after seeing Sarah's numbers…</a:t>
             </a:r>
-            <a:endParaRPr lang="en-US" sz="1600" dirty="0"/>
+            <a:endParaRPr lang="en-US" sz="1700" dirty="0"/>
           </a:p>
         </p:txBody>
       </p:sp>
@@ -15245,7 +15245,7 @@
               <a:buNone/>
             </a:pPr>
             <a:r>
-              <a:rPr lang="en-US" sz="1400" i="1" dirty="0">
+              <a:rPr lang="en-US" sz="1700" i="1" dirty="0">
                 <a:solidFill>
                   <a:srgbClr val="FFFFFF">
                     <a:alpha val="70000"/>
@@ -15257,7 +15257,7 @@
               </a:rPr>
               <a:t>Come to L02 ready to help Sarah answer the question.</a:t>
             </a:r>
-            <a:endParaRPr lang="en-US" sz="1400" dirty="0"/>
+            <a:endParaRPr lang="en-US" sz="1700" dirty="0"/>
           </a:p>
         </p:txBody>
       </p:sp>
@@ -15343,7 +15343,7 @@
               <a:buNone/>
             </a:pPr>
             <a:r>
-              <a:rPr lang="en-US" sz="1600" b="1" dirty="0">
+              <a:rPr lang="en-US" sz="1700" b="1" dirty="0">
                 <a:solidFill>
                   <a:srgbClr val="FFFFFF"/>
                 </a:solidFill>
@@ -15353,7 +15353,7 @@
               </a:rPr>
               <a:t>Assignment Preview &amp; Q&amp;A</a:t>
             </a:r>
-            <a:endParaRPr lang="en-US" sz="1600" dirty="0"/>
+            <a:endParaRPr lang="en-US" sz="1700" dirty="0"/>
           </a:p>
         </p:txBody>
       </p:sp>
@@ -15615,7 +15615,7 @@
               <a:buNone/>
             </a:pPr>
             <a:r>
-              <a:rPr lang="en-US" sz="1500" b="1" dirty="0">
+              <a:rPr lang="en-US" sz="1700" b="1" dirty="0">
                 <a:solidFill>
                   <a:srgbClr val="1B2A4A"/>
                 </a:solidFill>
@@ -15625,7 +15625,7 @@
               </a:rPr>
               <a:t>Open: notebooks/assignment.ipynb</a:t>
             </a:r>
-            <a:endParaRPr lang="en-US" sz="1500" dirty="0"/>
+            <a:endParaRPr lang="en-US" sz="1700" dirty="0"/>
           </a:p>
         </p:txBody>
       </p:sp>
@@ -15657,7 +15657,7 @@
               <a:buNone/>
             </a:pPr>
             <a:r>
-              <a:rPr lang="en-US" sz="1500" dirty="0">
+              <a:rPr lang="en-US" sz="1700" dirty="0">
                 <a:solidFill>
                   <a:srgbClr val="333D4D"/>
                 </a:solidFill>
@@ -15674,7 +15674,7 @@
               <a:buNone/>
             </a:pPr>
             <a:r>
-              <a:rPr lang="en-US" sz="1500" b="1" dirty="0">
+              <a:rPr lang="en-US" sz="1700" b="1" dirty="0">
                 <a:solidFill>
                   <a:srgbClr val="1B2A4A"/>
                 </a:solidFill>
@@ -15692,7 +15692,7 @@
               <a:buNone/>
             </a:pPr>
             <a:r>
-              <a:rPr lang="en-US" sz="1500" dirty="0">
+              <a:rPr lang="en-US" sz="1700" dirty="0">
                 <a:solidFill>
                   <a:srgbClr val="333D4D"/>
                 </a:solidFill>
@@ -15710,7 +15710,7 @@
               <a:buNone/>
             </a:pPr>
             <a:r>
-              <a:rPr lang="en-US" sz="1500" dirty="0">
+              <a:rPr lang="en-US" sz="1700" dirty="0">
                 <a:solidFill>
                   <a:srgbClr val="333D4D"/>
                 </a:solidFill>
@@ -15728,7 +15728,7 @@
               <a:buNone/>
             </a:pPr>
             <a:r>
-              <a:rPr lang="en-US" sz="1500" dirty="0">
+              <a:rPr lang="en-US" sz="1700" dirty="0">
                 <a:solidFill>
                   <a:srgbClr val="333D4D"/>
                 </a:solidFill>
@@ -15745,7 +15745,7 @@
               <a:buNone/>
             </a:pPr>
             <a:r>
-              <a:rPr lang="en-US" sz="1500" b="1" dirty="0">
+              <a:rPr lang="en-US" sz="1700" b="1" dirty="0">
                 <a:solidFill>
                   <a:srgbClr val="1B2A4A"/>
                 </a:solidFill>
@@ -15763,7 +15763,7 @@
               <a:buNone/>
             </a:pPr>
             <a:r>
-              <a:rPr lang="en-US" sz="1500" dirty="0">
+              <a:rPr lang="en-US" sz="1700" dirty="0">
                 <a:solidFill>
                   <a:srgbClr val="333D4D"/>
                 </a:solidFill>
@@ -15773,7 +15773,7 @@
               </a:rPr>
               <a:t>•  Sample solutions at the bottom.</a:t>
             </a:r>
-            <a:endParaRPr lang="en-US" sz="1500" dirty="0"/>
+            <a:endParaRPr lang="en-US" sz="1700" dirty="0"/>
           </a:p>
         </p:txBody>
       </p:sp>
@@ -15930,7 +15930,7 @@
               <a:buNone/>
             </a:pPr>
             <a:r>
-              <a:rPr lang="en-US" sz="1500" b="1" dirty="0">
+              <a:rPr lang="en-US" sz="1700" b="1" dirty="0">
                 <a:solidFill>
                   <a:srgbClr val="1B2A4A"/>
                 </a:solidFill>
@@ -15940,7 +15940,7 @@
               </a:rPr>
               <a:t>Common questions:</a:t>
             </a:r>
-            <a:endParaRPr lang="en-US" sz="1500" dirty="0"/>
+            <a:endParaRPr lang="en-US" sz="1700" dirty="0"/>
           </a:p>
         </p:txBody>
       </p:sp>
@@ -15972,7 +15972,7 @@
               <a:buNone/>
             </a:pPr>
             <a:r>
-              <a:rPr lang="en-US" sz="1500" dirty="0">
+              <a:rPr lang="en-US" sz="1700" dirty="0">
                 <a:solidFill>
                   <a:srgbClr val="333D4D"/>
                 </a:solidFill>
@@ -15982,7 +15982,7 @@
               </a:rPr>
               <a:t>•  Why use a pre-trained model vs train your own?</a:t>
             </a:r>
-            <a:endParaRPr lang="en-US" sz="1500" dirty="0"/>
+            <a:endParaRPr lang="en-US" sz="1700" dirty="0"/>
           </a:p>
           <a:p>
             <a:pPr indent="0" marL="0">
@@ -15992,7 +15992,7 @@
               <a:buNone/>
             </a:pPr>
             <a:r>
-              <a:rPr lang="en-US" sz="1500" dirty="0">
+              <a:rPr lang="en-US" sz="1700" dirty="0">
                 <a:solidFill>
                   <a:srgbClr val="333D4D"/>
                 </a:solidFill>
@@ -16002,7 +16002,7 @@
               </a:rPr>
               <a:t>•  When should I trust the confidence score?</a:t>
             </a:r>
-            <a:endParaRPr lang="en-US" sz="1500" dirty="0"/>
+            <a:endParaRPr lang="en-US" sz="1700" dirty="0"/>
           </a:p>
           <a:p>
             <a:pPr indent="0" marL="0">
@@ -16012,7 +16012,7 @@
               <a:buNone/>
             </a:pPr>
             <a:r>
-              <a:rPr lang="en-US" sz="1500" dirty="0">
+              <a:rPr lang="en-US" sz="1700" dirty="0">
                 <a:solidFill>
                   <a:srgbClr val="333D4D"/>
                 </a:solidFill>
@@ -16022,7 +16022,7 @@
               </a:rPr>
               <a:t>•  What if my problem doesn't fit any of the three categories?</a:t>
             </a:r>
-            <a:endParaRPr lang="en-US" sz="1500" dirty="0"/>
+            <a:endParaRPr lang="en-US" sz="1700" dirty="0"/>
           </a:p>
           <a:p>
             <a:pPr indent="0" marL="0">
@@ -16032,7 +16032,7 @@
               <a:buNone/>
             </a:pPr>
             <a:r>
-              <a:rPr lang="en-US" sz="1500" dirty="0">
+              <a:rPr lang="en-US" sz="1700" dirty="0">
                 <a:solidFill>
                   <a:srgbClr val="333D4D"/>
                 </a:solidFill>
@@ -16042,7 +16042,7 @@
               </a:rPr>
               <a:t>•  Will we train neural networks in this course?</a:t>
             </a:r>
-            <a:endParaRPr lang="en-US" sz="1500" dirty="0"/>
+            <a:endParaRPr lang="en-US" sz="1700" dirty="0"/>
           </a:p>
         </p:txBody>
       </p:sp>
@@ -16167,7 +16167,7 @@
               <a:buNone/>
             </a:pPr>
             <a:r>
-              <a:rPr lang="en-US" sz="1600" b="1" dirty="0">
+              <a:rPr lang="en-US" sz="1700" b="1" dirty="0">
                 <a:solidFill>
                   <a:srgbClr val="FFFFFF"/>
                 </a:solidFill>
@@ -16177,7 +16177,7 @@
               </a:rPr>
               <a:t>The Shift in M3</a:t>
             </a:r>
-            <a:endParaRPr lang="en-US" sz="1600" dirty="0"/>
+            <a:endParaRPr lang="en-US" sz="1700" dirty="0"/>
           </a:p>
         </p:txBody>
       </p:sp>
@@ -16598,7 +16598,7 @@
               <a:buNone/>
             </a:pPr>
             <a:r>
-              <a:rPr lang="en-US" sz="1500" dirty="0">
+              <a:rPr lang="en-US" sz="1700" dirty="0">
                 <a:solidFill>
                   <a:srgbClr val="333D4D"/>
                 </a:solidFill>
@@ -16608,7 +16608,7 @@
               </a:rPr>
               <a:t>✓  Python · SQL · pandas · matplotlib · descriptive statistics</a:t>
             </a:r>
-            <a:endParaRPr lang="en-US" sz="1500" dirty="0"/>
+            <a:endParaRPr lang="en-US" sz="1700" dirty="0"/>
           </a:p>
           <a:p>
             <a:pPr indent="0" marL="0">
@@ -16618,7 +16618,7 @@
               <a:buNone/>
             </a:pPr>
             <a:r>
-              <a:rPr lang="en-US" sz="1500" dirty="0">
+              <a:rPr lang="en-US" sz="1700" dirty="0">
                 <a:solidFill>
                   <a:srgbClr val="333D4D"/>
                 </a:solidFill>
@@ -16628,7 +16628,7 @@
               </a:rPr>
               <a:t>✓  Reading data, joining tables, cleaning columns</a:t>
             </a:r>
-            <a:endParaRPr lang="en-US" sz="1500" dirty="0"/>
+            <a:endParaRPr lang="en-US" sz="1700" dirty="0"/>
           </a:p>
           <a:p>
             <a:pPr indent="0" marL="0">
@@ -16638,7 +16638,7 @@
               <a:buNone/>
             </a:pPr>
             <a:r>
-              <a:rPr lang="en-US" sz="1500" dirty="0">
+              <a:rPr lang="en-US" sz="1700" dirty="0">
                 <a:solidFill>
                   <a:srgbClr val="333D4D"/>
                 </a:solidFill>
@@ -16648,7 +16648,7 @@
               </a:rPr>
               <a:t>✓  Producing charts and dashboards that summarise the past</a:t>
             </a:r>
-            <a:endParaRPr lang="en-US" sz="1500" dirty="0"/>
+            <a:endParaRPr lang="en-US" sz="1700" dirty="0"/>
           </a:p>
         </p:txBody>
       </p:sp>
@@ -16766,7 +16766,7 @@
               <a:buNone/>
             </a:pPr>
             <a:r>
-              <a:rPr lang="en-US" sz="1500" b="1" dirty="0">
+              <a:rPr lang="en-US" sz="1700" b="1" dirty="0">
                 <a:solidFill>
                   <a:srgbClr val="C8102E"/>
                 </a:solidFill>
@@ -16780,7 +16780,7 @@
               <a:buNone/>
             </a:pPr>
             <a:r>
-              <a:rPr lang="en-US" sz="1500" dirty="0">
+              <a:rPr lang="en-US" sz="1700" dirty="0">
                 <a:solidFill>
                   <a:srgbClr val="333D4D"/>
                 </a:solidFill>
@@ -16795,7 +16795,7 @@
               <a:buNone/>
             </a:pPr>
             <a:r>
-              <a:rPr lang="en-US" sz="1500" b="1" dirty="0">
+              <a:rPr lang="en-US" sz="1700" b="1" dirty="0">
                 <a:solidFill>
                   <a:srgbClr val="C8102E"/>
                 </a:solidFill>
@@ -16809,7 +16809,7 @@
               <a:buNone/>
             </a:pPr>
             <a:r>
-              <a:rPr lang="en-US" sz="1500" dirty="0">
+              <a:rPr lang="en-US" sz="1700" dirty="0">
                 <a:solidFill>
                   <a:srgbClr val="333D4D"/>
                 </a:solidFill>
@@ -16819,7 +16819,7 @@
               </a:rPr>
               <a:t>A new vocabulary: training · inference · features · labels · supervised vs unsupervised.</a:t>
             </a:r>
-            <a:endParaRPr lang="en-US" sz="1500" dirty="0"/>
+            <a:endParaRPr lang="en-US" sz="1700" dirty="0"/>
           </a:p>
         </p:txBody>
       </p:sp>
@@ -16905,7 +16905,7 @@
               <a:buNone/>
             </a:pPr>
             <a:r>
-              <a:rPr lang="en-US" sz="1600" b="1" dirty="0">
+              <a:rPr lang="en-US" sz="1700" b="1" dirty="0">
                 <a:solidFill>
                   <a:srgbClr val="FFFFFF"/>
                 </a:solidFill>
@@ -16915,7 +16915,7 @@
               </a:rPr>
               <a:t>Meet Sarah Chen</a:t>
             </a:r>
-            <a:endParaRPr lang="en-US" sz="1600" dirty="0"/>
+            <a:endParaRPr lang="en-US" sz="1700" dirty="0"/>
           </a:p>
         </p:txBody>
       </p:sp>
@@ -17088,7 +17088,7 @@
               <a:buNone/>
             </a:pPr>
             <a:r>
-              <a:rPr lang="en-US" sz="1600" i="1" dirty="0">
+              <a:rPr lang="en-US" sz="1700" i="1" dirty="0">
                 <a:solidFill>
                   <a:srgbClr val="5F6B7A"/>
                 </a:solidFill>
@@ -17098,7 +17098,7 @@
               </a:rPr>
               <a:t>Customer Experience Analyst, NorthStar Retail — our protagonist for all of M3.</a:t>
             </a:r>
-            <a:endParaRPr lang="en-US" sz="1600" dirty="0"/>
+            <a:endParaRPr lang="en-US" sz="1700" dirty="0"/>
           </a:p>
         </p:txBody>
       </p:sp>
@@ -17280,7 +17280,7 @@
               <a:buNone/>
             </a:pPr>
             <a:r>
-              <a:rPr lang="en-US" sz="1400" dirty="0">
+              <a:rPr lang="en-US" sz="1700" dirty="0">
                 <a:solidFill>
                   <a:srgbClr val="333D4D"/>
                 </a:solidFill>
@@ -17290,7 +17290,7 @@
               </a:rPr>
               <a:t>Customer Experience Analyst</a:t>
             </a:r>
-            <a:endParaRPr lang="en-US" sz="1400" dirty="0"/>
+            <a:endParaRPr lang="en-US" sz="1700" dirty="0"/>
           </a:p>
         </p:txBody>
       </p:sp>
@@ -17712,7 +17712,7 @@
               <a:buNone/>
             </a:pPr>
             <a:r>
-              <a:rPr lang="en-US" sz="1600" b="1" dirty="0">
+              <a:rPr lang="en-US" sz="1700" b="1" dirty="0">
                 <a:solidFill>
                   <a:srgbClr val="FFFFFF"/>
                 </a:solidFill>
@@ -17722,7 +17722,7 @@
               </a:rPr>
               <a:t>The Scale Problem</a:t>
             </a:r>
-            <a:endParaRPr lang="en-US" sz="1600" dirty="0"/>
+            <a:endParaRPr lang="en-US" sz="1700" dirty="0"/>
           </a:p>
         </p:txBody>
       </p:sp>
@@ -18663,7 +18663,7 @@
               <a:buNone/>
             </a:pPr>
             <a:r>
-              <a:rPr lang="en-US" sz="1600" b="1" dirty="0">
+              <a:rPr lang="en-US" sz="1700" b="1" dirty="0">
                 <a:solidFill>
                   <a:srgbClr val="FFFFFF"/>
                 </a:solidFill>
@@ -18673,7 +18673,7 @@
               </a:rPr>
               <a:t>Approach 1: Rule-Based Programming</a:t>
             </a:r>
-            <a:endParaRPr lang="en-US" sz="1600" dirty="0"/>
+            <a:endParaRPr lang="en-US" sz="1700" dirty="0"/>
           </a:p>
         </p:txBody>
       </p:sp>
@@ -18960,7 +18960,7 @@
               <a:buNone/>
             </a:pPr>
             <a:r>
-              <a:rPr lang="en-US" sz="1400" b="1" dirty="0">
+              <a:rPr lang="en-US" sz="1700" b="1" dirty="0">
                 <a:solidFill>
                   <a:srgbClr val="FFFFFF"/>
                 </a:solidFill>
@@ -18970,7 +18970,7 @@
               </a:rPr>
               <a:t>1</a:t>
             </a:r>
-            <a:endParaRPr lang="en-US" sz="1400" dirty="0"/>
+            <a:endParaRPr lang="en-US" sz="1700" dirty="0"/>
           </a:p>
         </p:txBody>
       </p:sp>
@@ -18999,7 +18999,7 @@
               <a:buNone/>
             </a:pPr>
             <a:r>
-              <a:rPr lang="en-US" sz="1500" dirty="0">
+              <a:rPr lang="en-US" sz="1700" dirty="0">
                 <a:solidFill>
                   <a:srgbClr val="333D4D"/>
                 </a:solidFill>
@@ -19009,7 +19009,7 @@
               </a:rPr>
               <a:t>List positive words:  love, perfect, great, nice…</a:t>
             </a:r>
-            <a:endParaRPr lang="en-US" sz="1500" dirty="0"/>
+            <a:endParaRPr lang="en-US" sz="1700" dirty="0"/>
           </a:p>
         </p:txBody>
       </p:sp>
@@ -19063,7 +19063,7 @@
               <a:buNone/>
             </a:pPr>
             <a:r>
-              <a:rPr lang="en-US" sz="1400" b="1" dirty="0">
+              <a:rPr lang="en-US" sz="1700" b="1" dirty="0">
                 <a:solidFill>
                   <a:srgbClr val="FFFFFF"/>
                 </a:solidFill>
@@ -19073,7 +19073,7 @@
               </a:rPr>
               <a:t>2</a:t>
             </a:r>
-            <a:endParaRPr lang="en-US" sz="1400" dirty="0"/>
+            <a:endParaRPr lang="en-US" sz="1700" dirty="0"/>
           </a:p>
         </p:txBody>
       </p:sp>
@@ -19102,7 +19102,7 @@
               <a:buNone/>
             </a:pPr>
             <a:r>
-              <a:rPr lang="en-US" sz="1500" dirty="0">
+              <a:rPr lang="en-US" sz="1700" dirty="0">
                 <a:solidFill>
                   <a:srgbClr val="333D4D"/>
                 </a:solidFill>
@@ -19112,7 +19112,7 @@
               </a:rPr>
               <a:t>List negative words:  terrible, cheap, bad, awful…</a:t>
             </a:r>
-            <a:endParaRPr lang="en-US" sz="1500" dirty="0"/>
+            <a:endParaRPr lang="en-US" sz="1700" dirty="0"/>
           </a:p>
         </p:txBody>
       </p:sp>
@@ -19166,7 +19166,7 @@
               <a:buNone/>
             </a:pPr>
             <a:r>
-              <a:rPr lang="en-US" sz="1400" b="1" dirty="0">
+              <a:rPr lang="en-US" sz="1700" b="1" dirty="0">
                 <a:solidFill>
                   <a:srgbClr val="FFFFFF"/>
                 </a:solidFill>
@@ -19176,7 +19176,7 @@
               </a:rPr>
               <a:t>3</a:t>
             </a:r>
-            <a:endParaRPr lang="en-US" sz="1400" dirty="0"/>
+            <a:endParaRPr lang="en-US" sz="1700" dirty="0"/>
           </a:p>
         </p:txBody>
       </p:sp>
@@ -19205,7 +19205,7 @@
               <a:buNone/>
             </a:pPr>
             <a:r>
-              <a:rPr lang="en-US" sz="1500" dirty="0">
+              <a:rPr lang="en-US" sz="1700" dirty="0">
                 <a:solidFill>
                   <a:srgbClr val="333D4D"/>
                 </a:solidFill>
@@ -19215,7 +19215,7 @@
               </a:rPr>
               <a:t>For each review, count hits on each list.</a:t>
             </a:r>
-            <a:endParaRPr lang="en-US" sz="1500" dirty="0"/>
+            <a:endParaRPr lang="en-US" sz="1700" dirty="0"/>
           </a:p>
         </p:txBody>
       </p:sp>
@@ -19269,7 +19269,7 @@
               <a:buNone/>
             </a:pPr>
             <a:r>
-              <a:rPr lang="en-US" sz="1400" b="1" dirty="0">
+              <a:rPr lang="en-US" sz="1700" b="1" dirty="0">
                 <a:solidFill>
                   <a:srgbClr val="FFFFFF"/>
                 </a:solidFill>
@@ -19279,7 +19279,7 @@
               </a:rPr>
               <a:t>4</a:t>
             </a:r>
-            <a:endParaRPr lang="en-US" sz="1400" dirty="0"/>
+            <a:endParaRPr lang="en-US" sz="1700" dirty="0"/>
           </a:p>
         </p:txBody>
       </p:sp>
@@ -19308,7 +19308,7 @@
               <a:buNone/>
             </a:pPr>
             <a:r>
-              <a:rPr lang="en-US" sz="1500" dirty="0">
+              <a:rPr lang="en-US" sz="1700" dirty="0">
                 <a:solidFill>
                   <a:srgbClr val="333D4D"/>
                 </a:solidFill>
@@ -19318,7 +19318,7 @@
               </a:rPr>
               <a:t>Whichever count is bigger wins.</a:t>
             </a:r>
-            <a:endParaRPr lang="en-US" sz="1500" dirty="0"/>
+            <a:endParaRPr lang="en-US" sz="1700" dirty="0"/>
           </a:p>
         </p:txBody>
       </p:sp>
@@ -19475,7 +19475,7 @@
               <a:buNone/>
             </a:pPr>
             <a:r>
-              <a:rPr lang="en-US" sz="1500" dirty="0">
+              <a:rPr lang="en-US" sz="1700" dirty="0">
                 <a:solidFill>
                   <a:srgbClr val="333D4D"/>
                 </a:solidFill>
@@ -19485,7 +19485,7 @@
               </a:rPr>
               <a:t>You write the rules</a:t>
             </a:r>
-            <a:endParaRPr lang="en-US" sz="1500" dirty="0"/>
+            <a:endParaRPr lang="en-US" sz="1700" dirty="0"/>
           </a:p>
         </p:txBody>
       </p:sp>
@@ -19553,7 +19553,7 @@
               <a:buNone/>
             </a:pPr>
             <a:r>
-              <a:rPr lang="en-US" sz="1500" dirty="0">
+              <a:rPr lang="en-US" sz="1700" dirty="0">
                 <a:solidFill>
                   <a:srgbClr val="333D4D"/>
                 </a:solidFill>
@@ -19563,7 +19563,7 @@
               </a:rPr>
               <a:t>Computer follows them exactly</a:t>
             </a:r>
-            <a:endParaRPr lang="en-US" sz="1500" dirty="0"/>
+            <a:endParaRPr lang="en-US" sz="1700" dirty="0"/>
           </a:p>
         </p:txBody>
       </p:sp>
@@ -19631,7 +19631,7 @@
               <a:buNone/>
             </a:pPr>
             <a:r>
-              <a:rPr lang="en-US" sz="1500" dirty="0">
+              <a:rPr lang="en-US" sz="1700" dirty="0">
                 <a:solidFill>
                   <a:srgbClr val="333D4D"/>
                 </a:solidFill>
@@ -19641,7 +19641,7 @@
               </a:rPr>
               <a:t>Deterministic — same input, same output</a:t>
             </a:r>
-            <a:endParaRPr lang="en-US" sz="1500" dirty="0"/>
+            <a:endParaRPr lang="en-US" sz="1700" dirty="0"/>
           </a:p>
         </p:txBody>
       </p:sp>
@@ -19709,7 +19709,7 @@
               <a:buNone/>
             </a:pPr>
             <a:r>
-              <a:rPr lang="en-US" sz="1500" dirty="0">
+              <a:rPr lang="en-US" sz="1700" dirty="0">
                 <a:solidFill>
                   <a:srgbClr val="5F6B7A"/>
                 </a:solidFill>
@@ -19719,7 +19719,7 @@
               </a:rPr>
               <a:t>Only handles cases the rules covered</a:t>
             </a:r>
-            <a:endParaRPr lang="en-US" sz="1500" dirty="0"/>
+            <a:endParaRPr lang="en-US" sz="1700" dirty="0"/>
           </a:p>
         </p:txBody>
       </p:sp>
@@ -19787,7 +19787,7 @@
               <a:buNone/>
             </a:pPr>
             <a:r>
-              <a:rPr lang="en-US" sz="1500" dirty="0">
+              <a:rPr lang="en-US" sz="1700" dirty="0">
                 <a:solidFill>
                   <a:srgbClr val="5F6B7A"/>
                 </a:solidFill>
@@ -19797,7 +19797,7 @@
               </a:rPr>
               <a:t>Maintenance is whack-a-mole</a:t>
             </a:r>
-            <a:endParaRPr lang="en-US" sz="1500" dirty="0"/>
+            <a:endParaRPr lang="en-US" sz="1700" dirty="0"/>
           </a:p>
         </p:txBody>
       </p:sp>
@@ -19865,7 +19865,7 @@
               <a:buNone/>
             </a:pPr>
             <a:r>
-              <a:rPr lang="en-US" sz="1500" dirty="0">
+              <a:rPr lang="en-US" sz="1700" dirty="0">
                 <a:solidFill>
                   <a:srgbClr val="5F6B7A"/>
                 </a:solidFill>
@@ -19875,7 +19875,7 @@
               </a:rPr>
               <a:t>No notion of ‘confidence’</a:t>
             </a:r>
-            <a:endParaRPr lang="en-US" sz="1500" dirty="0"/>
+            <a:endParaRPr lang="en-US" sz="1700" dirty="0"/>
           </a:p>
         </p:txBody>
       </p:sp>
@@ -19961,7 +19961,7 @@
               <a:buNone/>
             </a:pPr>
             <a:r>
-              <a:rPr lang="en-US" sz="1600" b="1" dirty="0">
+              <a:rPr lang="en-US" sz="1700" b="1" dirty="0">
                 <a:solidFill>
                   <a:srgbClr val="FFFFFF"/>
                 </a:solidFill>
@@ -19971,7 +19971,7 @@
               </a:rPr>
               <a:t>Rule-Based Code</a:t>
             </a:r>
-            <a:endParaRPr lang="en-US" sz="1600" dirty="0"/>
+            <a:endParaRPr lang="en-US" sz="1700" dirty="0"/>
           </a:p>
         </p:txBody>
       </p:sp>
@@ -20127,8 +20127,8 @@
         </p:nvSpPr>
         <p:spPr>
           <a:xfrm>
-            <a:off x="548640" y="2011680"/>
-            <a:ext cx="11091672" cy="3474720"/>
+            <a:off x="548640" y="1874520"/>
+            <a:ext cx="11091672" cy="4297680"/>
           </a:xfrm>
           <a:prstGeom prst="rect">
             <a:avLst/>
@@ -20152,8 +20152,8 @@
         </p:nvSpPr>
         <p:spPr>
           <a:xfrm>
-            <a:off x="548640" y="2011680"/>
-            <a:ext cx="54864" cy="3474720"/>
+            <a:off x="548640" y="1874520"/>
+            <a:ext cx="54864" cy="4297680"/>
           </a:xfrm>
           <a:prstGeom prst="rect">
             <a:avLst/>
@@ -20177,7 +20177,7 @@
         </p:nvSpPr>
         <p:spPr>
           <a:xfrm>
-            <a:off x="10543032" y="2148840"/>
+            <a:off x="10543032" y="2011680"/>
             <a:ext cx="914400" cy="274320"/>
           </a:xfrm>
           <a:prstGeom prst="rect">
@@ -20216,8 +20216,8 @@
         </p:nvSpPr>
         <p:spPr>
           <a:xfrm>
-            <a:off x="914400" y="2331720"/>
-            <a:ext cx="10543032" cy="3017520"/>
+            <a:off x="914400" y="2194560"/>
+            <a:ext cx="10543032" cy="3840480"/>
           </a:xfrm>
           <a:prstGeom prst="rect">
             <a:avLst/>
@@ -20233,7 +20233,7 @@
               <a:buNone/>
             </a:pPr>
             <a:r>
-              <a:rPr lang="en-US" sz="1450" dirty="0">
+              <a:rPr lang="en-US" sz="1700" dirty="0">
                 <a:solidFill>
                   <a:srgbClr val="FFFFFF"/>
                 </a:solidFill>
@@ -20243,14 +20243,14 @@
               </a:rPr>
               <a:t>positive_words = ["love", "perfect", "great", "nice", "soft"]</a:t>
             </a:r>
-            <a:endParaRPr lang="en-US" sz="1450" dirty="0"/>
-          </a:p>
-          <a:p>
-            <a:pPr indent="0" marL="0">
-              <a:buNone/>
-            </a:pPr>
-            <a:r>
-              <a:rPr lang="en-US" sz="1450" dirty="0">
+            <a:endParaRPr lang="en-US" sz="1700" dirty="0"/>
+          </a:p>
+          <a:p>
+            <a:pPr indent="0" marL="0">
+              <a:buNone/>
+            </a:pPr>
+            <a:r>
+              <a:rPr lang="en-US" sz="1700" dirty="0">
                 <a:solidFill>
                   <a:srgbClr val="FFFFFF"/>
                 </a:solidFill>
@@ -20260,20 +20260,20 @@
               </a:rPr>
               <a:t>negative_words = ["terrible", "cheap", "disappointed", "bad", "late"]</a:t>
             </a:r>
-            <a:endParaRPr lang="en-US" sz="1450" dirty="0"/>
-          </a:p>
-          <a:p>
-            <a:pPr indent="0" marL="0">
-              <a:buNone/>
-            </a:pPr>
-            <a:endParaRPr lang="en-US" sz="1450" dirty="0"/>
-          </a:p>
-          <a:p>
-            <a:pPr indent="0" marL="0">
-              <a:buNone/>
-            </a:pPr>
-            <a:r>
-              <a:rPr lang="en-US" sz="1450" dirty="0">
+            <a:endParaRPr lang="en-US" sz="1700" dirty="0"/>
+          </a:p>
+          <a:p>
+            <a:pPr indent="0" marL="0">
+              <a:buNone/>
+            </a:pPr>
+            <a:endParaRPr lang="en-US" sz="1700" dirty="0"/>
+          </a:p>
+          <a:p>
+            <a:pPr indent="0" marL="0">
+              <a:buNone/>
+            </a:pPr>
+            <a:r>
+              <a:rPr lang="en-US" sz="1700" dirty="0">
                 <a:solidFill>
                   <a:srgbClr val="FFFFFF"/>
                 </a:solidFill>
@@ -20283,14 +20283,14 @@
               </a:rPr>
               <a:t>def rule_based_sentiment(review):</a:t>
             </a:r>
-            <a:endParaRPr lang="en-US" sz="1450" dirty="0"/>
-          </a:p>
-          <a:p>
-            <a:pPr indent="0" marL="0">
-              <a:buNone/>
-            </a:pPr>
-            <a:r>
-              <a:rPr lang="en-US" sz="1450" dirty="0">
+            <a:endParaRPr lang="en-US" sz="1700" dirty="0"/>
+          </a:p>
+          <a:p>
+            <a:pPr indent="0" marL="0">
+              <a:buNone/>
+            </a:pPr>
+            <a:r>
+              <a:rPr lang="en-US" sz="1700" dirty="0">
                 <a:solidFill>
                   <a:srgbClr val="FFFFFF"/>
                 </a:solidFill>
@@ -20300,14 +20300,14 @@
               </a:rPr>
               <a:t>    text = review.lower()</a:t>
             </a:r>
-            <a:endParaRPr lang="en-US" sz="1450" dirty="0"/>
-          </a:p>
-          <a:p>
-            <a:pPr indent="0" marL="0">
-              <a:buNone/>
-            </a:pPr>
-            <a:r>
-              <a:rPr lang="en-US" sz="1450" dirty="0">
+            <a:endParaRPr lang="en-US" sz="1700" dirty="0"/>
+          </a:p>
+          <a:p>
+            <a:pPr indent="0" marL="0">
+              <a:buNone/>
+            </a:pPr>
+            <a:r>
+              <a:rPr lang="en-US" sz="1700" dirty="0">
                 <a:solidFill>
                   <a:srgbClr val="FFFFFF"/>
                 </a:solidFill>
@@ -20317,14 +20317,14 @@
               </a:rPr>
               <a:t>    pos_hits = sum(1 for w in positive_words if w in text)</a:t>
             </a:r>
-            <a:endParaRPr lang="en-US" sz="1450" dirty="0"/>
-          </a:p>
-          <a:p>
-            <a:pPr indent="0" marL="0">
-              <a:buNone/>
-            </a:pPr>
-            <a:r>
-              <a:rPr lang="en-US" sz="1450" dirty="0">
+            <a:endParaRPr lang="en-US" sz="1700" dirty="0"/>
+          </a:p>
+          <a:p>
+            <a:pPr indent="0" marL="0">
+              <a:buNone/>
+            </a:pPr>
+            <a:r>
+              <a:rPr lang="en-US" sz="1700" dirty="0">
                 <a:solidFill>
                   <a:srgbClr val="FFFFFF"/>
                 </a:solidFill>
@@ -20334,14 +20334,14 @@
               </a:rPr>
               <a:t>    neg_hits = sum(1 for w in negative_words if w in text)</a:t>
             </a:r>
-            <a:endParaRPr lang="en-US" sz="1450" dirty="0"/>
-          </a:p>
-          <a:p>
-            <a:pPr indent="0" marL="0">
-              <a:buNone/>
-            </a:pPr>
-            <a:r>
-              <a:rPr lang="en-US" sz="1450" dirty="0">
+            <a:endParaRPr lang="en-US" sz="1700" dirty="0"/>
+          </a:p>
+          <a:p>
+            <a:pPr indent="0" marL="0">
+              <a:buNone/>
+            </a:pPr>
+            <a:r>
+              <a:rPr lang="en-US" sz="1700" dirty="0">
                 <a:solidFill>
                   <a:srgbClr val="FFFFFF"/>
                 </a:solidFill>
@@ -20351,14 +20351,14 @@
               </a:rPr>
               <a:t>    if pos_hits &gt; neg_hits:   return "POSITIVE"</a:t>
             </a:r>
-            <a:endParaRPr lang="en-US" sz="1450" dirty="0"/>
-          </a:p>
-          <a:p>
-            <a:pPr indent="0" marL="0">
-              <a:buNone/>
-            </a:pPr>
-            <a:r>
-              <a:rPr lang="en-US" sz="1450" dirty="0">
+            <a:endParaRPr lang="en-US" sz="1700" dirty="0"/>
+          </a:p>
+          <a:p>
+            <a:pPr indent="0" marL="0">
+              <a:buNone/>
+            </a:pPr>
+            <a:r>
+              <a:rPr lang="en-US" sz="1700" dirty="0">
                 <a:solidFill>
                   <a:srgbClr val="FFFFFF"/>
                 </a:solidFill>
@@ -20368,14 +20368,14 @@
               </a:rPr>
               <a:t>    elif neg_hits &gt; pos_hits: return "NEGATIVE"</a:t>
             </a:r>
-            <a:endParaRPr lang="en-US" sz="1450" dirty="0"/>
-          </a:p>
-          <a:p>
-            <a:pPr indent="0" marL="0">
-              <a:buNone/>
-            </a:pPr>
-            <a:r>
-              <a:rPr lang="en-US" sz="1450" dirty="0">
+            <a:endParaRPr lang="en-US" sz="1700" dirty="0"/>
+          </a:p>
+          <a:p>
+            <a:pPr indent="0" marL="0">
+              <a:buNone/>
+            </a:pPr>
+            <a:r>
+              <a:rPr lang="en-US" sz="1700" dirty="0">
                 <a:solidFill>
                   <a:srgbClr val="FFFFFF"/>
                 </a:solidFill>
@@ -20385,20 +20385,20 @@
               </a:rPr>
               <a:t>    else:                     return "NEUTRAL"</a:t>
             </a:r>
-            <a:endParaRPr lang="en-US" sz="1450" dirty="0"/>
-          </a:p>
-          <a:p>
-            <a:pPr indent="0" marL="0">
-              <a:buNone/>
-            </a:pPr>
-            <a:endParaRPr lang="en-US" sz="1450" dirty="0"/>
-          </a:p>
-          <a:p>
-            <a:pPr indent="0" marL="0">
-              <a:buNone/>
-            </a:pPr>
-            <a:r>
-              <a:rPr lang="en-US" sz="1450" dirty="0">
+            <a:endParaRPr lang="en-US" sz="1700" dirty="0"/>
+          </a:p>
+          <a:p>
+            <a:pPr indent="0" marL="0">
+              <a:buNone/>
+            </a:pPr>
+            <a:endParaRPr lang="en-US" sz="1700" dirty="0"/>
+          </a:p>
+          <a:p>
+            <a:pPr indent="0" marL="0">
+              <a:buNone/>
+            </a:pPr>
+            <a:r>
+              <a:rPr lang="en-US" sz="1700" dirty="0">
                 <a:solidFill>
                   <a:srgbClr val="FFFFFF"/>
                 </a:solidFill>
@@ -20408,14 +20408,14 @@
               </a:rPr>
               <a:t>for r in reviews:</a:t>
             </a:r>
-            <a:endParaRPr lang="en-US" sz="1450" dirty="0"/>
-          </a:p>
-          <a:p>
-            <a:pPr indent="0" marL="0">
-              <a:buNone/>
-            </a:pPr>
-            <a:r>
-              <a:rPr lang="en-US" sz="1450" dirty="0">
+            <a:endParaRPr lang="en-US" sz="1700" dirty="0"/>
+          </a:p>
+          <a:p>
+            <a:pPr indent="0" marL="0">
+              <a:buNone/>
+            </a:pPr>
+            <a:r>
+              <a:rPr lang="en-US" sz="1700" dirty="0">
                 <a:solidFill>
                   <a:srgbClr val="FFFFFF"/>
                 </a:solidFill>
@@ -20425,7 +20425,7 @@
               </a:rPr>
               <a:t>    print(f"{rule_based_sentiment(r):&gt;9} | {r}")</a:t>
             </a:r>
-            <a:endParaRPr lang="en-US" sz="1450" dirty="0"/>
+            <a:endParaRPr lang="en-US" sz="1700" dirty="0"/>
           </a:p>
         </p:txBody>
       </p:sp>
@@ -20437,8 +20437,8 @@
         </p:nvSpPr>
         <p:spPr>
           <a:xfrm>
-            <a:off x="548640" y="5669280"/>
-            <a:ext cx="11091672" cy="777240"/>
+            <a:off x="548640" y="6355080"/>
+            <a:ext cx="11091672" cy="502920"/>
           </a:xfrm>
           <a:prstGeom prst="rect">
             <a:avLst/>
@@ -20462,8 +20462,8 @@
         </p:nvSpPr>
         <p:spPr>
           <a:xfrm>
-            <a:off x="548640" y="5669280"/>
-            <a:ext cx="45720" cy="777240"/>
+            <a:off x="548640" y="6355080"/>
+            <a:ext cx="45720" cy="502920"/>
           </a:xfrm>
           <a:prstGeom prst="rect">
             <a:avLst/>
@@ -20487,8 +20487,8 @@
         </p:nvSpPr>
         <p:spPr>
           <a:xfrm>
-            <a:off x="822960" y="5715000"/>
-            <a:ext cx="10543032" cy="685800"/>
+            <a:off x="822960" y="6382512"/>
+            <a:ext cx="10543032" cy="457200"/>
           </a:xfrm>
           <a:prstGeom prst="rect">
             <a:avLst/>
@@ -20504,7 +20504,7 @@
               <a:buNone/>
             </a:pPr>
             <a:r>
-              <a:rPr lang="en-US" sz="1500" b="1" spc="500" kern="0" dirty="0">
+              <a:rPr lang="en-US" sz="1300" b="1" spc="500" kern="0" dirty="0">
                 <a:solidFill>
                   <a:srgbClr val="C8102E"/>
                 </a:solidFill>
@@ -20518,7 +20518,7 @@
               <a:buNone/>
             </a:pPr>
             <a:r>
-              <a:rPr lang="en-US" sz="1500" dirty="0">
+              <a:rPr lang="en-US" sz="1300" dirty="0">
                 <a:solidFill>
                   <a:srgbClr val="5F6B7A"/>
                 </a:solidFill>
@@ -20532,7 +20532,7 @@
               <a:buNone/>
             </a:pPr>
             <a:r>
-              <a:rPr lang="en-US" sz="1500" b="1" i="1" dirty="0">
+              <a:rPr lang="en-US" sz="1300" b="1" i="1" dirty="0">
                 <a:solidFill>
                   <a:srgbClr val="1B2A4A"/>
                 </a:solidFill>
@@ -20546,7 +20546,7 @@
               <a:buNone/>
             </a:pPr>
             <a:r>
-              <a:rPr lang="en-US" sz="1500" dirty="0">
+              <a:rPr lang="en-US" sz="1300" dirty="0">
                 <a:solidFill>
                   <a:srgbClr val="5F6B7A"/>
                 </a:solidFill>
@@ -20556,7 +20556,7 @@
               </a:rPr>
               <a:t>  ?</a:t>
             </a:r>
-            <a:endParaRPr lang="en-US" sz="1500" dirty="0"/>
+            <a:endParaRPr lang="en-US" sz="1300" dirty="0"/>
           </a:p>
         </p:txBody>
       </p:sp>
@@ -20642,7 +20642,7 @@
               <a:buNone/>
             </a:pPr>
             <a:r>
-              <a:rPr lang="en-US" sz="1600" b="1" dirty="0">
+              <a:rPr lang="en-US" sz="1700" b="1" dirty="0">
                 <a:solidFill>
                   <a:srgbClr val="FFFFFF"/>
                 </a:solidFill>
@@ -20652,7 +20652,7 @@
               </a:rPr>
               <a:t>Why Rule-Based Fails</a:t>
             </a:r>
-            <a:endParaRPr lang="en-US" sz="1600" dirty="0"/>
+            <a:endParaRPr lang="en-US" sz="1700" dirty="0"/>
           </a:p>
         </p:txBody>
       </p:sp>
@@ -20953,7 +20953,7 @@
               <a:buNone/>
             </a:pPr>
             <a:r>
-              <a:rPr lang="en-US" sz="1400" i="1" dirty="0">
+              <a:rPr lang="en-US" sz="1700" i="1" dirty="0">
                 <a:solidFill>
                   <a:srgbClr val="1B2A4A"/>
                 </a:solidFill>
@@ -20963,7 +20963,7 @@
               </a:rPr>
               <a:t>“Terrible shipping — product itself is fine.”</a:t>
             </a:r>
-            <a:endParaRPr lang="en-US" sz="1400" dirty="0"/>
+            <a:endParaRPr lang="en-US" sz="1700" dirty="0"/>
           </a:p>
         </p:txBody>
       </p:sp>
@@ -21223,7 +21223,7 @@
               <a:buNone/>
             </a:pPr>
             <a:r>
-              <a:rPr lang="en-US" sz="1400" i="1" dirty="0">
+              <a:rPr lang="en-US" sz="1700" i="1" dirty="0">
                 <a:solidFill>
                   <a:srgbClr val="1B2A4A"/>
                 </a:solidFill>
@@ -21233,7 +21233,7 @@
               </a:rPr>
               <a:t>“Not what I expected — actually really nice in person!”</a:t>
             </a:r>
-            <a:endParaRPr lang="en-US" sz="1400" dirty="0"/>
+            <a:endParaRPr lang="en-US" sz="1700" dirty="0"/>
           </a:p>
         </p:txBody>
       </p:sp>
@@ -21493,7 +21493,7 @@
               <a:buNone/>
             </a:pPr>
             <a:r>
-              <a:rPr lang="en-US" sz="1400" i="1" dirty="0">
+              <a:rPr lang="en-US" sz="1700" i="1" dirty="0">
                 <a:solidFill>
                   <a:srgbClr val="1B2A4A"/>
                 </a:solidFill>
@@ -21503,7 +21503,7 @@
               </a:rPr>
               <a:t>Every new review surfaces a new edge case.</a:t>
             </a:r>
-            <a:endParaRPr lang="en-US" sz="1400" dirty="0"/>
+            <a:endParaRPr lang="en-US" sz="1700" dirty="0"/>
           </a:p>
         </p:txBody>
       </p:sp>
@@ -21692,7 +21692,7 @@
               <a:buNone/>
             </a:pPr>
             <a:r>
-              <a:rPr lang="en-US" sz="1600" b="1" dirty="0">
+              <a:rPr lang="en-US" sz="1700" b="1" dirty="0">
                 <a:solidFill>
                   <a:srgbClr val="FFFFFF"/>
                 </a:solidFill>
@@ -21702,7 +21702,7 @@
               </a:rPr>
               <a:t>Approach 2: Machine Learning</a:t>
             </a:r>
-            <a:endParaRPr lang="en-US" sz="1600" dirty="0"/>
+            <a:endParaRPr lang="en-US" sz="1700" dirty="0"/>
           </a:p>
         </p:txBody>
       </p:sp>
@@ -22023,7 +22023,7 @@
               <a:buNone/>
             </a:pPr>
             <a:r>
-              <a:rPr lang="en-US" sz="1500" b="1" spc="500" kern="0" dirty="0">
+              <a:rPr lang="en-US" sz="1700" b="1" spc="500" kern="0" dirty="0">
                 <a:solidFill>
                   <a:srgbClr val="2C5697"/>
                 </a:solidFill>
@@ -22040,7 +22040,7 @@
               <a:buNone/>
             </a:pPr>
             <a:r>
-              <a:rPr lang="en-US" sz="1500" dirty="0">
+              <a:rPr lang="en-US" sz="1700" dirty="0">
                 <a:solidFill>
                   <a:srgbClr val="333D4D"/>
                 </a:solidFill>
@@ -22058,7 +22058,7 @@
               <a:buNone/>
             </a:pPr>
             <a:r>
-              <a:rPr lang="en-US" sz="1500" b="1" spc="500" kern="0" dirty="0">
+              <a:rPr lang="en-US" sz="1700" b="1" spc="500" kern="0" dirty="0">
                 <a:solidFill>
                   <a:srgbClr val="2C5697"/>
                 </a:solidFill>
@@ -22075,7 +22075,7 @@
               <a:buNone/>
             </a:pPr>
             <a:r>
-              <a:rPr lang="en-US" sz="1500" dirty="0">
+              <a:rPr lang="en-US" sz="1700" dirty="0">
                 <a:solidFill>
                   <a:srgbClr val="333D4D"/>
                 </a:solidFill>
@@ -22085,7 +22085,7 @@
               </a:rPr>
               <a:t>deterministic answer</a:t>
             </a:r>
-            <a:endParaRPr lang="en-US" sz="1500" dirty="0"/>
+            <a:endParaRPr lang="en-US" sz="1700" dirty="0"/>
           </a:p>
         </p:txBody>
       </p:sp>
@@ -22262,7 +22262,7 @@
               <a:buNone/>
             </a:pPr>
             <a:r>
-              <a:rPr lang="en-US" sz="1500" b="1" spc="500" kern="0" dirty="0">
+              <a:rPr lang="en-US" sz="1700" b="1" spc="500" kern="0" dirty="0">
                 <a:solidFill>
                   <a:srgbClr val="C8102E"/>
                 </a:solidFill>
@@ -22279,7 +22279,7 @@
               <a:buNone/>
             </a:pPr>
             <a:r>
-              <a:rPr lang="en-US" sz="1500" dirty="0">
+              <a:rPr lang="en-US" sz="1700" dirty="0">
                 <a:solidFill>
                   <a:srgbClr val="333D4D"/>
                 </a:solidFill>
@@ -22297,7 +22297,7 @@
               <a:buNone/>
             </a:pPr>
             <a:r>
-              <a:rPr lang="en-US" sz="1500" b="1" spc="500" kern="0" dirty="0">
+              <a:rPr lang="en-US" sz="1700" b="1" spc="500" kern="0" dirty="0">
                 <a:solidFill>
                   <a:srgbClr val="C8102E"/>
                 </a:solidFill>
@@ -22314,7 +22314,7 @@
               <a:buNone/>
             </a:pPr>
             <a:r>
-              <a:rPr lang="en-US" sz="1500" dirty="0">
+              <a:rPr lang="en-US" sz="1700" dirty="0">
                 <a:solidFill>
                   <a:srgbClr val="333D4D"/>
                 </a:solidFill>
@@ -22324,7 +22324,7 @@
               </a:rPr>
               <a:t>prediction + confidence</a:t>
             </a:r>
-            <a:endParaRPr lang="en-US" sz="1500" dirty="0"/>
+            <a:endParaRPr lang="en-US" sz="1700" dirty="0"/>
           </a:p>
         </p:txBody>
       </p:sp>
